--- a/AI Podcast Transcription.pptx
+++ b/AI Podcast Transcription.pptx
@@ -4,6 +4,9 @@
   <p:sldMasterIdLst>
     <p:sldMasterId id="2147483678" r:id="rId1"/>
   </p:sldMasterIdLst>
+  <p:notesMasterIdLst>
+    <p:notesMasterId r:id="rId15"/>
+  </p:notesMasterIdLst>
   <p:sldIdLst>
     <p:sldId id="257" r:id="rId2"/>
     <p:sldId id="258" r:id="rId3"/>
@@ -11,12 +14,13 @@
     <p:sldId id="260" r:id="rId5"/>
     <p:sldId id="261" r:id="rId6"/>
     <p:sldId id="262" r:id="rId7"/>
-    <p:sldId id="263" r:id="rId8"/>
-    <p:sldId id="264" r:id="rId9"/>
-    <p:sldId id="265" r:id="rId10"/>
-    <p:sldId id="266" r:id="rId11"/>
-    <p:sldId id="267" r:id="rId12"/>
-    <p:sldId id="268" r:id="rId13"/>
+    <p:sldId id="269" r:id="rId8"/>
+    <p:sldId id="263" r:id="rId9"/>
+    <p:sldId id="264" r:id="rId10"/>
+    <p:sldId id="265" r:id="rId11"/>
+    <p:sldId id="266" r:id="rId12"/>
+    <p:sldId id="267" r:id="rId13"/>
+    <p:sldId id="268" r:id="rId14"/>
   </p:sldIdLst>
   <p:sldSz cx="12192000" cy="6858000"/>
   <p:notesSz cx="6858000" cy="9144000"/>
@@ -115,7 +119,446 @@
       </a:defRPr>
     </a:lvl9pPr>
   </p:defaultTextStyle>
+  <p:extLst>
+    <p:ext uri="{EFAFB233-063F-42B5-8137-9DF3F51BA10A}">
+      <p15:sldGuideLst xmlns:p15="http://schemas.microsoft.com/office/powerpoint/2012/main"/>
+    </p:ext>
+  </p:extLst>
 </p:presentation>
+</file>
+
+<file path=ppt/notesMasters/notesMaster1.xml><?xml version="1.0" encoding="utf-8"?>
+<p:notesMaster xmlns:a="http://schemas.openxmlformats.org/drawingml/2006/main" xmlns:r="http://schemas.openxmlformats.org/officeDocument/2006/relationships" xmlns:p="http://schemas.openxmlformats.org/presentationml/2006/main">
+  <p:cSld>
+    <p:bg>
+      <p:bgRef idx="1001">
+        <a:schemeClr val="bg1"/>
+      </p:bgRef>
+    </p:bg>
+    <p:spTree>
+      <p:nvGrpSpPr>
+        <p:cNvPr id="1" name=""/>
+        <p:cNvGrpSpPr/>
+        <p:nvPr/>
+      </p:nvGrpSpPr>
+      <p:grpSpPr>
+        <a:xfrm>
+          <a:off x="0" y="0"/>
+          <a:ext cx="0" cy="0"/>
+          <a:chOff x="0" y="0"/>
+          <a:chExt cx="0" cy="0"/>
+        </a:xfrm>
+      </p:grpSpPr>
+      <p:sp>
+        <p:nvSpPr>
+          <p:cNvPr id="2" name="Header Placeholder 1"/>
+          <p:cNvSpPr>
+            <a:spLocks noGrp="1"/>
+          </p:cNvSpPr>
+          <p:nvPr>
+            <p:ph type="hdr" sz="quarter"/>
+          </p:nvPr>
+        </p:nvSpPr>
+        <p:spPr>
+          <a:xfrm>
+            <a:off x="0" y="0"/>
+            <a:ext cx="2971800" cy="458788"/>
+          </a:xfrm>
+          <a:prstGeom prst="rect">
+            <a:avLst/>
+          </a:prstGeom>
+        </p:spPr>
+        <p:txBody>
+          <a:bodyPr vert="horz" lIns="91440" tIns="45720" rIns="91440" bIns="45720" rtlCol="0"/>
+          <a:lstStyle>
+            <a:lvl1pPr algn="l">
+              <a:defRPr sz="1200"/>
+            </a:lvl1pPr>
+          </a:lstStyle>
+          <a:p>
+            <a:endParaRPr lang="en-IN"/>
+          </a:p>
+        </p:txBody>
+      </p:sp>
+      <p:sp>
+        <p:nvSpPr>
+          <p:cNvPr id="3" name="Date Placeholder 2"/>
+          <p:cNvSpPr>
+            <a:spLocks noGrp="1"/>
+          </p:cNvSpPr>
+          <p:nvPr>
+            <p:ph type="dt" idx="1"/>
+          </p:nvPr>
+        </p:nvSpPr>
+        <p:spPr>
+          <a:xfrm>
+            <a:off x="3884613" y="0"/>
+            <a:ext cx="2971800" cy="458788"/>
+          </a:xfrm>
+          <a:prstGeom prst="rect">
+            <a:avLst/>
+          </a:prstGeom>
+        </p:spPr>
+        <p:txBody>
+          <a:bodyPr vert="horz" lIns="91440" tIns="45720" rIns="91440" bIns="45720" rtlCol="0"/>
+          <a:lstStyle>
+            <a:lvl1pPr algn="r">
+              <a:defRPr sz="1200"/>
+            </a:lvl1pPr>
+          </a:lstStyle>
+          <a:p>
+            <a:fld id="{4B56F2E0-F51F-49A1-A75E-91DC1C500106}" type="datetimeFigureOut">
+              <a:rPr lang="en-IN" smtClean="0"/>
+              <a:t>20-01-2026</a:t>
+            </a:fld>
+            <a:endParaRPr lang="en-IN"/>
+          </a:p>
+        </p:txBody>
+      </p:sp>
+      <p:sp>
+        <p:nvSpPr>
+          <p:cNvPr id="4" name="Slide Image Placeholder 3"/>
+          <p:cNvSpPr>
+            <a:spLocks noGrp="1" noRot="1" noChangeAspect="1"/>
+          </p:cNvSpPr>
+          <p:nvPr>
+            <p:ph type="sldImg" idx="2"/>
+          </p:nvPr>
+        </p:nvSpPr>
+        <p:spPr>
+          <a:xfrm>
+            <a:off x="685800" y="1143000"/>
+            <a:ext cx="5486400" cy="3086100"/>
+          </a:xfrm>
+          <a:prstGeom prst="rect">
+            <a:avLst/>
+          </a:prstGeom>
+          <a:noFill/>
+          <a:ln w="12700">
+            <a:solidFill>
+              <a:prstClr val="black"/>
+            </a:solidFill>
+          </a:ln>
+        </p:spPr>
+        <p:txBody>
+          <a:bodyPr vert="horz" lIns="91440" tIns="45720" rIns="91440" bIns="45720" rtlCol="0" anchor="ctr"/>
+          <a:lstStyle/>
+          <a:p>
+            <a:endParaRPr lang="en-IN"/>
+          </a:p>
+        </p:txBody>
+      </p:sp>
+      <p:sp>
+        <p:nvSpPr>
+          <p:cNvPr id="5" name="Notes Placeholder 4"/>
+          <p:cNvSpPr>
+            <a:spLocks noGrp="1"/>
+          </p:cNvSpPr>
+          <p:nvPr>
+            <p:ph type="body" sz="quarter" idx="3"/>
+          </p:nvPr>
+        </p:nvSpPr>
+        <p:spPr>
+          <a:xfrm>
+            <a:off x="685800" y="4400550"/>
+            <a:ext cx="5486400" cy="3600450"/>
+          </a:xfrm>
+          <a:prstGeom prst="rect">
+            <a:avLst/>
+          </a:prstGeom>
+        </p:spPr>
+        <p:txBody>
+          <a:bodyPr vert="horz" lIns="91440" tIns="45720" rIns="91440" bIns="45720" rtlCol="0"/>
+          <a:lstStyle/>
+          <a:p>
+            <a:pPr lvl="0"/>
+            <a:r>
+              <a:rPr lang="en-US"/>
+              <a:t>Click to edit Master text styles</a:t>
+            </a:r>
+          </a:p>
+          <a:p>
+            <a:pPr lvl="1"/>
+            <a:r>
+              <a:rPr lang="en-US"/>
+              <a:t>Second level</a:t>
+            </a:r>
+          </a:p>
+          <a:p>
+            <a:pPr lvl="2"/>
+            <a:r>
+              <a:rPr lang="en-US"/>
+              <a:t>Third level</a:t>
+            </a:r>
+          </a:p>
+          <a:p>
+            <a:pPr lvl="3"/>
+            <a:r>
+              <a:rPr lang="en-US"/>
+              <a:t>Fourth level</a:t>
+            </a:r>
+          </a:p>
+          <a:p>
+            <a:pPr lvl="4"/>
+            <a:r>
+              <a:rPr lang="en-US"/>
+              <a:t>Fifth level</a:t>
+            </a:r>
+            <a:endParaRPr lang="en-IN"/>
+          </a:p>
+        </p:txBody>
+      </p:sp>
+      <p:sp>
+        <p:nvSpPr>
+          <p:cNvPr id="6" name="Footer Placeholder 5"/>
+          <p:cNvSpPr>
+            <a:spLocks noGrp="1"/>
+          </p:cNvSpPr>
+          <p:nvPr>
+            <p:ph type="ftr" sz="quarter" idx="4"/>
+          </p:nvPr>
+        </p:nvSpPr>
+        <p:spPr>
+          <a:xfrm>
+            <a:off x="0" y="8685213"/>
+            <a:ext cx="2971800" cy="458787"/>
+          </a:xfrm>
+          <a:prstGeom prst="rect">
+            <a:avLst/>
+          </a:prstGeom>
+        </p:spPr>
+        <p:txBody>
+          <a:bodyPr vert="horz" lIns="91440" tIns="45720" rIns="91440" bIns="45720" rtlCol="0" anchor="b"/>
+          <a:lstStyle>
+            <a:lvl1pPr algn="l">
+              <a:defRPr sz="1200"/>
+            </a:lvl1pPr>
+          </a:lstStyle>
+          <a:p>
+            <a:endParaRPr lang="en-IN"/>
+          </a:p>
+        </p:txBody>
+      </p:sp>
+      <p:sp>
+        <p:nvSpPr>
+          <p:cNvPr id="7" name="Slide Number Placeholder 6"/>
+          <p:cNvSpPr>
+            <a:spLocks noGrp="1"/>
+          </p:cNvSpPr>
+          <p:nvPr>
+            <p:ph type="sldNum" sz="quarter" idx="5"/>
+          </p:nvPr>
+        </p:nvSpPr>
+        <p:spPr>
+          <a:xfrm>
+            <a:off x="3884613" y="8685213"/>
+            <a:ext cx="2971800" cy="458787"/>
+          </a:xfrm>
+          <a:prstGeom prst="rect">
+            <a:avLst/>
+          </a:prstGeom>
+        </p:spPr>
+        <p:txBody>
+          <a:bodyPr vert="horz" lIns="91440" tIns="45720" rIns="91440" bIns="45720" rtlCol="0" anchor="b"/>
+          <a:lstStyle>
+            <a:lvl1pPr algn="r">
+              <a:defRPr sz="1200"/>
+            </a:lvl1pPr>
+          </a:lstStyle>
+          <a:p>
+            <a:fld id="{3E4650CF-081C-4909-A3EE-4415CB887014}" type="slidenum">
+              <a:rPr lang="en-IN" smtClean="0"/>
+              <a:t>‹#›</a:t>
+            </a:fld>
+            <a:endParaRPr lang="en-IN"/>
+          </a:p>
+        </p:txBody>
+      </p:sp>
+    </p:spTree>
+    <p:extLst>
+      <p:ext uri="{BB962C8B-B14F-4D97-AF65-F5344CB8AC3E}">
+        <p14:creationId xmlns:p14="http://schemas.microsoft.com/office/powerpoint/2010/main" val="2953319973"/>
+      </p:ext>
+    </p:extLst>
+  </p:cSld>
+  <p:clrMap bg1="lt1" tx1="dk1" bg2="lt2" tx2="dk2" accent1="accent1" accent2="accent2" accent3="accent3" accent4="accent4" accent5="accent5" accent6="accent6" hlink="hlink" folHlink="folHlink"/>
+  <p:notesStyle>
+    <a:lvl1pPr marL="0" algn="l" defTabSz="914400" rtl="0" eaLnBrk="1" latinLnBrk="0" hangingPunct="1">
+      <a:defRPr sz="1200" kern="1200">
+        <a:solidFill>
+          <a:schemeClr val="tx1"/>
+        </a:solidFill>
+        <a:latin typeface="+mn-lt"/>
+        <a:ea typeface="+mn-ea"/>
+        <a:cs typeface="+mn-cs"/>
+      </a:defRPr>
+    </a:lvl1pPr>
+    <a:lvl2pPr marL="457200" algn="l" defTabSz="914400" rtl="0" eaLnBrk="1" latinLnBrk="0" hangingPunct="1">
+      <a:defRPr sz="1200" kern="1200">
+        <a:solidFill>
+          <a:schemeClr val="tx1"/>
+        </a:solidFill>
+        <a:latin typeface="+mn-lt"/>
+        <a:ea typeface="+mn-ea"/>
+        <a:cs typeface="+mn-cs"/>
+      </a:defRPr>
+    </a:lvl2pPr>
+    <a:lvl3pPr marL="914400" algn="l" defTabSz="914400" rtl="0" eaLnBrk="1" latinLnBrk="0" hangingPunct="1">
+      <a:defRPr sz="1200" kern="1200">
+        <a:solidFill>
+          <a:schemeClr val="tx1"/>
+        </a:solidFill>
+        <a:latin typeface="+mn-lt"/>
+        <a:ea typeface="+mn-ea"/>
+        <a:cs typeface="+mn-cs"/>
+      </a:defRPr>
+    </a:lvl3pPr>
+    <a:lvl4pPr marL="1371600" algn="l" defTabSz="914400" rtl="0" eaLnBrk="1" latinLnBrk="0" hangingPunct="1">
+      <a:defRPr sz="1200" kern="1200">
+        <a:solidFill>
+          <a:schemeClr val="tx1"/>
+        </a:solidFill>
+        <a:latin typeface="+mn-lt"/>
+        <a:ea typeface="+mn-ea"/>
+        <a:cs typeface="+mn-cs"/>
+      </a:defRPr>
+    </a:lvl4pPr>
+    <a:lvl5pPr marL="1828800" algn="l" defTabSz="914400" rtl="0" eaLnBrk="1" latinLnBrk="0" hangingPunct="1">
+      <a:defRPr sz="1200" kern="1200">
+        <a:solidFill>
+          <a:schemeClr val="tx1"/>
+        </a:solidFill>
+        <a:latin typeface="+mn-lt"/>
+        <a:ea typeface="+mn-ea"/>
+        <a:cs typeface="+mn-cs"/>
+      </a:defRPr>
+    </a:lvl5pPr>
+    <a:lvl6pPr marL="2286000" algn="l" defTabSz="914400" rtl="0" eaLnBrk="1" latinLnBrk="0" hangingPunct="1">
+      <a:defRPr sz="1200" kern="1200">
+        <a:solidFill>
+          <a:schemeClr val="tx1"/>
+        </a:solidFill>
+        <a:latin typeface="+mn-lt"/>
+        <a:ea typeface="+mn-ea"/>
+        <a:cs typeface="+mn-cs"/>
+      </a:defRPr>
+    </a:lvl6pPr>
+    <a:lvl7pPr marL="2743200" algn="l" defTabSz="914400" rtl="0" eaLnBrk="1" latinLnBrk="0" hangingPunct="1">
+      <a:defRPr sz="1200" kern="1200">
+        <a:solidFill>
+          <a:schemeClr val="tx1"/>
+        </a:solidFill>
+        <a:latin typeface="+mn-lt"/>
+        <a:ea typeface="+mn-ea"/>
+        <a:cs typeface="+mn-cs"/>
+      </a:defRPr>
+    </a:lvl7pPr>
+    <a:lvl8pPr marL="3200400" algn="l" defTabSz="914400" rtl="0" eaLnBrk="1" latinLnBrk="0" hangingPunct="1">
+      <a:defRPr sz="1200" kern="1200">
+        <a:solidFill>
+          <a:schemeClr val="tx1"/>
+        </a:solidFill>
+        <a:latin typeface="+mn-lt"/>
+        <a:ea typeface="+mn-ea"/>
+        <a:cs typeface="+mn-cs"/>
+      </a:defRPr>
+    </a:lvl8pPr>
+    <a:lvl9pPr marL="3657600" algn="l" defTabSz="914400" rtl="0" eaLnBrk="1" latinLnBrk="0" hangingPunct="1">
+      <a:defRPr sz="1200" kern="1200">
+        <a:solidFill>
+          <a:schemeClr val="tx1"/>
+        </a:solidFill>
+        <a:latin typeface="+mn-lt"/>
+        <a:ea typeface="+mn-ea"/>
+        <a:cs typeface="+mn-cs"/>
+      </a:defRPr>
+    </a:lvl9pPr>
+  </p:notesStyle>
+</p:notesMaster>
+</file>
+
+<file path=ppt/notesSlides/notesSlide1.xml><?xml version="1.0" encoding="utf-8"?>
+<p:notes xmlns:a="http://schemas.openxmlformats.org/drawingml/2006/main" xmlns:r="http://schemas.openxmlformats.org/officeDocument/2006/relationships" xmlns:p="http://schemas.openxmlformats.org/presentationml/2006/main">
+  <p:cSld>
+    <p:spTree>
+      <p:nvGrpSpPr>
+        <p:cNvPr id="1" name=""/>
+        <p:cNvGrpSpPr/>
+        <p:nvPr/>
+      </p:nvGrpSpPr>
+      <p:grpSpPr>
+        <a:xfrm>
+          <a:off x="0" y="0"/>
+          <a:ext cx="0" cy="0"/>
+          <a:chOff x="0" y="0"/>
+          <a:chExt cx="0" cy="0"/>
+        </a:xfrm>
+      </p:grpSpPr>
+      <p:sp>
+        <p:nvSpPr>
+          <p:cNvPr id="2" name="Slide Image Placeholder 1"/>
+          <p:cNvSpPr>
+            <a:spLocks noGrp="1" noRot="1" noChangeAspect="1"/>
+          </p:cNvSpPr>
+          <p:nvPr>
+            <p:ph type="sldImg"/>
+          </p:nvPr>
+        </p:nvSpPr>
+        <p:spPr/>
+      </p:sp>
+      <p:sp>
+        <p:nvSpPr>
+          <p:cNvPr id="3" name="Notes Placeholder 2"/>
+          <p:cNvSpPr>
+            <a:spLocks noGrp="1"/>
+          </p:cNvSpPr>
+          <p:nvPr>
+            <p:ph type="body" idx="1"/>
+          </p:nvPr>
+        </p:nvSpPr>
+        <p:spPr/>
+        <p:txBody>
+          <a:bodyPr/>
+          <a:lstStyle/>
+          <a:p>
+            <a:endParaRPr lang="en-IN" dirty="0"/>
+          </a:p>
+        </p:txBody>
+      </p:sp>
+      <p:sp>
+        <p:nvSpPr>
+          <p:cNvPr id="4" name="Slide Number Placeholder 3"/>
+          <p:cNvSpPr>
+            <a:spLocks noGrp="1"/>
+          </p:cNvSpPr>
+          <p:nvPr>
+            <p:ph type="sldNum" sz="quarter" idx="5"/>
+          </p:nvPr>
+        </p:nvSpPr>
+        <p:spPr/>
+        <p:txBody>
+          <a:bodyPr/>
+          <a:lstStyle/>
+          <a:p>
+            <a:fld id="{3E4650CF-081C-4909-A3EE-4415CB887014}" type="slidenum">
+              <a:rPr lang="en-IN" smtClean="0"/>
+              <a:t>2</a:t>
+            </a:fld>
+            <a:endParaRPr lang="en-IN"/>
+          </a:p>
+        </p:txBody>
+      </p:sp>
+    </p:spTree>
+    <p:extLst>
+      <p:ext uri="{BB962C8B-B14F-4D97-AF65-F5344CB8AC3E}">
+        <p14:creationId xmlns:p14="http://schemas.microsoft.com/office/powerpoint/2010/main" val="3889140672"/>
+      </p:ext>
+    </p:extLst>
+  </p:cSld>
+  <p:clrMapOvr>
+    <a:masterClrMapping/>
+  </p:clrMapOvr>
+</p:notes>
 </file>
 
 <file path=ppt/slideLayouts/slideLayout1.xml><?xml version="1.0" encoding="utf-8"?>
@@ -257,7 +700,7 @@
           <a:p>
             <a:fld id="{D3F9057E-C051-4F65-BE10-56A43B6BBA55}" type="datetimeFigureOut">
               <a:rPr lang="en-IN" smtClean="0"/>
-              <a:t>14-01-2026</a:t>
+              <a:t>20-01-2026</a:t>
             </a:fld>
             <a:endParaRPr lang="en-IN"/>
           </a:p>
@@ -468,7 +911,7 @@
           <a:p>
             <a:fld id="{D3F9057E-C051-4F65-BE10-56A43B6BBA55}" type="datetimeFigureOut">
               <a:rPr lang="en-IN" smtClean="0"/>
-              <a:t>14-01-2026</a:t>
+              <a:t>20-01-2026</a:t>
             </a:fld>
             <a:endParaRPr lang="en-IN"/>
           </a:p>
@@ -683,7 +1126,7 @@
           <a:p>
             <a:fld id="{D3F9057E-C051-4F65-BE10-56A43B6BBA55}" type="datetimeFigureOut">
               <a:rPr lang="en-IN" smtClean="0"/>
-              <a:t>14-01-2026</a:t>
+              <a:t>20-01-2026</a:t>
             </a:fld>
             <a:endParaRPr lang="en-IN"/>
           </a:p>
@@ -884,7 +1327,7 @@
           <a:p>
             <a:fld id="{D3F9057E-C051-4F65-BE10-56A43B6BBA55}" type="datetimeFigureOut">
               <a:rPr lang="en-IN" smtClean="0"/>
-              <a:t>14-01-2026</a:t>
+              <a:t>20-01-2026</a:t>
             </a:fld>
             <a:endParaRPr lang="en-IN"/>
           </a:p>
@@ -1163,7 +1606,7 @@
           <a:p>
             <a:fld id="{D3F9057E-C051-4F65-BE10-56A43B6BBA55}" type="datetimeFigureOut">
               <a:rPr lang="en-IN" smtClean="0"/>
-              <a:t>14-01-2026</a:t>
+              <a:t>20-01-2026</a:t>
             </a:fld>
             <a:endParaRPr lang="en-IN"/>
           </a:p>
@@ -1431,7 +1874,7 @@
           <a:p>
             <a:fld id="{D3F9057E-C051-4F65-BE10-56A43B6BBA55}" type="datetimeFigureOut">
               <a:rPr lang="en-IN" smtClean="0"/>
-              <a:t>14-01-2026</a:t>
+              <a:t>20-01-2026</a:t>
             </a:fld>
             <a:endParaRPr lang="en-IN"/>
           </a:p>
@@ -1847,7 +2290,7 @@
           <a:p>
             <a:fld id="{D3F9057E-C051-4F65-BE10-56A43B6BBA55}" type="datetimeFigureOut">
               <a:rPr lang="en-IN" smtClean="0"/>
-              <a:t>14-01-2026</a:t>
+              <a:t>20-01-2026</a:t>
             </a:fld>
             <a:endParaRPr lang="en-IN"/>
           </a:p>
@@ -1996,7 +2439,7 @@
           <a:p>
             <a:fld id="{D3F9057E-C051-4F65-BE10-56A43B6BBA55}" type="datetimeFigureOut">
               <a:rPr lang="en-IN" smtClean="0"/>
-              <a:t>14-01-2026</a:t>
+              <a:t>20-01-2026</a:t>
             </a:fld>
             <a:endParaRPr lang="en-IN"/>
           </a:p>
@@ -2122,7 +2565,7 @@
           <a:p>
             <a:fld id="{D3F9057E-C051-4F65-BE10-56A43B6BBA55}" type="datetimeFigureOut">
               <a:rPr lang="en-IN" smtClean="0"/>
-              <a:t>14-01-2026</a:t>
+              <a:t>20-01-2026</a:t>
             </a:fld>
             <a:endParaRPr lang="en-IN"/>
           </a:p>
@@ -2373,7 +2816,7 @@
           <a:p>
             <a:fld id="{D3F9057E-C051-4F65-BE10-56A43B6BBA55}" type="datetimeFigureOut">
               <a:rPr lang="en-IN" smtClean="0"/>
-              <a:t>14-01-2026</a:t>
+              <a:t>20-01-2026</a:t>
             </a:fld>
             <a:endParaRPr lang="en-IN"/>
           </a:p>
@@ -2818,7 +3261,7 @@
           <a:p>
             <a:fld id="{D3F9057E-C051-4F65-BE10-56A43B6BBA55}" type="datetimeFigureOut">
               <a:rPr lang="en-IN" smtClean="0"/>
-              <a:t>14-01-2026</a:t>
+              <a:t>20-01-2026</a:t>
             </a:fld>
             <a:endParaRPr lang="en-IN"/>
           </a:p>
@@ -3145,7 +3588,7 @@
           <a:p>
             <a:fld id="{D3F9057E-C051-4F65-BE10-56A43B6BBA55}" type="datetimeFigureOut">
               <a:rPr lang="en-IN" smtClean="0"/>
-              <a:t>14-01-2026</a:t>
+              <a:t>20-01-2026</a:t>
             </a:fld>
             <a:endParaRPr lang="en-IN"/>
           </a:p>
@@ -3645,8 +4088,8 @@
         </p:nvSpPr>
         <p:spPr>
           <a:xfrm>
-            <a:off x="968829" y="487822"/>
-            <a:ext cx="11016342" cy="1323439"/>
+            <a:off x="1493485" y="472832"/>
+            <a:ext cx="11016342" cy="1169551"/>
           </a:xfrm>
           <a:prstGeom prst="rect">
             <a:avLst/>
@@ -3660,12 +4103,11 @@
           <a:lstStyle/>
           <a:p>
             <a:r>
-              <a:rPr lang="en-IN" sz="4000" dirty="0">
-                <a:latin typeface="Eras Bold ITC" panose="020B0907030504020204" pitchFamily="34" charset="0"/>
+              <a:rPr lang="en-IN" sz="3500" dirty="0">
+                <a:latin typeface="Berlin Sans FB Demi" panose="020E0802020502020306" pitchFamily="34" charset="0"/>
               </a:rPr>
               <a:t>Automated-Podcast-Transcription-and-Topic-Segmentation</a:t>
             </a:r>
-            <a:endParaRPr lang="en-IN" sz="4000" dirty="0"/>
           </a:p>
         </p:txBody>
       </p:sp>
@@ -3724,13 +4166,13 @@
   <p:clrMapOvr>
     <a:masterClrMapping/>
   </p:clrMapOvr>
-  <mc:AlternateContent xmlns:mc="http://schemas.openxmlformats.org/markup-compatibility/2006">
-    <mc:Choice xmlns:p14="http://schemas.microsoft.com/office/powerpoint/2010/main" Requires="p14">
+  <mc:AlternateContent xmlns:mc="http://schemas.openxmlformats.org/markup-compatibility/2006" xmlns:p14="http://schemas.microsoft.com/office/powerpoint/2010/main">
+    <mc:Choice Requires="p14">
       <p:transition spd="slow" p14:dur="1500">
         <p:split orient="vert"/>
       </p:transition>
     </mc:Choice>
-    <mc:Fallback>
+    <mc:Fallback xmlns="">
       <p:transition spd="slow">
         <p:split orient="vert"/>
       </p:transition>
@@ -3761,7 +4203,7 @@
           <p:cNvPr id="3" name="TextBox 2">
             <a:extLst>
               <a:ext uri="{FF2B5EF4-FFF2-40B4-BE49-F238E27FC236}">
-                <a16:creationId xmlns:a16="http://schemas.microsoft.com/office/drawing/2014/main" id="{207CA6CB-5CB1-5475-40B6-521179112A08}"/>
+                <a16:creationId xmlns:a16="http://schemas.microsoft.com/office/drawing/2014/main" id="{0E23BC8E-4EA9-B266-6897-2691C7EDAB47}"/>
               </a:ext>
             </a:extLst>
           </p:cNvPr>
@@ -3770,8 +4212,8 @@
         </p:nvSpPr>
         <p:spPr>
           <a:xfrm>
-            <a:off x="266074" y="280027"/>
-            <a:ext cx="6284627" cy="630942"/>
+            <a:off x="356019" y="175698"/>
+            <a:ext cx="6108492" cy="630942"/>
           </a:xfrm>
           <a:prstGeom prst="rect">
             <a:avLst/>
@@ -3786,117 +4228,526 @@
           <a:p>
             <a:r>
               <a:rPr lang="en-IN" sz="3500" dirty="0"/>
-              <a:t>Future Scope :-</a:t>
-            </a:r>
-          </a:p>
-        </p:txBody>
-      </p:sp>
-      <p:sp>
-        <p:nvSpPr>
-          <p:cNvPr id="5" name="TextBox 4">
+              <a:t>Testing &amp; Validation :-</a:t>
+            </a:r>
+          </a:p>
+        </p:txBody>
+      </p:sp>
+      <p:sp>
+        <p:nvSpPr>
+          <p:cNvPr id="4" name="Rectangle 1">
             <a:extLst>
               <a:ext uri="{FF2B5EF4-FFF2-40B4-BE49-F238E27FC236}">
-                <a16:creationId xmlns:a16="http://schemas.microsoft.com/office/drawing/2014/main" id="{8CD27B44-CFAB-91E2-D464-C92364157179}"/>
+                <a16:creationId xmlns:a16="http://schemas.microsoft.com/office/drawing/2014/main" id="{A4F5A70B-8FCC-5878-AA29-0F4D3B930F13}"/>
               </a:ext>
             </a:extLst>
           </p:cNvPr>
-          <p:cNvSpPr txBox="1"/>
+          <p:cNvSpPr>
+            <a:spLocks noChangeArrowheads="1"/>
+          </p:cNvSpPr>
           <p:nvPr/>
         </p:nvSpPr>
-        <p:spPr>
+        <p:spPr bwMode="auto">
           <a:xfrm>
-            <a:off x="577745" y="1409077"/>
-            <a:ext cx="11036510" cy="2785378"/>
+            <a:off x="600859" y="736115"/>
+            <a:ext cx="11727304" cy="5770811"/>
           </a:xfrm>
           <a:prstGeom prst="rect">
             <a:avLst/>
           </a:prstGeom>
           <a:noFill/>
+          <a:ln>
+            <a:noFill/>
+          </a:ln>
+          <a:effectLst/>
+          <a:extLst>
+            <a:ext uri="{909E8E84-426E-40DD-AFC4-6F175D3DCCD1}">
+              <a14:hiddenFill xmlns:a14="http://schemas.microsoft.com/office/drawing/2010/main">
+                <a:solidFill>
+                  <a:schemeClr val="accent1"/>
+                </a:solidFill>
+              </a14:hiddenFill>
+            </a:ext>
+            <a:ext uri="{91240B29-F687-4F45-9708-019B960494DF}">
+              <a14:hiddenLine xmlns:a14="http://schemas.microsoft.com/office/drawing/2010/main" w="9525">
+                <a:solidFill>
+                  <a:schemeClr val="tx1"/>
+                </a:solidFill>
+                <a:miter lim="800000"/>
+                <a:headEnd/>
+                <a:tailEnd/>
+              </a14:hiddenLine>
+            </a:ext>
+            <a:ext uri="{AF507438-7753-43E0-B8FC-AC1667EBCBE1}">
+              <a14:hiddenEffects xmlns:a14="http://schemas.microsoft.com/office/drawing/2010/main">
+                <a:effectLst>
+                  <a:outerShdw dist="35921" dir="2700000" algn="ctr" rotWithShape="0">
+                    <a:schemeClr val="bg2"/>
+                  </a:outerShdw>
+                </a:effectLst>
+              </a14:hiddenEffects>
+            </a:ext>
+          </a:extLst>
         </p:spPr>
         <p:txBody>
-          <a:bodyPr wrap="square">
+          <a:bodyPr vert="horz" wrap="square" lIns="91440" tIns="45720" rIns="91440" bIns="45720" numCol="1" anchor="ctr" anchorCtr="0" compatLnSpc="1">
+            <a:prstTxWarp prst="textNoShape">
+              <a:avLst/>
+            </a:prstTxWarp>
             <a:spAutoFit/>
           </a:bodyPr>
           <a:lstStyle/>
           <a:p>
-            <a:pPr>
-              <a:buFont typeface="Arial" panose="020B0604020202020204" pitchFamily="34" charset="0"/>
+            <a:pPr marL="0" marR="0" lvl="0" indent="0" algn="l" defTabSz="914400" rtl="0" eaLnBrk="0" fontAlgn="base" latinLnBrk="0" hangingPunct="0">
+              <a:lnSpc>
+                <a:spcPct val="100000"/>
+              </a:lnSpc>
+              <a:spcBef>
+                <a:spcPct val="0"/>
+              </a:spcBef>
+              <a:spcAft>
+                <a:spcPct val="0"/>
+              </a:spcAft>
+              <a:buClrTx/>
+              <a:buSzTx/>
+              <a:buFontTx/>
               <a:buChar char="•"/>
+              <a:tabLst/>
             </a:pPr>
             <a:r>
-              <a:rPr lang="en-US" sz="2500" b="1" dirty="0"/>
-              <a:t>Character </a:t>
-            </a:r>
-            <a:r>
-              <a:rPr lang="en-US" sz="2500" b="1" dirty="0" err="1"/>
-              <a:t>Diarization</a:t>
-            </a:r>
-            <a:r>
-              <a:rPr lang="en-US" sz="2500" b="1" dirty="0"/>
-              <a:t>:</a:t>
-            </a:r>
-            <a:r>
-              <a:rPr lang="en-US" sz="2500" dirty="0"/>
-              <a:t> Distinguishing between the Narrator, Holmes, and Watson (Speaker A vs. Speaker B).</a:t>
-            </a:r>
-          </a:p>
-          <a:p>
-            <a:endParaRPr lang="en-US" sz="2500" dirty="0"/>
-          </a:p>
-          <a:p>
-            <a:pPr>
-              <a:buFont typeface="Arial" panose="020B0604020202020204" pitchFamily="34" charset="0"/>
+              <a:rPr kumimoji="0" lang="en-US" altLang="en-US" sz="2700" b="1" i="0" u="none" strike="noStrike" cap="none" normalizeH="0" baseline="0" dirty="0">
+                <a:ln>
+                  <a:noFill/>
+                </a:ln>
+                <a:solidFill>
+                  <a:schemeClr val="tx1"/>
+                </a:solidFill>
+                <a:effectLst/>
+                <a:latin typeface="Gill Sans MT(body)"/>
+              </a:rPr>
+              <a:t>Methodology:</a:t>
+            </a:r>
+          </a:p>
+          <a:p>
+            <a:pPr marL="0" marR="0" lvl="0" indent="0" algn="l" defTabSz="914400" rtl="0" eaLnBrk="0" fontAlgn="base" latinLnBrk="0" hangingPunct="0">
+              <a:lnSpc>
+                <a:spcPct val="100000"/>
+              </a:lnSpc>
+              <a:spcBef>
+                <a:spcPct val="0"/>
+              </a:spcBef>
+              <a:spcAft>
+                <a:spcPct val="0"/>
+              </a:spcAft>
+              <a:buClrTx/>
+              <a:buSzTx/>
+              <a:tabLst/>
+            </a:pPr>
+            <a:endParaRPr kumimoji="0" lang="en-US" altLang="en-US" sz="2700" b="0" i="0" u="none" strike="noStrike" cap="none" normalizeH="0" baseline="0" dirty="0">
+              <a:ln>
+                <a:noFill/>
+              </a:ln>
+              <a:solidFill>
+                <a:schemeClr val="tx1"/>
+              </a:solidFill>
+              <a:effectLst/>
+              <a:latin typeface="Gill Sans MT(body)"/>
+            </a:endParaRPr>
+          </a:p>
+          <a:p>
+            <a:pPr marL="0" marR="0" lvl="0" indent="0" algn="l" defTabSz="914400" rtl="0" eaLnBrk="0" fontAlgn="base" latinLnBrk="0" hangingPunct="0">
+              <a:lnSpc>
+                <a:spcPct val="100000"/>
+              </a:lnSpc>
+              <a:spcBef>
+                <a:spcPct val="0"/>
+              </a:spcBef>
+              <a:spcAft>
+                <a:spcPct val="0"/>
+              </a:spcAft>
+              <a:buClrTx/>
+              <a:buSzTx/>
+              <a:buFontTx/>
               <a:buChar char="•"/>
+              <a:tabLst/>
             </a:pPr>
             <a:r>
-              <a:rPr lang="en-US" sz="2500" b="1" dirty="0"/>
-              <a:t>Multi-Book Support:</a:t>
-            </a:r>
-            <a:r>
-              <a:rPr lang="en-US" sz="2500" dirty="0"/>
-              <a:t> Scaling the database to handle entire libraries.</a:t>
-            </a:r>
-          </a:p>
-          <a:p>
-            <a:endParaRPr lang="en-US" sz="2500" dirty="0"/>
-          </a:p>
-          <a:p>
-            <a:pPr>
-              <a:buFont typeface="Arial" panose="020B0604020202020204" pitchFamily="34" charset="0"/>
+              <a:rPr kumimoji="0" lang="en-US" altLang="en-US" sz="2700" b="0" i="0" u="none" strike="noStrike" cap="none" normalizeH="0" baseline="0" dirty="0">
+                <a:ln>
+                  <a:noFill/>
+                </a:ln>
+                <a:solidFill>
+                  <a:schemeClr val="tx1"/>
+                </a:solidFill>
+                <a:effectLst/>
+                <a:latin typeface="Gill Sans MT(body)"/>
+              </a:rPr>
+              <a:t>Implemented </a:t>
+            </a:r>
+            <a:r>
+              <a:rPr kumimoji="0" lang="en-US" altLang="en-US" sz="2700" b="1" i="0" u="none" strike="noStrike" cap="none" normalizeH="0" baseline="0" dirty="0">
+                <a:ln>
+                  <a:noFill/>
+                </a:ln>
+                <a:solidFill>
+                  <a:schemeClr val="tx1"/>
+                </a:solidFill>
+                <a:effectLst/>
+                <a:latin typeface="Gill Sans MT(body)"/>
+              </a:rPr>
+              <a:t>Modular Unit Testing</a:t>
+            </a:r>
+            <a:r>
+              <a:rPr kumimoji="0" lang="en-US" altLang="en-US" sz="2700" b="0" i="0" u="none" strike="noStrike" cap="none" normalizeH="0" baseline="0" dirty="0">
+                <a:ln>
+                  <a:noFill/>
+                </a:ln>
+                <a:solidFill>
+                  <a:schemeClr val="tx1"/>
+                </a:solidFill>
+                <a:effectLst/>
+                <a:latin typeface="Gill Sans MT(body)"/>
+              </a:rPr>
+              <a:t> for the API.</a:t>
+            </a:r>
+          </a:p>
+          <a:p>
+            <a:pPr marL="0" marR="0" lvl="0" indent="0" algn="l" defTabSz="914400" rtl="0" eaLnBrk="0" fontAlgn="base" latinLnBrk="0" hangingPunct="0">
+              <a:lnSpc>
+                <a:spcPct val="100000"/>
+              </a:lnSpc>
+              <a:spcBef>
+                <a:spcPct val="0"/>
+              </a:spcBef>
+              <a:spcAft>
+                <a:spcPct val="0"/>
+              </a:spcAft>
+              <a:buClrTx/>
+              <a:buSzTx/>
+              <a:tabLst/>
+            </a:pPr>
+            <a:endParaRPr kumimoji="0" lang="en-US" altLang="en-US" sz="2700" b="0" i="0" u="none" strike="noStrike" cap="none" normalizeH="0" baseline="0" dirty="0">
+              <a:ln>
+                <a:noFill/>
+              </a:ln>
+              <a:solidFill>
+                <a:schemeClr val="tx1"/>
+              </a:solidFill>
+              <a:effectLst/>
+              <a:latin typeface="Gill Sans MT(body)"/>
+            </a:endParaRPr>
+          </a:p>
+          <a:p>
+            <a:pPr marL="0" marR="0" lvl="0" indent="0" algn="l" defTabSz="914400" rtl="0" eaLnBrk="0" fontAlgn="base" latinLnBrk="0" hangingPunct="0">
+              <a:lnSpc>
+                <a:spcPct val="100000"/>
+              </a:lnSpc>
+              <a:spcBef>
+                <a:spcPct val="0"/>
+              </a:spcBef>
+              <a:spcAft>
+                <a:spcPct val="0"/>
+              </a:spcAft>
+              <a:buClrTx/>
+              <a:buSzTx/>
+              <a:buFontTx/>
               <a:buChar char="•"/>
+              <a:tabLst/>
             </a:pPr>
             <a:r>
-              <a:rPr lang="en-US" sz="2500" b="1" dirty="0"/>
-              <a:t>Voice Search:</a:t>
-            </a:r>
-            <a:r>
-              <a:rPr lang="en-US" sz="2500" dirty="0"/>
-              <a:t> Asking the app questions like </a:t>
-            </a:r>
-            <a:r>
-              <a:rPr lang="en-US" sz="2500" i="1" dirty="0"/>
-              <a:t>"Where did Holmes find the ring?"</a:t>
-            </a:r>
-            <a:r>
-              <a:rPr lang="en-US" sz="2500" dirty="0"/>
-              <a:t> and getting an audio timestamp.</a:t>
-            </a:r>
+              <a:rPr kumimoji="0" lang="en-US" altLang="en-US" sz="2700" b="0" i="0" u="none" strike="noStrike" cap="none" normalizeH="0" baseline="0" dirty="0">
+                <a:ln>
+                  <a:noFill/>
+                </a:ln>
+                <a:solidFill>
+                  <a:schemeClr val="tx1"/>
+                </a:solidFill>
+                <a:effectLst/>
+                <a:latin typeface="Gill Sans MT(body)"/>
+              </a:rPr>
+              <a:t>Verified transcription accuracy against known Sherlock Holmes texts.</a:t>
+            </a:r>
+          </a:p>
+          <a:p>
+            <a:pPr marL="0" marR="0" lvl="0" indent="0" algn="l" defTabSz="914400" rtl="0" eaLnBrk="0" fontAlgn="base" latinLnBrk="0" hangingPunct="0">
+              <a:lnSpc>
+                <a:spcPct val="100000"/>
+              </a:lnSpc>
+              <a:spcBef>
+                <a:spcPct val="0"/>
+              </a:spcBef>
+              <a:spcAft>
+                <a:spcPct val="0"/>
+              </a:spcAft>
+              <a:buClrTx/>
+              <a:buSzTx/>
+              <a:tabLst/>
+            </a:pPr>
+            <a:endParaRPr kumimoji="0" lang="en-US" altLang="en-US" sz="2700" b="0" i="0" u="none" strike="noStrike" cap="none" normalizeH="0" baseline="0" dirty="0">
+              <a:ln>
+                <a:noFill/>
+              </a:ln>
+              <a:solidFill>
+                <a:schemeClr val="tx1"/>
+              </a:solidFill>
+              <a:effectLst/>
+              <a:latin typeface="Gill Sans MT(body)"/>
+            </a:endParaRPr>
+          </a:p>
+          <a:p>
+            <a:pPr marL="0" marR="0" lvl="0" indent="0" algn="l" defTabSz="914400" rtl="0" eaLnBrk="0" fontAlgn="base" latinLnBrk="0" hangingPunct="0">
+              <a:lnSpc>
+                <a:spcPct val="100000"/>
+              </a:lnSpc>
+              <a:spcBef>
+                <a:spcPct val="0"/>
+              </a:spcBef>
+              <a:spcAft>
+                <a:spcPct val="0"/>
+              </a:spcAft>
+              <a:buClrTx/>
+              <a:buSzTx/>
+              <a:buFontTx/>
+              <a:buChar char="•"/>
+              <a:tabLst/>
+            </a:pPr>
+            <a:r>
+              <a:rPr kumimoji="0" lang="en-US" altLang="en-US" sz="2700" b="1" i="0" u="none" strike="noStrike" cap="none" normalizeH="0" baseline="0" dirty="0">
+                <a:ln>
+                  <a:noFill/>
+                </a:ln>
+                <a:solidFill>
+                  <a:schemeClr val="tx1"/>
+                </a:solidFill>
+                <a:effectLst/>
+                <a:latin typeface="Gill Sans MT(body)"/>
+              </a:rPr>
+              <a:t>Results:</a:t>
+            </a:r>
+          </a:p>
+          <a:p>
+            <a:pPr marL="0" marR="0" lvl="0" indent="0" algn="l" defTabSz="914400" rtl="0" eaLnBrk="0" fontAlgn="base" latinLnBrk="0" hangingPunct="0">
+              <a:lnSpc>
+                <a:spcPct val="100000"/>
+              </a:lnSpc>
+              <a:spcBef>
+                <a:spcPct val="0"/>
+              </a:spcBef>
+              <a:spcAft>
+                <a:spcPct val="0"/>
+              </a:spcAft>
+              <a:buClrTx/>
+              <a:buSzTx/>
+              <a:tabLst/>
+            </a:pPr>
+            <a:endParaRPr kumimoji="0" lang="en-US" altLang="en-US" sz="2700" b="0" i="0" u="none" strike="noStrike" cap="none" normalizeH="0" baseline="0" dirty="0">
+              <a:ln>
+                <a:noFill/>
+              </a:ln>
+              <a:solidFill>
+                <a:schemeClr val="tx1"/>
+              </a:solidFill>
+              <a:effectLst/>
+              <a:latin typeface="Gill Sans MT(body)"/>
+            </a:endParaRPr>
+          </a:p>
+          <a:p>
+            <a:pPr marL="0" marR="0" lvl="0" indent="0" algn="l" defTabSz="914400" rtl="0" eaLnBrk="0" fontAlgn="base" latinLnBrk="0" hangingPunct="0">
+              <a:lnSpc>
+                <a:spcPct val="100000"/>
+              </a:lnSpc>
+              <a:spcBef>
+                <a:spcPct val="0"/>
+              </a:spcBef>
+              <a:spcAft>
+                <a:spcPct val="0"/>
+              </a:spcAft>
+              <a:buClrTx/>
+              <a:buSzTx/>
+              <a:buFontTx/>
+              <a:buChar char="•"/>
+              <a:tabLst/>
+            </a:pPr>
+            <a:r>
+              <a:rPr kumimoji="0" lang="en-US" altLang="en-US" sz="2700" b="0" i="0" u="none" strike="noStrike" cap="none" normalizeH="0" baseline="0" dirty="0">
+                <a:ln>
+                  <a:noFill/>
+                </a:ln>
+                <a:solidFill>
+                  <a:schemeClr val="tx1"/>
+                </a:solidFill>
+                <a:effectLst/>
+                <a:latin typeface="Gill Sans MT(body)"/>
+              </a:rPr>
+              <a:t>✅ Successfully handles long-form MP3 uploads.</a:t>
+            </a:r>
+          </a:p>
+          <a:p>
+            <a:pPr marL="0" marR="0" lvl="0" indent="0" algn="l" defTabSz="914400" rtl="0" eaLnBrk="0" fontAlgn="base" latinLnBrk="0" hangingPunct="0">
+              <a:lnSpc>
+                <a:spcPct val="100000"/>
+              </a:lnSpc>
+              <a:spcBef>
+                <a:spcPct val="0"/>
+              </a:spcBef>
+              <a:spcAft>
+                <a:spcPct val="0"/>
+              </a:spcAft>
+              <a:buClrTx/>
+              <a:buSzTx/>
+              <a:tabLst/>
+            </a:pPr>
+            <a:endParaRPr kumimoji="0" lang="en-US" altLang="en-US" sz="2700" b="0" i="0" u="none" strike="noStrike" cap="none" normalizeH="0" baseline="0" dirty="0">
+              <a:ln>
+                <a:noFill/>
+              </a:ln>
+              <a:solidFill>
+                <a:schemeClr val="tx1"/>
+              </a:solidFill>
+              <a:effectLst/>
+              <a:latin typeface="Gill Sans MT(body)"/>
+            </a:endParaRPr>
+          </a:p>
+          <a:p>
+            <a:pPr marL="0" marR="0" lvl="0" indent="0" algn="l" defTabSz="914400" rtl="0" eaLnBrk="0" fontAlgn="base" latinLnBrk="0" hangingPunct="0">
+              <a:lnSpc>
+                <a:spcPct val="100000"/>
+              </a:lnSpc>
+              <a:spcBef>
+                <a:spcPct val="0"/>
+              </a:spcBef>
+              <a:spcAft>
+                <a:spcPct val="0"/>
+              </a:spcAft>
+              <a:buClrTx/>
+              <a:buSzTx/>
+              <a:buFontTx/>
+              <a:buChar char="•"/>
+              <a:tabLst/>
+            </a:pPr>
+            <a:r>
+              <a:rPr kumimoji="0" lang="en-US" altLang="en-US" sz="2700" b="0" i="0" u="none" strike="noStrike" cap="none" normalizeH="0" baseline="0" dirty="0">
+                <a:ln>
+                  <a:noFill/>
+                </a:ln>
+                <a:solidFill>
+                  <a:schemeClr val="tx1"/>
+                </a:solidFill>
+                <a:effectLst/>
+                <a:latin typeface="Gill Sans MT(body)"/>
+              </a:rPr>
+              <a:t>✅ Correctly rejects non-audio files (Security).</a:t>
+            </a:r>
+          </a:p>
+          <a:p>
+            <a:pPr marL="0" marR="0" lvl="0" indent="0" algn="l" defTabSz="914400" rtl="0" eaLnBrk="0" fontAlgn="base" latinLnBrk="0" hangingPunct="0">
+              <a:lnSpc>
+                <a:spcPct val="100000"/>
+              </a:lnSpc>
+              <a:spcBef>
+                <a:spcPct val="0"/>
+              </a:spcBef>
+              <a:spcAft>
+                <a:spcPct val="0"/>
+              </a:spcAft>
+              <a:buClrTx/>
+              <a:buSzTx/>
+              <a:tabLst/>
+            </a:pPr>
+            <a:endParaRPr kumimoji="0" lang="en-US" altLang="en-US" sz="2700" b="0" i="0" u="none" strike="noStrike" cap="none" normalizeH="0" baseline="0" dirty="0">
+              <a:ln>
+                <a:noFill/>
+              </a:ln>
+              <a:solidFill>
+                <a:schemeClr val="tx1"/>
+              </a:solidFill>
+              <a:effectLst/>
+              <a:latin typeface="Gill Sans MT(body)"/>
+            </a:endParaRPr>
+          </a:p>
+          <a:p>
+            <a:pPr marL="0" marR="0" lvl="0" indent="0" algn="l" defTabSz="914400" rtl="0" eaLnBrk="0" fontAlgn="base" latinLnBrk="0" hangingPunct="0">
+              <a:lnSpc>
+                <a:spcPct val="100000"/>
+              </a:lnSpc>
+              <a:spcBef>
+                <a:spcPct val="0"/>
+              </a:spcBef>
+              <a:spcAft>
+                <a:spcPct val="0"/>
+              </a:spcAft>
+              <a:buClrTx/>
+              <a:buSzTx/>
+              <a:buFontTx/>
+              <a:buChar char="•"/>
+              <a:tabLst/>
+            </a:pPr>
+            <a:r>
+              <a:rPr kumimoji="0" lang="en-US" altLang="en-US" sz="2700" b="0" i="0" u="none" strike="noStrike" cap="none" normalizeH="0" baseline="0" dirty="0">
+                <a:ln>
+                  <a:noFill/>
+                </a:ln>
+                <a:solidFill>
+                  <a:schemeClr val="tx1"/>
+                </a:solidFill>
+                <a:effectLst/>
+                <a:latin typeface="Gill Sans MT(body)"/>
+              </a:rPr>
+              <a:t>✅ Sentiment graphs accurately reflect plot climaxes.</a:t>
+            </a:r>
+          </a:p>
+          <a:p>
+            <a:pPr marL="0" marR="0" lvl="0" indent="0" algn="l" defTabSz="914400" rtl="0" eaLnBrk="0" fontAlgn="base" latinLnBrk="0" hangingPunct="0">
+              <a:lnSpc>
+                <a:spcPct val="100000"/>
+              </a:lnSpc>
+              <a:spcBef>
+                <a:spcPct val="0"/>
+              </a:spcBef>
+              <a:spcAft>
+                <a:spcPct val="0"/>
+              </a:spcAft>
+              <a:buClrTx/>
+              <a:buSzTx/>
+              <a:buFontTx/>
+              <a:buNone/>
+              <a:tabLst/>
+            </a:pPr>
+            <a:endParaRPr kumimoji="0" lang="en-US" altLang="en-US" sz="1800" b="0" i="0" u="none" strike="noStrike" cap="none" normalizeH="0" baseline="0" dirty="0">
+              <a:ln>
+                <a:noFill/>
+              </a:ln>
+              <a:solidFill>
+                <a:schemeClr val="tx1"/>
+              </a:solidFill>
+              <a:effectLst/>
+              <a:latin typeface="Arial" panose="020B0604020202020204" pitchFamily="34" charset="0"/>
+            </a:endParaRPr>
           </a:p>
         </p:txBody>
       </p:sp>
     </p:spTree>
     <p:extLst>
       <p:ext uri="{BB962C8B-B14F-4D97-AF65-F5344CB8AC3E}">
-        <p14:creationId xmlns:p14="http://schemas.microsoft.com/office/powerpoint/2010/main" val="593966822"/>
+        <p14:creationId xmlns:p14="http://schemas.microsoft.com/office/powerpoint/2010/main" val="2306821024"/>
       </p:ext>
     </p:extLst>
   </p:cSld>
   <p:clrMapOvr>
     <a:masterClrMapping/>
   </p:clrMapOvr>
-  <p:transition spd="slow">
-    <p:push dir="u"/>
-  </p:transition>
+  <mc:AlternateContent xmlns:mc="http://schemas.openxmlformats.org/markup-compatibility/2006" xmlns:p159="http://schemas.microsoft.com/office/powerpoint/2015/09/main">
+    <mc:Choice Requires="p159">
+      <p:transition xmlns:p14="http://schemas.microsoft.com/office/powerpoint/2010/main" spd="slow" p14:dur="2000">
+        <p159:morph option="byObject"/>
+      </p:transition>
+    </mc:Choice>
+    <mc:Fallback xmlns="">
+      <p:transition spd="slow">
+        <p:fade/>
+      </p:transition>
+    </mc:Fallback>
+  </mc:AlternateContent>
 </p:sld>
 </file>
 
@@ -3922,7 +4773,7 @@
           <p:cNvPr id="3" name="TextBox 2">
             <a:extLst>
               <a:ext uri="{FF2B5EF4-FFF2-40B4-BE49-F238E27FC236}">
-                <a16:creationId xmlns:a16="http://schemas.microsoft.com/office/drawing/2014/main" id="{8B3FAE51-7FEF-E555-9E07-2884558DA2B8}"/>
+                <a16:creationId xmlns:a16="http://schemas.microsoft.com/office/drawing/2014/main" id="{207CA6CB-5CB1-5475-40B6-521179112A08}"/>
               </a:ext>
             </a:extLst>
           </p:cNvPr>
@@ -3931,8 +4782,8 @@
         </p:nvSpPr>
         <p:spPr>
           <a:xfrm>
-            <a:off x="176135" y="205078"/>
-            <a:ext cx="6108492" cy="630942"/>
+            <a:off x="266074" y="280027"/>
+            <a:ext cx="6284627" cy="630942"/>
           </a:xfrm>
           <a:prstGeom prst="rect">
             <a:avLst/>
@@ -3947,345 +4798,100 @@
           <a:p>
             <a:r>
               <a:rPr lang="en-IN" sz="3500" dirty="0"/>
-              <a:t>Conclusion :-</a:t>
-            </a:r>
-          </a:p>
-        </p:txBody>
-      </p:sp>
-      <p:sp>
-        <p:nvSpPr>
-          <p:cNvPr id="4" name="Rectangle 1">
+              <a:t>Future Scope :-</a:t>
+            </a:r>
+          </a:p>
+        </p:txBody>
+      </p:sp>
+      <p:sp>
+        <p:nvSpPr>
+          <p:cNvPr id="5" name="TextBox 4">
             <a:extLst>
               <a:ext uri="{FF2B5EF4-FFF2-40B4-BE49-F238E27FC236}">
-                <a16:creationId xmlns:a16="http://schemas.microsoft.com/office/drawing/2014/main" id="{2C85BE09-2039-5587-BE83-12C1A528135F}"/>
+                <a16:creationId xmlns:a16="http://schemas.microsoft.com/office/drawing/2014/main" id="{8CD27B44-CFAB-91E2-D464-C92364157179}"/>
               </a:ext>
             </a:extLst>
           </p:cNvPr>
-          <p:cNvSpPr>
-            <a:spLocks noChangeArrowheads="1"/>
-          </p:cNvSpPr>
+          <p:cNvSpPr txBox="1"/>
           <p:nvPr/>
         </p:nvSpPr>
-        <p:spPr bwMode="auto">
+        <p:spPr>
           <a:xfrm>
-            <a:off x="437045" y="1073236"/>
-            <a:ext cx="11695163" cy="3939540"/>
+            <a:off x="460947" y="1379097"/>
+            <a:ext cx="11036510" cy="3000821"/>
           </a:xfrm>
           <a:prstGeom prst="rect">
             <a:avLst/>
           </a:prstGeom>
           <a:noFill/>
-          <a:ln>
-            <a:noFill/>
-          </a:ln>
-          <a:effectLst/>
-          <a:extLst>
-            <a:ext uri="{909E8E84-426E-40DD-AFC4-6F175D3DCCD1}">
-              <a14:hiddenFill xmlns:a14="http://schemas.microsoft.com/office/drawing/2010/main">
-                <a:solidFill>
-                  <a:schemeClr val="accent1"/>
-                </a:solidFill>
-              </a14:hiddenFill>
-            </a:ext>
-            <a:ext uri="{91240B29-F687-4F45-9708-019B960494DF}">
-              <a14:hiddenLine xmlns:a14="http://schemas.microsoft.com/office/drawing/2010/main" w="9525">
-                <a:solidFill>
-                  <a:schemeClr val="tx1"/>
-                </a:solidFill>
-                <a:miter lim="800000"/>
-                <a:headEnd/>
-                <a:tailEnd/>
-              </a14:hiddenLine>
-            </a:ext>
-            <a:ext uri="{AF507438-7753-43E0-B8FC-AC1667EBCBE1}">
-              <a14:hiddenEffects xmlns:a14="http://schemas.microsoft.com/office/drawing/2010/main">
-                <a:effectLst>
-                  <a:outerShdw dist="35921" dir="2700000" algn="ctr" rotWithShape="0">
-                    <a:schemeClr val="bg2"/>
-                  </a:outerShdw>
-                </a:effectLst>
-              </a14:hiddenEffects>
-            </a:ext>
-          </a:extLst>
         </p:spPr>
         <p:txBody>
-          <a:bodyPr vert="horz" wrap="square" lIns="91440" tIns="45720" rIns="91440" bIns="45720" numCol="1" anchor="ctr" anchorCtr="0" compatLnSpc="1">
-            <a:prstTxWarp prst="textNoShape">
-              <a:avLst/>
-            </a:prstTxWarp>
+          <a:bodyPr wrap="square">
             <a:spAutoFit/>
           </a:bodyPr>
           <a:lstStyle/>
           <a:p>
-            <a:pPr marL="0" marR="0" lvl="0" indent="0" algn="l" defTabSz="914400" rtl="0" eaLnBrk="0" fontAlgn="base" latinLnBrk="0" hangingPunct="0">
-              <a:lnSpc>
-                <a:spcPct val="100000"/>
-              </a:lnSpc>
-              <a:spcBef>
-                <a:spcPct val="0"/>
-              </a:spcBef>
-              <a:spcAft>
-                <a:spcPct val="0"/>
-              </a:spcAft>
-              <a:buClrTx/>
-              <a:buSzTx/>
-              <a:buFontTx/>
+            <a:pPr>
+              <a:buFont typeface="Arial" panose="020B0604020202020204" pitchFamily="34" charset="0"/>
               <a:buChar char="•"/>
-              <a:tabLst/>
             </a:pPr>
             <a:r>
-              <a:rPr kumimoji="0" lang="en-US" altLang="en-US" sz="2500" b="1" i="0" u="none" strike="noStrike" cap="none" normalizeH="0" baseline="0" dirty="0">
-                <a:ln>
-                  <a:noFill/>
-                </a:ln>
-                <a:solidFill>
-                  <a:schemeClr val="tx1"/>
-                </a:solidFill>
-                <a:effectLst/>
-                <a:latin typeface="Arial" panose="020B0604020202020204" pitchFamily="34" charset="0"/>
-              </a:rPr>
-              <a:t>Summary:</a:t>
-            </a:r>
-          </a:p>
-          <a:p>
-            <a:pPr marL="0" marR="0" lvl="0" indent="0" algn="l" defTabSz="914400" rtl="0" eaLnBrk="0" fontAlgn="base" latinLnBrk="0" hangingPunct="0">
-              <a:lnSpc>
-                <a:spcPct val="100000"/>
-              </a:lnSpc>
-              <a:spcBef>
-                <a:spcPct val="0"/>
-              </a:spcBef>
-              <a:spcAft>
-                <a:spcPct val="0"/>
-              </a:spcAft>
-              <a:buClrTx/>
-              <a:buSzTx/>
-              <a:tabLst/>
+              <a:rPr lang="en-US" sz="2700" b="1" dirty="0"/>
+              <a:t>Character </a:t>
+            </a:r>
+            <a:r>
+              <a:rPr lang="en-US" sz="2700" b="1" dirty="0" err="1"/>
+              <a:t>Diarization</a:t>
+            </a:r>
+            <a:r>
+              <a:rPr lang="en-US" sz="2700" b="1" dirty="0"/>
+              <a:t>:</a:t>
+            </a:r>
+            <a:r>
+              <a:rPr lang="en-US" sz="2700" dirty="0"/>
+              <a:t> Distinguishing between the Narrator, Holmes, and Watson (Speaker A vs. Speaker B).</a:t>
+            </a:r>
+          </a:p>
+          <a:p>
+            <a:endParaRPr lang="en-US" sz="2700" dirty="0"/>
+          </a:p>
+          <a:p>
+            <a:pPr>
+              <a:buFont typeface="Arial" panose="020B0604020202020204" pitchFamily="34" charset="0"/>
+              <a:buChar char="•"/>
             </a:pPr>
-            <a:endParaRPr kumimoji="0" lang="en-US" altLang="en-US" sz="2500" b="0" i="0" u="none" strike="noStrike" cap="none" normalizeH="0" baseline="0" dirty="0">
-              <a:ln>
-                <a:noFill/>
-              </a:ln>
-              <a:solidFill>
-                <a:schemeClr val="tx1"/>
-              </a:solidFill>
-              <a:effectLst/>
-              <a:latin typeface="Arial" panose="020B0604020202020204" pitchFamily="34" charset="0"/>
-            </a:endParaRPr>
-          </a:p>
-          <a:p>
-            <a:pPr marL="0" marR="0" lvl="0" indent="0" algn="l" defTabSz="914400" rtl="0" eaLnBrk="0" fontAlgn="base" latinLnBrk="0" hangingPunct="0">
-              <a:lnSpc>
-                <a:spcPct val="100000"/>
-              </a:lnSpc>
-              <a:spcBef>
-                <a:spcPct val="0"/>
-              </a:spcBef>
-              <a:spcAft>
-                <a:spcPct val="0"/>
-              </a:spcAft>
-              <a:buClrTx/>
-              <a:buSzTx/>
-              <a:buFontTx/>
+            <a:r>
+              <a:rPr lang="en-US" sz="2700" b="1" dirty="0"/>
+              <a:t>Multi-Book Support:</a:t>
+            </a:r>
+            <a:r>
+              <a:rPr lang="en-US" sz="2700" dirty="0"/>
+              <a:t> Scaling the database to handle entire libraries.</a:t>
+            </a:r>
+          </a:p>
+          <a:p>
+            <a:endParaRPr lang="en-US" sz="2700" dirty="0"/>
+          </a:p>
+          <a:p>
+            <a:pPr>
+              <a:buFont typeface="Arial" panose="020B0604020202020204" pitchFamily="34" charset="0"/>
               <a:buChar char="•"/>
-              <a:tabLst/>
             </a:pPr>
             <a:r>
-              <a:rPr kumimoji="0" lang="en-US" altLang="en-US" sz="2500" b="0" i="0" u="none" strike="noStrike" cap="none" normalizeH="0" baseline="0" dirty="0">
-                <a:ln>
-                  <a:noFill/>
-                </a:ln>
-                <a:solidFill>
-                  <a:schemeClr val="tx1"/>
-                </a:solidFill>
-                <a:effectLst/>
-                <a:latin typeface="Arial" panose="020B0604020202020204" pitchFamily="34" charset="0"/>
-              </a:rPr>
-              <a:t>Developed a Full-Stack application for analyzing audiobooks.</a:t>
-            </a:r>
-          </a:p>
-          <a:p>
-            <a:pPr marL="0" marR="0" lvl="0" indent="0" algn="l" defTabSz="914400" rtl="0" eaLnBrk="0" fontAlgn="base" latinLnBrk="0" hangingPunct="0">
-              <a:lnSpc>
-                <a:spcPct val="100000"/>
-              </a:lnSpc>
-              <a:spcBef>
-                <a:spcPct val="0"/>
-              </a:spcBef>
-              <a:spcAft>
-                <a:spcPct val="0"/>
-              </a:spcAft>
-              <a:buClrTx/>
-              <a:buSzTx/>
-              <a:tabLst/>
-            </a:pPr>
-            <a:endParaRPr kumimoji="0" lang="en-US" altLang="en-US" sz="2500" b="0" i="0" u="none" strike="noStrike" cap="none" normalizeH="0" baseline="0" dirty="0">
-              <a:ln>
-                <a:noFill/>
-              </a:ln>
-              <a:solidFill>
-                <a:schemeClr val="tx1"/>
-              </a:solidFill>
-              <a:effectLst/>
-              <a:latin typeface="Arial" panose="020B0604020202020204" pitchFamily="34" charset="0"/>
-            </a:endParaRPr>
-          </a:p>
-          <a:p>
-            <a:pPr marL="0" marR="0" lvl="0" indent="0" algn="l" defTabSz="914400" rtl="0" eaLnBrk="0" fontAlgn="base" latinLnBrk="0" hangingPunct="0">
-              <a:lnSpc>
-                <a:spcPct val="100000"/>
-              </a:lnSpc>
-              <a:spcBef>
-                <a:spcPct val="0"/>
-              </a:spcBef>
-              <a:spcAft>
-                <a:spcPct val="0"/>
-              </a:spcAft>
-              <a:buClrTx/>
-              <a:buSzTx/>
-              <a:buFontTx/>
-              <a:buChar char="•"/>
-              <a:tabLst/>
-            </a:pPr>
-            <a:r>
-              <a:rPr kumimoji="0" lang="en-US" altLang="en-US" sz="2500" b="0" i="0" u="none" strike="noStrike" cap="none" normalizeH="0" baseline="0" dirty="0">
-                <a:ln>
-                  <a:noFill/>
-                </a:ln>
-                <a:solidFill>
-                  <a:schemeClr val="tx1"/>
-                </a:solidFill>
-                <a:effectLst/>
-                <a:latin typeface="Arial" panose="020B0604020202020204" pitchFamily="34" charset="0"/>
-              </a:rPr>
-              <a:t>Successfully applied AI/NLP to classic literature.</a:t>
-            </a:r>
-          </a:p>
-          <a:p>
-            <a:pPr marL="0" marR="0" lvl="0" indent="0" algn="l" defTabSz="914400" rtl="0" eaLnBrk="0" fontAlgn="base" latinLnBrk="0" hangingPunct="0">
-              <a:lnSpc>
-                <a:spcPct val="100000"/>
-              </a:lnSpc>
-              <a:spcBef>
-                <a:spcPct val="0"/>
-              </a:spcBef>
-              <a:spcAft>
-                <a:spcPct val="0"/>
-              </a:spcAft>
-              <a:buClrTx/>
-              <a:buSzTx/>
-              <a:tabLst/>
-            </a:pPr>
-            <a:endParaRPr kumimoji="0" lang="en-US" altLang="en-US" sz="2500" b="0" i="0" u="none" strike="noStrike" cap="none" normalizeH="0" baseline="0" dirty="0">
-              <a:ln>
-                <a:noFill/>
-              </a:ln>
-              <a:solidFill>
-                <a:schemeClr val="tx1"/>
-              </a:solidFill>
-              <a:effectLst/>
-              <a:latin typeface="Arial" panose="020B0604020202020204" pitchFamily="34" charset="0"/>
-            </a:endParaRPr>
-          </a:p>
-          <a:p>
-            <a:pPr marL="0" marR="0" lvl="0" indent="0" algn="l" defTabSz="914400" rtl="0" eaLnBrk="0" fontAlgn="base" latinLnBrk="0" hangingPunct="0">
-              <a:lnSpc>
-                <a:spcPct val="100000"/>
-              </a:lnSpc>
-              <a:spcBef>
-                <a:spcPct val="0"/>
-              </a:spcBef>
-              <a:spcAft>
-                <a:spcPct val="0"/>
-              </a:spcAft>
-              <a:buClrTx/>
-              <a:buSzTx/>
-              <a:buFontTx/>
-              <a:buChar char="•"/>
-              <a:tabLst/>
-            </a:pPr>
-            <a:r>
-              <a:rPr kumimoji="0" lang="en-US" altLang="en-US" sz="2500" b="0" i="0" u="none" strike="noStrike" cap="none" normalizeH="0" baseline="0" dirty="0">
-                <a:ln>
-                  <a:noFill/>
-                </a:ln>
-                <a:solidFill>
-                  <a:schemeClr val="tx1"/>
-                </a:solidFill>
-                <a:effectLst/>
-                <a:latin typeface="Arial" panose="020B0604020202020204" pitchFamily="34" charset="0"/>
-              </a:rPr>
-              <a:t>Demonstrated professional software practices (Git, Documentation, Testing).</a:t>
-            </a:r>
-          </a:p>
-          <a:p>
-            <a:pPr marL="0" marR="0" lvl="0" indent="0" algn="l" defTabSz="914400" rtl="0" eaLnBrk="0" fontAlgn="base" latinLnBrk="0" hangingPunct="0">
-              <a:lnSpc>
-                <a:spcPct val="100000"/>
-              </a:lnSpc>
-              <a:spcBef>
-                <a:spcPct val="0"/>
-              </a:spcBef>
-              <a:spcAft>
-                <a:spcPct val="0"/>
-              </a:spcAft>
-              <a:buClrTx/>
-              <a:buSzTx/>
-              <a:tabLst/>
-            </a:pPr>
-            <a:endParaRPr kumimoji="0" lang="en-US" altLang="en-US" sz="2500" b="0" i="0" u="none" strike="noStrike" cap="none" normalizeH="0" baseline="0" dirty="0">
-              <a:ln>
-                <a:noFill/>
-              </a:ln>
-              <a:solidFill>
-                <a:schemeClr val="tx1"/>
-              </a:solidFill>
-              <a:effectLst/>
-              <a:latin typeface="Arial" panose="020B0604020202020204" pitchFamily="34" charset="0"/>
-            </a:endParaRPr>
-          </a:p>
-          <a:p>
-            <a:pPr marL="0" marR="0" lvl="0" indent="0" algn="l" defTabSz="914400" rtl="0" eaLnBrk="0" fontAlgn="base" latinLnBrk="0" hangingPunct="0">
-              <a:lnSpc>
-                <a:spcPct val="100000"/>
-              </a:lnSpc>
-              <a:spcBef>
-                <a:spcPct val="0"/>
-              </a:spcBef>
-              <a:spcAft>
-                <a:spcPct val="0"/>
-              </a:spcAft>
-              <a:buClrTx/>
-              <a:buSzTx/>
-              <a:buFontTx/>
-              <a:buChar char="•"/>
-              <a:tabLst/>
-            </a:pPr>
-            <a:r>
-              <a:rPr kumimoji="0" lang="en-US" altLang="en-US" sz="2500" b="1" i="0" u="none" strike="noStrike" cap="none" normalizeH="0" baseline="0" dirty="0">
-                <a:ln>
-                  <a:noFill/>
-                </a:ln>
-                <a:solidFill>
-                  <a:schemeClr val="tx1"/>
-                </a:solidFill>
-                <a:effectLst/>
-                <a:latin typeface="Arial" panose="020B0604020202020204" pitchFamily="34" charset="0"/>
-              </a:rPr>
-              <a:t>Final Thought:</a:t>
-            </a:r>
-            <a:r>
-              <a:rPr kumimoji="0" lang="en-US" altLang="en-US" sz="2500" b="0" i="0" u="none" strike="noStrike" cap="none" normalizeH="0" baseline="0" dirty="0">
-                <a:ln>
-                  <a:noFill/>
-                </a:ln>
-                <a:solidFill>
-                  <a:schemeClr val="tx1"/>
-                </a:solidFill>
-                <a:effectLst/>
-                <a:latin typeface="Arial" panose="020B0604020202020204" pitchFamily="34" charset="0"/>
-              </a:rPr>
-              <a:t> "Unlocking the data inside stories to make literature more accessible."</a:t>
+              <a:rPr lang="en-US" sz="2700" b="1" dirty="0"/>
+              <a:t>Voice Search:</a:t>
+            </a:r>
+            <a:r>
+              <a:rPr lang="en-US" sz="2700" dirty="0"/>
+              <a:t> Asking the app questions like </a:t>
+            </a:r>
+            <a:r>
+              <a:rPr lang="en-US" sz="2700" i="1" dirty="0"/>
+              <a:t>"Where did Holmes find the ring?"</a:t>
+            </a:r>
+            <a:r>
+              <a:rPr lang="en-US" sz="2700" dirty="0"/>
+              <a:t> and getting an audio timestamp.</a:t>
             </a:r>
           </a:p>
         </p:txBody>
@@ -4293,7 +4899,7 @@
     </p:spTree>
     <p:extLst>
       <p:ext uri="{BB962C8B-B14F-4D97-AF65-F5344CB8AC3E}">
-        <p14:creationId xmlns:p14="http://schemas.microsoft.com/office/powerpoint/2010/main" val="3652229684"/>
+        <p14:creationId xmlns:p14="http://schemas.microsoft.com/office/powerpoint/2010/main" val="593966822"/>
       </p:ext>
     </p:extLst>
   </p:cSld>
@@ -4301,7 +4907,7 @@
     <a:masterClrMapping/>
   </p:clrMapOvr>
   <p:transition spd="slow">
-    <p:wipe/>
+    <p:push dir="u"/>
   </p:transition>
 </p:sld>
 </file>
@@ -4328,6 +4934,412 @@
           <p:cNvPr id="3" name="TextBox 2">
             <a:extLst>
               <a:ext uri="{FF2B5EF4-FFF2-40B4-BE49-F238E27FC236}">
+                <a16:creationId xmlns:a16="http://schemas.microsoft.com/office/drawing/2014/main" id="{8B3FAE51-7FEF-E555-9E07-2884558DA2B8}"/>
+              </a:ext>
+            </a:extLst>
+          </p:cNvPr>
+          <p:cNvSpPr txBox="1"/>
+          <p:nvPr/>
+        </p:nvSpPr>
+        <p:spPr>
+          <a:xfrm>
+            <a:off x="176135" y="205078"/>
+            <a:ext cx="6108492" cy="630942"/>
+          </a:xfrm>
+          <a:prstGeom prst="rect">
+            <a:avLst/>
+          </a:prstGeom>
+          <a:noFill/>
+        </p:spPr>
+        <p:txBody>
+          <a:bodyPr wrap="square">
+            <a:spAutoFit/>
+          </a:bodyPr>
+          <a:lstStyle/>
+          <a:p>
+            <a:r>
+              <a:rPr lang="en-IN" sz="3500" dirty="0"/>
+              <a:t>Conclusion :-</a:t>
+            </a:r>
+          </a:p>
+        </p:txBody>
+      </p:sp>
+      <p:sp>
+        <p:nvSpPr>
+          <p:cNvPr id="4" name="Rectangle 1">
+            <a:extLst>
+              <a:ext uri="{FF2B5EF4-FFF2-40B4-BE49-F238E27FC236}">
+                <a16:creationId xmlns:a16="http://schemas.microsoft.com/office/drawing/2014/main" id="{2C85BE09-2039-5587-BE83-12C1A528135F}"/>
+              </a:ext>
+            </a:extLst>
+          </p:cNvPr>
+          <p:cNvSpPr>
+            <a:spLocks noChangeArrowheads="1"/>
+          </p:cNvSpPr>
+          <p:nvPr/>
+        </p:nvSpPr>
+        <p:spPr bwMode="auto">
+          <a:xfrm>
+            <a:off x="437045" y="1069249"/>
+            <a:ext cx="11695163" cy="4247317"/>
+          </a:xfrm>
+          <a:prstGeom prst="rect">
+            <a:avLst/>
+          </a:prstGeom>
+          <a:noFill/>
+          <a:ln>
+            <a:noFill/>
+          </a:ln>
+          <a:effectLst/>
+          <a:extLst>
+            <a:ext uri="{909E8E84-426E-40DD-AFC4-6F175D3DCCD1}">
+              <a14:hiddenFill xmlns:a14="http://schemas.microsoft.com/office/drawing/2010/main">
+                <a:solidFill>
+                  <a:schemeClr val="accent1"/>
+                </a:solidFill>
+              </a14:hiddenFill>
+            </a:ext>
+            <a:ext uri="{91240B29-F687-4F45-9708-019B960494DF}">
+              <a14:hiddenLine xmlns:a14="http://schemas.microsoft.com/office/drawing/2010/main" w="9525">
+                <a:solidFill>
+                  <a:schemeClr val="tx1"/>
+                </a:solidFill>
+                <a:miter lim="800000"/>
+                <a:headEnd/>
+                <a:tailEnd/>
+              </a14:hiddenLine>
+            </a:ext>
+            <a:ext uri="{AF507438-7753-43E0-B8FC-AC1667EBCBE1}">
+              <a14:hiddenEffects xmlns:a14="http://schemas.microsoft.com/office/drawing/2010/main">
+                <a:effectLst>
+                  <a:outerShdw dist="35921" dir="2700000" algn="ctr" rotWithShape="0">
+                    <a:schemeClr val="bg2"/>
+                  </a:outerShdw>
+                </a:effectLst>
+              </a14:hiddenEffects>
+            </a:ext>
+          </a:extLst>
+        </p:spPr>
+        <p:txBody>
+          <a:bodyPr vert="horz" wrap="square" lIns="91440" tIns="45720" rIns="91440" bIns="45720" numCol="1" anchor="ctr" anchorCtr="0" compatLnSpc="1">
+            <a:prstTxWarp prst="textNoShape">
+              <a:avLst/>
+            </a:prstTxWarp>
+            <a:spAutoFit/>
+          </a:bodyPr>
+          <a:lstStyle/>
+          <a:p>
+            <a:pPr marL="0" marR="0" lvl="0" indent="0" algn="l" defTabSz="914400" rtl="0" eaLnBrk="0" fontAlgn="base" latinLnBrk="0" hangingPunct="0">
+              <a:lnSpc>
+                <a:spcPct val="100000"/>
+              </a:lnSpc>
+              <a:spcBef>
+                <a:spcPct val="0"/>
+              </a:spcBef>
+              <a:spcAft>
+                <a:spcPct val="0"/>
+              </a:spcAft>
+              <a:buClrTx/>
+              <a:buSzTx/>
+              <a:buFontTx/>
+              <a:buChar char="•"/>
+              <a:tabLst/>
+            </a:pPr>
+            <a:r>
+              <a:rPr kumimoji="0" lang="en-US" altLang="en-US" sz="2700" b="1" i="0" u="none" strike="noStrike" cap="none" normalizeH="0" baseline="0" dirty="0">
+                <a:ln>
+                  <a:noFill/>
+                </a:ln>
+                <a:solidFill>
+                  <a:schemeClr val="tx1"/>
+                </a:solidFill>
+                <a:effectLst/>
+                <a:latin typeface="Gill Sans MT (body)"/>
+              </a:rPr>
+              <a:t>Summary:</a:t>
+            </a:r>
+          </a:p>
+          <a:p>
+            <a:pPr marL="0" marR="0" lvl="0" indent="0" algn="l" defTabSz="914400" rtl="0" eaLnBrk="0" fontAlgn="base" latinLnBrk="0" hangingPunct="0">
+              <a:lnSpc>
+                <a:spcPct val="100000"/>
+              </a:lnSpc>
+              <a:spcBef>
+                <a:spcPct val="0"/>
+              </a:spcBef>
+              <a:spcAft>
+                <a:spcPct val="0"/>
+              </a:spcAft>
+              <a:buClrTx/>
+              <a:buSzTx/>
+              <a:tabLst/>
+            </a:pPr>
+            <a:endParaRPr kumimoji="0" lang="en-US" altLang="en-US" sz="2700" b="0" i="0" u="none" strike="noStrike" cap="none" normalizeH="0" baseline="0" dirty="0">
+              <a:ln>
+                <a:noFill/>
+              </a:ln>
+              <a:solidFill>
+                <a:schemeClr val="tx1"/>
+              </a:solidFill>
+              <a:effectLst/>
+              <a:latin typeface="Gill Sans MT (body)"/>
+            </a:endParaRPr>
+          </a:p>
+          <a:p>
+            <a:pPr marL="0" marR="0" lvl="0" indent="0" algn="l" defTabSz="914400" rtl="0" eaLnBrk="0" fontAlgn="base" latinLnBrk="0" hangingPunct="0">
+              <a:lnSpc>
+                <a:spcPct val="100000"/>
+              </a:lnSpc>
+              <a:spcBef>
+                <a:spcPct val="0"/>
+              </a:spcBef>
+              <a:spcAft>
+                <a:spcPct val="0"/>
+              </a:spcAft>
+              <a:buClrTx/>
+              <a:buSzTx/>
+              <a:buFontTx/>
+              <a:buChar char="•"/>
+              <a:tabLst/>
+            </a:pPr>
+            <a:r>
+              <a:rPr kumimoji="0" lang="en-US" altLang="en-US" sz="2700" b="0" i="0" u="none" strike="noStrike" cap="none" normalizeH="0" baseline="0" dirty="0">
+                <a:ln>
+                  <a:noFill/>
+                </a:ln>
+                <a:solidFill>
+                  <a:schemeClr val="tx1"/>
+                </a:solidFill>
+                <a:effectLst/>
+                <a:latin typeface="Gill Sans MT (body)"/>
+              </a:rPr>
+              <a:t>Developed a Full-Stack application for analyzing audiobooks.</a:t>
+            </a:r>
+          </a:p>
+          <a:p>
+            <a:pPr marL="0" marR="0" lvl="0" indent="0" algn="l" defTabSz="914400" rtl="0" eaLnBrk="0" fontAlgn="base" latinLnBrk="0" hangingPunct="0">
+              <a:lnSpc>
+                <a:spcPct val="100000"/>
+              </a:lnSpc>
+              <a:spcBef>
+                <a:spcPct val="0"/>
+              </a:spcBef>
+              <a:spcAft>
+                <a:spcPct val="0"/>
+              </a:spcAft>
+              <a:buClrTx/>
+              <a:buSzTx/>
+              <a:tabLst/>
+            </a:pPr>
+            <a:endParaRPr kumimoji="0" lang="en-US" altLang="en-US" sz="2700" b="0" i="0" u="none" strike="noStrike" cap="none" normalizeH="0" baseline="0" dirty="0">
+              <a:ln>
+                <a:noFill/>
+              </a:ln>
+              <a:solidFill>
+                <a:schemeClr val="tx1"/>
+              </a:solidFill>
+              <a:effectLst/>
+              <a:latin typeface="Gill Sans MT (body)"/>
+            </a:endParaRPr>
+          </a:p>
+          <a:p>
+            <a:pPr marL="0" marR="0" lvl="0" indent="0" algn="l" defTabSz="914400" rtl="0" eaLnBrk="0" fontAlgn="base" latinLnBrk="0" hangingPunct="0">
+              <a:lnSpc>
+                <a:spcPct val="100000"/>
+              </a:lnSpc>
+              <a:spcBef>
+                <a:spcPct val="0"/>
+              </a:spcBef>
+              <a:spcAft>
+                <a:spcPct val="0"/>
+              </a:spcAft>
+              <a:buClrTx/>
+              <a:buSzTx/>
+              <a:buFontTx/>
+              <a:buChar char="•"/>
+              <a:tabLst/>
+            </a:pPr>
+            <a:r>
+              <a:rPr kumimoji="0" lang="en-US" altLang="en-US" sz="2700" b="0" i="0" u="none" strike="noStrike" cap="none" normalizeH="0" baseline="0" dirty="0">
+                <a:ln>
+                  <a:noFill/>
+                </a:ln>
+                <a:solidFill>
+                  <a:schemeClr val="tx1"/>
+                </a:solidFill>
+                <a:effectLst/>
+                <a:latin typeface="Gill Sans MT (body)"/>
+              </a:rPr>
+              <a:t>Successfully applied AI/NLP to classic literature.</a:t>
+            </a:r>
+          </a:p>
+          <a:p>
+            <a:pPr marL="0" marR="0" lvl="0" indent="0" algn="l" defTabSz="914400" rtl="0" eaLnBrk="0" fontAlgn="base" latinLnBrk="0" hangingPunct="0">
+              <a:lnSpc>
+                <a:spcPct val="100000"/>
+              </a:lnSpc>
+              <a:spcBef>
+                <a:spcPct val="0"/>
+              </a:spcBef>
+              <a:spcAft>
+                <a:spcPct val="0"/>
+              </a:spcAft>
+              <a:buClrTx/>
+              <a:buSzTx/>
+              <a:tabLst/>
+            </a:pPr>
+            <a:endParaRPr kumimoji="0" lang="en-US" altLang="en-US" sz="2700" b="0" i="0" u="none" strike="noStrike" cap="none" normalizeH="0" baseline="0" dirty="0">
+              <a:ln>
+                <a:noFill/>
+              </a:ln>
+              <a:solidFill>
+                <a:schemeClr val="tx1"/>
+              </a:solidFill>
+              <a:effectLst/>
+              <a:latin typeface="Gill Sans MT (body)"/>
+            </a:endParaRPr>
+          </a:p>
+          <a:p>
+            <a:pPr marL="0" marR="0" lvl="0" indent="0" algn="l" defTabSz="914400" rtl="0" eaLnBrk="0" fontAlgn="base" latinLnBrk="0" hangingPunct="0">
+              <a:lnSpc>
+                <a:spcPct val="100000"/>
+              </a:lnSpc>
+              <a:spcBef>
+                <a:spcPct val="0"/>
+              </a:spcBef>
+              <a:spcAft>
+                <a:spcPct val="0"/>
+              </a:spcAft>
+              <a:buClrTx/>
+              <a:buSzTx/>
+              <a:buFontTx/>
+              <a:buChar char="•"/>
+              <a:tabLst/>
+            </a:pPr>
+            <a:r>
+              <a:rPr kumimoji="0" lang="en-US" altLang="en-US" sz="2700" b="0" i="0" u="none" strike="noStrike" cap="none" normalizeH="0" baseline="0" dirty="0">
+                <a:ln>
+                  <a:noFill/>
+                </a:ln>
+                <a:solidFill>
+                  <a:schemeClr val="tx1"/>
+                </a:solidFill>
+                <a:effectLst/>
+                <a:latin typeface="Gill Sans MT (body)"/>
+              </a:rPr>
+              <a:t>Demonstrated professional software practices (Git, Documentation, Testing).</a:t>
+            </a:r>
+          </a:p>
+          <a:p>
+            <a:pPr marL="0" marR="0" lvl="0" indent="0" algn="l" defTabSz="914400" rtl="0" eaLnBrk="0" fontAlgn="base" latinLnBrk="0" hangingPunct="0">
+              <a:lnSpc>
+                <a:spcPct val="100000"/>
+              </a:lnSpc>
+              <a:spcBef>
+                <a:spcPct val="0"/>
+              </a:spcBef>
+              <a:spcAft>
+                <a:spcPct val="0"/>
+              </a:spcAft>
+              <a:buClrTx/>
+              <a:buSzTx/>
+              <a:tabLst/>
+            </a:pPr>
+            <a:endParaRPr kumimoji="0" lang="en-US" altLang="en-US" sz="2700" b="0" i="0" u="none" strike="noStrike" cap="none" normalizeH="0" baseline="0" dirty="0">
+              <a:ln>
+                <a:noFill/>
+              </a:ln>
+              <a:solidFill>
+                <a:schemeClr val="tx1"/>
+              </a:solidFill>
+              <a:effectLst/>
+              <a:latin typeface="Gill Sans MT (body)"/>
+            </a:endParaRPr>
+          </a:p>
+          <a:p>
+            <a:pPr marL="0" marR="0" lvl="0" indent="0" algn="l" defTabSz="914400" rtl="0" eaLnBrk="0" fontAlgn="base" latinLnBrk="0" hangingPunct="0">
+              <a:lnSpc>
+                <a:spcPct val="100000"/>
+              </a:lnSpc>
+              <a:spcBef>
+                <a:spcPct val="0"/>
+              </a:spcBef>
+              <a:spcAft>
+                <a:spcPct val="0"/>
+              </a:spcAft>
+              <a:buClrTx/>
+              <a:buSzTx/>
+              <a:buFontTx/>
+              <a:buChar char="•"/>
+              <a:tabLst/>
+            </a:pPr>
+            <a:r>
+              <a:rPr kumimoji="0" lang="en-US" altLang="en-US" sz="2700" b="1" i="0" u="none" strike="noStrike" cap="none" normalizeH="0" baseline="0" dirty="0">
+                <a:ln>
+                  <a:noFill/>
+                </a:ln>
+                <a:solidFill>
+                  <a:schemeClr val="tx1"/>
+                </a:solidFill>
+                <a:effectLst/>
+                <a:latin typeface="Gill Sans MT (body)"/>
+              </a:rPr>
+              <a:t>Final Thought:</a:t>
+            </a:r>
+            <a:r>
+              <a:rPr kumimoji="0" lang="en-US" altLang="en-US" sz="2700" b="0" i="0" u="none" strike="noStrike" cap="none" normalizeH="0" baseline="0" dirty="0">
+                <a:ln>
+                  <a:noFill/>
+                </a:ln>
+                <a:solidFill>
+                  <a:schemeClr val="tx1"/>
+                </a:solidFill>
+                <a:effectLst/>
+                <a:latin typeface="Gill Sans MT (body)"/>
+              </a:rPr>
+              <a:t> "Unlocking the data inside stories to make literature more accessible."</a:t>
+            </a:r>
+          </a:p>
+        </p:txBody>
+      </p:sp>
+    </p:spTree>
+    <p:extLst>
+      <p:ext uri="{BB962C8B-B14F-4D97-AF65-F5344CB8AC3E}">
+        <p14:creationId xmlns:p14="http://schemas.microsoft.com/office/powerpoint/2010/main" val="3652229684"/>
+      </p:ext>
+    </p:extLst>
+  </p:cSld>
+  <p:clrMapOvr>
+    <a:masterClrMapping/>
+  </p:clrMapOvr>
+  <p:transition spd="slow">
+    <p:wipe/>
+  </p:transition>
+</p:sld>
+</file>
+
+<file path=ppt/slides/slide13.xml><?xml version="1.0" encoding="utf-8"?>
+<p:sld xmlns:a="http://schemas.openxmlformats.org/drawingml/2006/main" xmlns:r="http://schemas.openxmlformats.org/officeDocument/2006/relationships" xmlns:p="http://schemas.openxmlformats.org/presentationml/2006/main">
+  <p:cSld>
+    <p:spTree>
+      <p:nvGrpSpPr>
+        <p:cNvPr id="1" name=""/>
+        <p:cNvGrpSpPr/>
+        <p:nvPr/>
+      </p:nvGrpSpPr>
+      <p:grpSpPr>
+        <a:xfrm>
+          <a:off x="0" y="0"/>
+          <a:ext cx="0" cy="0"/>
+          <a:chOff x="0" y="0"/>
+          <a:chExt cx="0" cy="0"/>
+        </a:xfrm>
+      </p:grpSpPr>
+      <p:sp>
+        <p:nvSpPr>
+          <p:cNvPr id="3" name="TextBox 2">
+            <a:extLst>
+              <a:ext uri="{FF2B5EF4-FFF2-40B4-BE49-F238E27FC236}">
                 <a16:creationId xmlns:a16="http://schemas.microsoft.com/office/drawing/2014/main" id="{129B0A06-D22D-3D7E-376E-1FD04698DAF8}"/>
               </a:ext>
             </a:extLst>
@@ -4370,13 +5382,13 @@
   <p:clrMapOvr>
     <a:masterClrMapping/>
   </p:clrMapOvr>
-  <mc:AlternateContent xmlns:mc="http://schemas.openxmlformats.org/markup-compatibility/2006">
-    <mc:Choice xmlns:p14="http://schemas.microsoft.com/office/powerpoint/2010/main" Requires="p14">
+  <mc:AlternateContent xmlns:mc="http://schemas.openxmlformats.org/markup-compatibility/2006" xmlns:p14="http://schemas.microsoft.com/office/powerpoint/2010/main">
+    <mc:Choice Requires="p14">
       <p:transition spd="slow" p14:dur="1500">
         <p:split orient="vert"/>
       </p:transition>
     </mc:Choice>
-    <mc:Fallback>
+    <mc:Fallback xmlns="">
       <p:transition spd="slow">
         <p:split orient="vert"/>
       </p:transition>
@@ -4456,8 +5468,8 @@
         </p:nvSpPr>
         <p:spPr bwMode="auto">
           <a:xfrm>
-            <a:off x="424543" y="1651590"/>
-            <a:ext cx="12043317" cy="3554819"/>
+            <a:off x="319612" y="1393169"/>
+            <a:ext cx="12043317" cy="3831818"/>
           </a:xfrm>
           <a:prstGeom prst="rect">
             <a:avLst/>
@@ -4522,7 +5534,7 @@
               <a:tabLst/>
             </a:pPr>
             <a:r>
-              <a:rPr kumimoji="0" lang="en-US" altLang="en-US" sz="2500" b="1" i="0" u="none" strike="noStrike" cap="none" normalizeH="0" baseline="0" dirty="0">
+              <a:rPr kumimoji="0" lang="en-US" altLang="en-US" sz="2700" b="1" i="0" u="none" strike="noStrike" cap="none" normalizeH="0" baseline="0" dirty="0">
                 <a:ln>
                   <a:noFill/>
                 </a:ln>
@@ -4530,12 +5542,12 @@
                   <a:schemeClr val="tx1"/>
                 </a:solidFill>
                 <a:effectLst/>
-                <a:latin typeface="Arial" panose="020B0604020202020204" pitchFamily="34" charset="0"/>
+                <a:latin typeface="Gill Sans MT(body)"/>
               </a:rPr>
               <a:t>The Context:</a:t>
             </a:r>
             <a:r>
-              <a:rPr kumimoji="0" lang="en-US" altLang="en-US" sz="2500" b="0" i="0" u="none" strike="noStrike" cap="none" normalizeH="0" baseline="0" dirty="0">
+              <a:rPr kumimoji="0" lang="en-US" altLang="en-US" sz="2700" b="0" i="0" u="none" strike="noStrike" cap="none" normalizeH="0" baseline="0" dirty="0">
                 <a:ln>
                   <a:noFill/>
                 </a:ln>
@@ -4543,7 +5555,7 @@
                   <a:schemeClr val="tx1"/>
                 </a:solidFill>
                 <a:effectLst/>
-                <a:latin typeface="Arial" panose="020B0604020202020204" pitchFamily="34" charset="0"/>
+                <a:latin typeface="Gill Sans MT(body)"/>
               </a:rPr>
               <a:t> Audiobooks are a rapidly growing medium for storytelling and education.</a:t>
             </a:r>
@@ -4563,7 +5575,7 @@
               <a:buSzTx/>
               <a:tabLst/>
             </a:pPr>
-            <a:endParaRPr kumimoji="0" lang="en-US" altLang="en-US" sz="2500" b="0" i="0" u="none" strike="noStrike" cap="none" normalizeH="0" baseline="0" dirty="0">
+            <a:endParaRPr kumimoji="0" lang="en-US" altLang="en-US" sz="2700" b="0" i="0" u="none" strike="noStrike" cap="none" normalizeH="0" baseline="0" dirty="0">
               <a:ln>
                 <a:noFill/>
               </a:ln>
@@ -4571,7 +5583,7 @@
                 <a:schemeClr val="tx1"/>
               </a:solidFill>
               <a:effectLst/>
-              <a:latin typeface="Arial" panose="020B0604020202020204" pitchFamily="34" charset="0"/>
+              <a:latin typeface="Gill Sans MT(body)"/>
             </a:endParaRPr>
           </a:p>
           <a:p>
@@ -4592,7 +5604,7 @@
               <a:tabLst/>
             </a:pPr>
             <a:r>
-              <a:rPr kumimoji="0" lang="en-US" altLang="en-US" sz="2500" b="1" i="0" u="none" strike="noStrike" cap="none" normalizeH="0" baseline="0" dirty="0">
+              <a:rPr kumimoji="0" lang="en-US" altLang="en-US" sz="2700" b="1" i="0" u="none" strike="noStrike" cap="none" normalizeH="0" baseline="0" dirty="0">
                 <a:ln>
                   <a:noFill/>
                 </a:ln>
@@ -4600,12 +5612,12 @@
                   <a:schemeClr val="tx1"/>
                 </a:solidFill>
                 <a:effectLst/>
-                <a:latin typeface="Arial" panose="020B0604020202020204" pitchFamily="34" charset="0"/>
+                <a:latin typeface="Gill Sans MT(body)"/>
               </a:rPr>
               <a:t>The Problem:</a:t>
             </a:r>
             <a:r>
-              <a:rPr kumimoji="0" lang="en-US" altLang="en-US" sz="2500" b="0" i="0" u="none" strike="noStrike" cap="none" normalizeH="0" baseline="0" dirty="0">
+              <a:rPr kumimoji="0" lang="en-US" altLang="en-US" sz="2700" b="0" i="0" u="none" strike="noStrike" cap="none" normalizeH="0" baseline="0" dirty="0">
                 <a:ln>
                   <a:noFill/>
                 </a:ln>
@@ -4613,7 +5625,7 @@
                   <a:schemeClr val="tx1"/>
                 </a:solidFill>
                 <a:effectLst/>
-                <a:latin typeface="Arial" panose="020B0604020202020204" pitchFamily="34" charset="0"/>
+                <a:latin typeface="Gill Sans MT(body)"/>
               </a:rPr>
               <a:t> Unlike text, audiobooks are "unsearchable." Listeners cannot easily find specific scenes, quotes, or character interactions without scrubbing through hours of audio.</a:t>
             </a:r>
@@ -4633,7 +5645,7 @@
               <a:buSzTx/>
               <a:tabLst/>
             </a:pPr>
-            <a:endParaRPr kumimoji="0" lang="en-US" altLang="en-US" sz="2500" b="0" i="0" u="none" strike="noStrike" cap="none" normalizeH="0" baseline="0" dirty="0">
+            <a:endParaRPr kumimoji="0" lang="en-US" altLang="en-US" sz="2700" b="0" i="0" u="none" strike="noStrike" cap="none" normalizeH="0" baseline="0" dirty="0">
               <a:ln>
                 <a:noFill/>
               </a:ln>
@@ -4641,7 +5653,7 @@
                 <a:schemeClr val="tx1"/>
               </a:solidFill>
               <a:effectLst/>
-              <a:latin typeface="Arial" panose="020B0604020202020204" pitchFamily="34" charset="0"/>
+              <a:latin typeface="Gill Sans MT(body)"/>
             </a:endParaRPr>
           </a:p>
           <a:p>
@@ -4662,7 +5674,7 @@
               <a:tabLst/>
             </a:pPr>
             <a:r>
-              <a:rPr kumimoji="0" lang="en-US" altLang="en-US" sz="2500" b="1" i="0" u="none" strike="noStrike" cap="none" normalizeH="0" baseline="0" dirty="0">
+              <a:rPr kumimoji="0" lang="en-US" altLang="en-US" sz="2700" b="1" i="0" u="none" strike="noStrike" cap="none" normalizeH="0" baseline="0" dirty="0">
                 <a:ln>
                   <a:noFill/>
                 </a:ln>
@@ -4670,12 +5682,12 @@
                   <a:schemeClr val="tx1"/>
                 </a:solidFill>
                 <a:effectLst/>
-                <a:latin typeface="Arial" panose="020B0604020202020204" pitchFamily="34" charset="0"/>
+                <a:latin typeface="Gill Sans MT(body)"/>
               </a:rPr>
               <a:t>The Solution:</a:t>
             </a:r>
             <a:r>
-              <a:rPr kumimoji="0" lang="en-US" altLang="en-US" sz="2500" b="0" i="0" u="none" strike="noStrike" cap="none" normalizeH="0" baseline="0" dirty="0">
+              <a:rPr kumimoji="0" lang="en-US" altLang="en-US" sz="2700" b="0" i="0" u="none" strike="noStrike" cap="none" normalizeH="0" baseline="0" dirty="0">
                 <a:ln>
                   <a:noFill/>
                 </a:ln>
@@ -4683,22 +5695,9 @@
                   <a:schemeClr val="tx1"/>
                 </a:solidFill>
                 <a:effectLst/>
-                <a:latin typeface="Arial" panose="020B0604020202020204" pitchFamily="34" charset="0"/>
+                <a:latin typeface="Gill Sans MT(body)"/>
               </a:rPr>
-              <a:t> An automated system that "listens" to the story, transcribes it, and segments it by narrative context</a:t>
-            </a:r>
-            <a:r>
-              <a:rPr kumimoji="0" lang="en-US" altLang="en-US" sz="1800" b="0" i="0" u="none" strike="noStrike" cap="none" normalizeH="0" baseline="0" dirty="0">
-                <a:ln>
-                  <a:noFill/>
-                </a:ln>
-                <a:solidFill>
-                  <a:schemeClr val="tx1"/>
-                </a:solidFill>
-                <a:effectLst/>
-                <a:latin typeface="Arial" panose="020B0604020202020204" pitchFamily="34" charset="0"/>
-              </a:rPr>
-              <a:t>.</a:t>
+              <a:t> An automated system that "listens" to the story, transcribes it, and segments it by narrative context.</a:t>
             </a:r>
           </a:p>
         </p:txBody>
@@ -4713,13 +5712,13 @@
   <p:clrMapOvr>
     <a:masterClrMapping/>
   </p:clrMapOvr>
-  <mc:AlternateContent xmlns:mc="http://schemas.openxmlformats.org/markup-compatibility/2006">
-    <mc:Choice xmlns:p14="http://schemas.microsoft.com/office/powerpoint/2010/main" Requires="p14">
+  <mc:AlternateContent xmlns:mc="http://schemas.openxmlformats.org/markup-compatibility/2006" xmlns:p14="http://schemas.microsoft.com/office/powerpoint/2010/main">
+    <mc:Choice Requires="p14">
       <p:transition spd="med" p14:dur="700">
         <p:fade/>
       </p:transition>
     </mc:Choice>
-    <mc:Fallback>
+    <mc:Fallback xmlns="">
       <p:transition spd="med">
         <p:fade/>
       </p:transition>
@@ -4759,7 +5758,7 @@
         </p:nvSpPr>
         <p:spPr>
           <a:xfrm>
-            <a:off x="209552" y="343291"/>
+            <a:off x="209552" y="0"/>
             <a:ext cx="6101442" cy="630942"/>
           </a:xfrm>
           <a:prstGeom prst="rect">
@@ -4796,8 +5795,8 @@
         </p:nvSpPr>
         <p:spPr bwMode="auto">
           <a:xfrm>
-            <a:off x="0" y="1105251"/>
-            <a:ext cx="15265277" cy="3754874"/>
+            <a:off x="392243" y="630942"/>
+            <a:ext cx="11107711" cy="5770811"/>
           </a:xfrm>
           <a:prstGeom prst="rect">
             <a:avLst/>
@@ -4862,7 +5861,7 @@
               <a:tabLst/>
             </a:pPr>
             <a:r>
-              <a:rPr kumimoji="0" lang="en-US" altLang="en-US" sz="2000" b="1" i="0" u="none" strike="noStrike" cap="none" normalizeH="0" baseline="0" dirty="0">
+              <a:rPr kumimoji="0" lang="en-US" altLang="en-US" sz="2700" b="1" i="0" u="none" strike="noStrike" cap="none" normalizeH="0" baseline="0" dirty="0">
                 <a:ln>
                   <a:noFill/>
                 </a:ln>
@@ -4870,12 +5869,12 @@
                   <a:schemeClr val="tx1"/>
                 </a:solidFill>
                 <a:effectLst/>
-                <a:latin typeface="Arial" panose="020B0604020202020204" pitchFamily="34" charset="0"/>
+                <a:latin typeface="Gill Sans MT(body)"/>
               </a:rPr>
               <a:t>Primary Goal:</a:t>
             </a:r>
             <a:r>
-              <a:rPr kumimoji="0" lang="en-US" altLang="en-US" sz="2000" b="0" i="0" u="none" strike="noStrike" cap="none" normalizeH="0" baseline="0" dirty="0">
+              <a:rPr kumimoji="0" lang="en-US" altLang="en-US" sz="2700" b="0" i="0" u="none" strike="noStrike" cap="none" normalizeH="0" baseline="0" dirty="0">
                 <a:ln>
                   <a:noFill/>
                 </a:ln>
@@ -4883,7 +5882,7 @@
                   <a:schemeClr val="tx1"/>
                 </a:solidFill>
                 <a:effectLst/>
-                <a:latin typeface="Arial" panose="020B0604020202020204" pitchFamily="34" charset="0"/>
+                <a:latin typeface="Gill Sans MT(body)"/>
               </a:rPr>
               <a:t> To create a searchable, structured index for long-form narrative audio.</a:t>
             </a:r>
@@ -4903,7 +5902,7 @@
               <a:buSzTx/>
               <a:tabLst/>
             </a:pPr>
-            <a:endParaRPr kumimoji="0" lang="en-US" altLang="en-US" sz="2000" b="0" i="0" u="none" strike="noStrike" cap="none" normalizeH="0" baseline="0" dirty="0">
+            <a:endParaRPr kumimoji="0" lang="en-US" altLang="en-US" sz="2700" b="0" i="0" u="none" strike="noStrike" cap="none" normalizeH="0" baseline="0" dirty="0">
               <a:ln>
                 <a:noFill/>
               </a:ln>
@@ -4911,7 +5910,7 @@
                 <a:schemeClr val="tx1"/>
               </a:solidFill>
               <a:effectLst/>
-              <a:latin typeface="Arial" panose="020B0604020202020204" pitchFamily="34" charset="0"/>
+              <a:latin typeface="Gill Sans MT(body)"/>
             </a:endParaRPr>
           </a:p>
           <a:p>
@@ -4932,7 +5931,7 @@
               <a:tabLst/>
             </a:pPr>
             <a:r>
-              <a:rPr kumimoji="0" lang="en-US" altLang="en-US" sz="2000" b="1" i="0" u="none" strike="noStrike" cap="none" normalizeH="0" baseline="0" dirty="0">
+              <a:rPr kumimoji="0" lang="en-US" altLang="en-US" sz="2700" b="1" i="0" u="none" strike="noStrike" cap="none" normalizeH="0" baseline="0" dirty="0">
                 <a:ln>
                   <a:noFill/>
                 </a:ln>
@@ -4940,7 +5939,7 @@
                   <a:schemeClr val="tx1"/>
                 </a:solidFill>
                 <a:effectLst/>
-                <a:latin typeface="Arial" panose="020B0604020202020204" pitchFamily="34" charset="0"/>
+                <a:latin typeface="Gill Sans MT(body)"/>
               </a:rPr>
               <a:t>Key Objectives:</a:t>
             </a:r>
@@ -4960,7 +5959,7 @@
               <a:buSzTx/>
               <a:tabLst/>
             </a:pPr>
-            <a:endParaRPr kumimoji="0" lang="en-US" altLang="en-US" sz="2000" b="0" i="0" u="none" strike="noStrike" cap="none" normalizeH="0" baseline="0" dirty="0">
+            <a:endParaRPr kumimoji="0" lang="en-US" altLang="en-US" sz="2700" b="0" i="0" u="none" strike="noStrike" cap="none" normalizeH="0" baseline="0" dirty="0">
               <a:ln>
                 <a:noFill/>
               </a:ln>
@@ -4968,7 +5967,7 @@
                 <a:schemeClr val="tx1"/>
               </a:solidFill>
               <a:effectLst/>
-              <a:latin typeface="Arial" panose="020B0604020202020204" pitchFamily="34" charset="0"/>
+              <a:latin typeface="Gill Sans MT(body)"/>
             </a:endParaRPr>
           </a:p>
           <a:p>
@@ -4989,7 +5988,7 @@
               <a:tabLst/>
             </a:pPr>
             <a:r>
-              <a:rPr kumimoji="0" lang="en-US" altLang="en-US" sz="2000" b="1" i="0" u="none" strike="noStrike" cap="none" normalizeH="0" baseline="0" dirty="0">
+              <a:rPr kumimoji="0" lang="en-US" altLang="en-US" sz="2700" b="1" i="0" u="none" strike="noStrike" cap="none" normalizeH="0" baseline="0" dirty="0">
                 <a:ln>
                   <a:noFill/>
                 </a:ln>
@@ -4997,12 +5996,12 @@
                   <a:schemeClr val="tx1"/>
                 </a:solidFill>
                 <a:effectLst/>
-                <a:latin typeface="Arial" panose="020B0604020202020204" pitchFamily="34" charset="0"/>
+                <a:latin typeface="Gill Sans MT(body)"/>
               </a:rPr>
               <a:t>Automated Transcription:</a:t>
             </a:r>
             <a:r>
-              <a:rPr kumimoji="0" lang="en-US" altLang="en-US" sz="2000" b="0" i="0" u="none" strike="noStrike" cap="none" normalizeH="0" baseline="0" dirty="0">
+              <a:rPr kumimoji="0" lang="en-US" altLang="en-US" sz="2700" b="0" i="0" u="none" strike="noStrike" cap="none" normalizeH="0" baseline="0" dirty="0">
                 <a:ln>
                   <a:noFill/>
                 </a:ln>
@@ -5010,7 +6009,7 @@
                   <a:schemeClr val="tx1"/>
                 </a:solidFill>
                 <a:effectLst/>
-                <a:latin typeface="Arial" panose="020B0604020202020204" pitchFamily="34" charset="0"/>
+                <a:latin typeface="Gill Sans MT(body)"/>
               </a:rPr>
               <a:t> Convert classic literature audio to text.</a:t>
             </a:r>
@@ -5030,7 +6029,7 @@
               <a:buSzTx/>
               <a:tabLst/>
             </a:pPr>
-            <a:endParaRPr kumimoji="0" lang="en-US" altLang="en-US" sz="2000" b="0" i="0" u="none" strike="noStrike" cap="none" normalizeH="0" baseline="0" dirty="0">
+            <a:endParaRPr kumimoji="0" lang="en-US" altLang="en-US" sz="2700" b="0" i="0" u="none" strike="noStrike" cap="none" normalizeH="0" baseline="0" dirty="0">
               <a:ln>
                 <a:noFill/>
               </a:ln>
@@ -5038,7 +6037,7 @@
                 <a:schemeClr val="tx1"/>
               </a:solidFill>
               <a:effectLst/>
-              <a:latin typeface="Arial" panose="020B0604020202020204" pitchFamily="34" charset="0"/>
+              <a:latin typeface="Gill Sans MT(body)"/>
             </a:endParaRPr>
           </a:p>
           <a:p>
@@ -5059,7 +6058,7 @@
               <a:tabLst/>
             </a:pPr>
             <a:r>
-              <a:rPr kumimoji="0" lang="en-US" altLang="en-US" sz="2000" b="1" i="0" u="none" strike="noStrike" cap="none" normalizeH="0" baseline="0" dirty="0">
+              <a:rPr kumimoji="0" lang="en-US" altLang="en-US" sz="2700" b="1" i="0" u="none" strike="noStrike" cap="none" normalizeH="0" baseline="0" dirty="0">
                 <a:ln>
                   <a:noFill/>
                 </a:ln>
@@ -5067,12 +6066,12 @@
                   <a:schemeClr val="tx1"/>
                 </a:solidFill>
                 <a:effectLst/>
-                <a:latin typeface="Arial" panose="020B0604020202020204" pitchFamily="34" charset="0"/>
+                <a:latin typeface="Gill Sans MT(body)"/>
               </a:rPr>
               <a:t>Narrative Segmentation:</a:t>
             </a:r>
             <a:r>
-              <a:rPr kumimoji="0" lang="en-US" altLang="en-US" sz="2000" b="0" i="0" u="none" strike="noStrike" cap="none" normalizeH="0" baseline="0" dirty="0">
+              <a:rPr kumimoji="0" lang="en-US" altLang="en-US" sz="2700" b="0" i="0" u="none" strike="noStrike" cap="none" normalizeH="0" baseline="0" dirty="0">
                 <a:ln>
                   <a:noFill/>
                 </a:ln>
@@ -5080,7 +6079,7 @@
                   <a:schemeClr val="tx1"/>
                 </a:solidFill>
                 <a:effectLst/>
-                <a:latin typeface="Arial" panose="020B0604020202020204" pitchFamily="34" charset="0"/>
+                <a:latin typeface="Gill Sans MT(body)"/>
               </a:rPr>
               <a:t> Detect scene shifts (e.g., moving from "221B Baker Street" to a crime scene).</a:t>
             </a:r>
@@ -5100,7 +6099,7 @@
               <a:buSzTx/>
               <a:tabLst/>
             </a:pPr>
-            <a:endParaRPr kumimoji="0" lang="en-US" altLang="en-US" sz="2000" b="0" i="0" u="none" strike="noStrike" cap="none" normalizeH="0" baseline="0" dirty="0">
+            <a:endParaRPr kumimoji="0" lang="en-US" altLang="en-US" sz="2700" b="0" i="0" u="none" strike="noStrike" cap="none" normalizeH="0" baseline="0" dirty="0">
               <a:ln>
                 <a:noFill/>
               </a:ln>
@@ -5108,7 +6107,7 @@
                 <a:schemeClr val="tx1"/>
               </a:solidFill>
               <a:effectLst/>
-              <a:latin typeface="Arial" panose="020B0604020202020204" pitchFamily="34" charset="0"/>
+              <a:latin typeface="Gill Sans MT(body)"/>
             </a:endParaRPr>
           </a:p>
           <a:p>
@@ -5129,7 +6128,7 @@
               <a:tabLst/>
             </a:pPr>
             <a:r>
-              <a:rPr kumimoji="0" lang="en-US" altLang="en-US" sz="2000" b="1" i="0" u="none" strike="noStrike" cap="none" normalizeH="0" baseline="0" dirty="0">
+              <a:rPr kumimoji="0" lang="en-US" altLang="en-US" sz="2700" b="1" i="0" u="none" strike="noStrike" cap="none" normalizeH="0" baseline="0" dirty="0">
                 <a:ln>
                   <a:noFill/>
                 </a:ln>
@@ -5137,12 +6136,12 @@
                   <a:schemeClr val="tx1"/>
                 </a:solidFill>
                 <a:effectLst/>
-                <a:latin typeface="Arial" panose="020B0604020202020204" pitchFamily="34" charset="0"/>
+                <a:latin typeface="Gill Sans MT(body)"/>
               </a:rPr>
               <a:t>Sentiment Tracking:</a:t>
             </a:r>
             <a:r>
-              <a:rPr kumimoji="0" lang="en-US" altLang="en-US" sz="2000" b="0" i="0" u="none" strike="noStrike" cap="none" normalizeH="0" baseline="0" dirty="0">
+              <a:rPr kumimoji="0" lang="en-US" altLang="en-US" sz="2700" b="0" i="0" u="none" strike="noStrike" cap="none" normalizeH="0" baseline="0" dirty="0">
                 <a:ln>
                   <a:noFill/>
                 </a:ln>
@@ -5150,36 +6149,10 @@
                   <a:schemeClr val="tx1"/>
                 </a:solidFill>
                 <a:effectLst/>
-                <a:latin typeface="Arial" panose="020B0604020202020204" pitchFamily="34" charset="0"/>
+                <a:latin typeface="Gill Sans MT(body)"/>
               </a:rPr>
               <a:t> Visualize the "Narrative Arc" (Tension/Mystery vs. Calm).</a:t>
             </a:r>
-          </a:p>
-          <a:p>
-            <a:pPr marL="0" marR="0" lvl="0" indent="0" algn="l" defTabSz="914400" rtl="0" eaLnBrk="0" fontAlgn="base" latinLnBrk="0" hangingPunct="0">
-              <a:lnSpc>
-                <a:spcPct val="100000"/>
-              </a:lnSpc>
-              <a:spcBef>
-                <a:spcPct val="0"/>
-              </a:spcBef>
-              <a:spcAft>
-                <a:spcPct val="0"/>
-              </a:spcAft>
-              <a:buClrTx/>
-              <a:buSzTx/>
-              <a:tabLst/>
-            </a:pPr>
-            <a:endParaRPr kumimoji="0" lang="en-US" altLang="en-US" sz="2000" b="0" i="0" u="none" strike="noStrike" cap="none" normalizeH="0" baseline="0" dirty="0">
-              <a:ln>
-                <a:noFill/>
-              </a:ln>
-              <a:solidFill>
-                <a:schemeClr val="tx1"/>
-              </a:solidFill>
-              <a:effectLst/>
-              <a:latin typeface="Arial" panose="020B0604020202020204" pitchFamily="34" charset="0"/>
-            </a:endParaRPr>
           </a:p>
           <a:p>
             <a:pPr marL="0" marR="0" lvl="0" indent="0" algn="l" defTabSz="914400" rtl="0" eaLnBrk="0" fontAlgn="base" latinLnBrk="0" hangingPunct="0">
@@ -5199,7 +6172,7 @@
               <a:tabLst/>
             </a:pPr>
             <a:r>
-              <a:rPr kumimoji="0" lang="en-US" altLang="en-US" sz="2000" b="1" i="0" u="none" strike="noStrike" cap="none" normalizeH="0" baseline="0" dirty="0">
+              <a:rPr kumimoji="0" lang="en-US" altLang="en-US" sz="2700" b="1" i="0" u="none" strike="noStrike" cap="none" normalizeH="0" baseline="0" dirty="0">
                 <a:ln>
                   <a:noFill/>
                 </a:ln>
@@ -5207,12 +6180,12 @@
                   <a:schemeClr val="tx1"/>
                 </a:solidFill>
                 <a:effectLst/>
-                <a:latin typeface="Arial" panose="020B0604020202020204" pitchFamily="34" charset="0"/>
+                <a:latin typeface="Gill Sans MT(body)"/>
               </a:rPr>
               <a:t>Keyword Extraction:</a:t>
             </a:r>
             <a:r>
-              <a:rPr kumimoji="0" lang="en-US" altLang="en-US" sz="2000" b="0" i="0" u="none" strike="noStrike" cap="none" normalizeH="0" baseline="0" dirty="0">
+              <a:rPr kumimoji="0" lang="en-US" altLang="en-US" sz="2700" b="0" i="0" u="none" strike="noStrike" cap="none" normalizeH="0" baseline="0" dirty="0">
                 <a:ln>
                   <a:noFill/>
                 </a:ln>
@@ -5220,7 +6193,7 @@
                   <a:schemeClr val="tx1"/>
                 </a:solidFill>
                 <a:effectLst/>
-                <a:latin typeface="Arial" panose="020B0604020202020204" pitchFamily="34" charset="0"/>
+                <a:latin typeface="Gill Sans MT(body)"/>
               </a:rPr>
               <a:t> Identify key characters (Holmes, Watson) and clues.</a:t>
             </a:r>
@@ -5302,7 +6275,7 @@
         </p:nvSpPr>
         <p:spPr>
           <a:xfrm>
-            <a:off x="231322" y="310634"/>
+            <a:off x="484324" y="370595"/>
             <a:ext cx="6101442" cy="630942"/>
           </a:xfrm>
           <a:prstGeom prst="rect">
@@ -5337,8 +6310,8 @@
         </p:nvSpPr>
         <p:spPr>
           <a:xfrm>
-            <a:off x="544285" y="1317172"/>
-            <a:ext cx="10602685" cy="3170099"/>
+            <a:off x="484324" y="1001537"/>
+            <a:ext cx="10848240" cy="5078313"/>
           </a:xfrm>
           <a:prstGeom prst="rect">
             <a:avLst/>
@@ -5356,42 +6329,35 @@
               <a:buChar char="•"/>
             </a:pPr>
             <a:r>
-              <a:rPr lang="en-IN" sz="2500" b="1" dirty="0"/>
+              <a:rPr lang="en-IN" sz="2700" b="1" dirty="0">
+                <a:latin typeface="Gill Sans MT(body)"/>
+              </a:rPr>
               <a:t>Name:</a:t>
             </a:r>
             <a:r>
-              <a:rPr lang="en-IN" sz="2500" dirty="0"/>
+              <a:rPr lang="en-IN" sz="2700" dirty="0">
+                <a:latin typeface="Gill Sans MT(body)"/>
+              </a:rPr>
               <a:t> </a:t>
             </a:r>
             <a:r>
-              <a:rPr lang="en-IN" sz="2500" dirty="0" err="1">
-                <a:latin typeface="Courier New" panose="02070309020205020404" pitchFamily="49" charset="0"/>
+              <a:rPr lang="en-IN" sz="2700" dirty="0" err="1">
+                <a:latin typeface="Gill Sans MT(body)"/>
               </a:rPr>
               <a:t>adventures_sherlock_holmes_rg_librivox</a:t>
             </a:r>
-            <a:endParaRPr lang="en-IN" sz="2500" dirty="0"/>
+            <a:endParaRPr lang="en-IN" sz="2700" dirty="0">
+              <a:latin typeface="Gill Sans MT(body)"/>
+            </a:endParaRPr>
           </a:p>
           <a:p>
             <a:pPr>
               <a:buFont typeface="Arial" panose="020B0604020202020204" pitchFamily="34" charset="0"/>
               <a:buChar char="•"/>
             </a:pPr>
-            <a:r>
-              <a:rPr lang="en-IN" sz="2500" b="1" dirty="0"/>
-              <a:t>Source:</a:t>
-            </a:r>
-            <a:r>
-              <a:rPr lang="en-IN" sz="2500" dirty="0"/>
-              <a:t> </a:t>
-            </a:r>
-            <a:r>
-              <a:rPr lang="en-IN" sz="2500" dirty="0" err="1"/>
-              <a:t>LibriSpeech</a:t>
-            </a:r>
-            <a:r>
-              <a:rPr lang="en-IN" sz="2500" dirty="0"/>
-              <a:t> </a:t>
-            </a:r>
+            <a:endParaRPr lang="en-IN" sz="2700" dirty="0">
+              <a:latin typeface="Gill Sans MT(body)"/>
+            </a:endParaRPr>
           </a:p>
           <a:p>
             <a:pPr>
@@ -5399,10 +6365,59 @@
               <a:buChar char="•"/>
             </a:pPr>
             <a:r>
-              <a:rPr lang="en-IN" sz="2500" b="1" dirty="0"/>
+              <a:rPr lang="en-IN" sz="2700" b="1" dirty="0">
+                <a:latin typeface="Gill Sans MT(body)"/>
+              </a:rPr>
+              <a:t>Source:</a:t>
+            </a:r>
+            <a:r>
+              <a:rPr lang="en-IN" sz="2700" dirty="0">
+                <a:latin typeface="Gill Sans MT(body)"/>
+              </a:rPr>
+              <a:t> </a:t>
+            </a:r>
+            <a:r>
+              <a:rPr lang="en-IN" sz="2700" dirty="0" err="1">
+                <a:latin typeface="Gill Sans MT(body)"/>
+              </a:rPr>
+              <a:t>LibriSpeech</a:t>
+            </a:r>
+            <a:r>
+              <a:rPr lang="en-IN" sz="2700" dirty="0">
+                <a:latin typeface="Gill Sans MT(body)"/>
+              </a:rPr>
+              <a:t> </a:t>
+            </a:r>
+          </a:p>
+          <a:p>
+            <a:pPr>
+              <a:buFont typeface="Arial" panose="020B0604020202020204" pitchFamily="34" charset="0"/>
+              <a:buChar char="•"/>
+            </a:pPr>
+            <a:endParaRPr lang="en-IN" sz="2700" dirty="0">
+              <a:latin typeface="Gill Sans MT(body)"/>
+            </a:endParaRPr>
+          </a:p>
+          <a:p>
+            <a:pPr>
+              <a:buFont typeface="Arial" panose="020B0604020202020204" pitchFamily="34" charset="0"/>
+              <a:buChar char="•"/>
+            </a:pPr>
+            <a:r>
+              <a:rPr lang="en-IN" sz="2700" b="1" dirty="0">
+                <a:latin typeface="Gill Sans MT(body)"/>
+              </a:rPr>
               <a:t>Description:</a:t>
             </a:r>
-            <a:endParaRPr lang="en-IN" sz="2500" dirty="0"/>
+          </a:p>
+          <a:p>
+            <a:pPr>
+              <a:buFont typeface="Arial" panose="020B0604020202020204" pitchFamily="34" charset="0"/>
+              <a:buChar char="•"/>
+            </a:pPr>
+            <a:endParaRPr lang="en-IN" sz="2700" dirty="0">
+              <a:latin typeface="Gill Sans MT(body)"/>
+            </a:endParaRPr>
           </a:p>
           <a:p>
             <a:pPr marL="742950" lvl="1" indent="-285750">
@@ -5410,15 +6425,21 @@
               <a:buChar char="•"/>
             </a:pPr>
             <a:r>
-              <a:rPr lang="en-IN" sz="2500" dirty="0"/>
+              <a:rPr lang="en-IN" sz="2700" dirty="0">
+                <a:latin typeface="Gill Sans MT(body)"/>
+              </a:rPr>
               <a:t>High-quality, read speech from Arthur Conan Doyle’s </a:t>
             </a:r>
             <a:r>
-              <a:rPr lang="en-IN" sz="2500" i="1" dirty="0"/>
+              <a:rPr lang="en-IN" sz="2700" i="1" dirty="0">
+                <a:latin typeface="Gill Sans MT(body)"/>
+              </a:rPr>
               <a:t>The Adventures of Sherlock Holmes</a:t>
             </a:r>
             <a:r>
-              <a:rPr lang="en-IN" sz="2500" dirty="0"/>
+              <a:rPr lang="en-IN" sz="2700" dirty="0">
+                <a:latin typeface="Gill Sans MT(body)"/>
+              </a:rPr>
               <a:t>.</a:t>
             </a:r>
           </a:p>
@@ -5427,14 +6448,36 @@
               <a:buFont typeface="Arial" panose="020B0604020202020204" pitchFamily="34" charset="0"/>
               <a:buChar char="•"/>
             </a:pPr>
-            <a:r>
-              <a:rPr lang="en-IN" sz="2500" b="1" dirty="0"/>
+            <a:endParaRPr lang="en-IN" sz="2700" dirty="0">
+              <a:latin typeface="Gill Sans MT(body)"/>
+            </a:endParaRPr>
+          </a:p>
+          <a:p>
+            <a:pPr marL="742950" lvl="1" indent="-285750">
+              <a:buFont typeface="Arial" panose="020B0604020202020204" pitchFamily="34" charset="0"/>
+              <a:buChar char="•"/>
+            </a:pPr>
+            <a:r>
+              <a:rPr lang="en-IN" sz="2700" b="1" dirty="0">
+                <a:latin typeface="Gill Sans MT(body)"/>
+              </a:rPr>
               <a:t>Why this dataset?</a:t>
             </a:r>
             <a:r>
-              <a:rPr lang="en-IN" sz="2500" dirty="0"/>
+              <a:rPr lang="en-IN" sz="2700" dirty="0">
+                <a:latin typeface="Gill Sans MT(body)"/>
+              </a:rPr>
               <a:t> It provides a challenging, lengthy narrative structure perfect for testing segmentation algorithms (unlike short voice commands).</a:t>
             </a:r>
+            <a:r>
+              <a:rPr lang="en-IN" sz="2700" b="1" dirty="0">
+                <a:latin typeface="Gill Sans MT(body)"/>
+              </a:rPr>
+              <a:t> </a:t>
+            </a:r>
+            <a:endParaRPr lang="en-IN" sz="2700" dirty="0">
+              <a:latin typeface="Gill Sans MT(body)"/>
+            </a:endParaRPr>
           </a:p>
         </p:txBody>
       </p:sp>
@@ -5448,13 +6491,13 @@
   <p:clrMapOvr>
     <a:masterClrMapping/>
   </p:clrMapOvr>
-  <mc:AlternateContent xmlns:mc="http://schemas.openxmlformats.org/markup-compatibility/2006">
-    <mc:Choice xmlns:p14="http://schemas.microsoft.com/office/powerpoint/2010/main" Requires="p14">
+  <mc:AlternateContent xmlns:mc="http://schemas.openxmlformats.org/markup-compatibility/2006" xmlns:p14="http://schemas.microsoft.com/office/powerpoint/2010/main">
+    <mc:Choice Requires="p14">
       <p:transition spd="slow" p14:dur="1400">
         <p14:ripple/>
       </p:transition>
     </mc:Choice>
-    <mc:Fallback>
+    <mc:Fallback xmlns="">
       <p:transition spd="slow">
         <p:fade/>
       </p:transition>
@@ -5530,7 +6573,7 @@
         </p:nvSpPr>
         <p:spPr>
           <a:xfrm>
-            <a:off x="0" y="154448"/>
+            <a:off x="149901" y="0"/>
             <a:ext cx="6108492" cy="1169551"/>
           </a:xfrm>
           <a:prstGeom prst="rect">
@@ -5570,8 +6613,8 @@
         </p:nvSpPr>
         <p:spPr bwMode="auto">
           <a:xfrm>
-            <a:off x="149901" y="1461463"/>
-            <a:ext cx="6907532" cy="3477875"/>
+            <a:off x="149901" y="682094"/>
+            <a:ext cx="6640643" cy="5493812"/>
           </a:xfrm>
           <a:prstGeom prst="rect">
             <a:avLst/>
@@ -5611,7 +6654,7 @@
           </a:extLst>
         </p:spPr>
         <p:txBody>
-          <a:bodyPr vert="horz" wrap="none" lIns="91440" tIns="45720" rIns="91440" bIns="45720" numCol="1" anchor="ctr" anchorCtr="0" compatLnSpc="1">
+          <a:bodyPr vert="horz" wrap="square" lIns="91440" tIns="45720" rIns="91440" bIns="45720" numCol="1" anchor="ctr" anchorCtr="0" compatLnSpc="1">
             <a:prstTxWarp prst="textNoShape">
               <a:avLst/>
             </a:prstTxWarp>
@@ -5636,7 +6679,7 @@
               <a:tabLst/>
             </a:pPr>
             <a:r>
-              <a:rPr kumimoji="0" lang="en-US" altLang="en-US" sz="2000" b="1" i="0" u="none" strike="noStrike" cap="none" normalizeH="0" baseline="0" dirty="0">
+              <a:rPr kumimoji="0" lang="en-US" altLang="en-US" sz="2700" b="1" i="0" u="none" strike="noStrike" cap="none" normalizeH="0" baseline="0" dirty="0">
                 <a:ln>
                   <a:noFill/>
                 </a:ln>
@@ -5644,12 +6687,12 @@
                   <a:schemeClr val="tx1"/>
                 </a:solidFill>
                 <a:effectLst/>
-                <a:latin typeface="Arial" panose="020B0604020202020204" pitchFamily="34" charset="0"/>
+                <a:latin typeface="Gill Sans MT(body)"/>
               </a:rPr>
               <a:t>Input:</a:t>
             </a:r>
             <a:r>
-              <a:rPr kumimoji="0" lang="en-US" altLang="en-US" sz="2000" b="0" i="0" u="none" strike="noStrike" cap="none" normalizeH="0" baseline="0" dirty="0">
+              <a:rPr kumimoji="0" lang="en-US" altLang="en-US" sz="2700" b="0" i="0" u="none" strike="noStrike" cap="none" normalizeH="0" baseline="0" dirty="0">
                 <a:ln>
                   <a:noFill/>
                 </a:ln>
@@ -5657,7 +6700,7 @@
                   <a:schemeClr val="tx1"/>
                 </a:solidFill>
                 <a:effectLst/>
-                <a:latin typeface="Arial" panose="020B0604020202020204" pitchFamily="34" charset="0"/>
+                <a:latin typeface="Gill Sans MT(body)"/>
               </a:rPr>
               <a:t> MP3 Chapter File.</a:t>
             </a:r>
@@ -5679,7 +6722,7 @@
               <a:buChar char="•"/>
               <a:tabLst/>
             </a:pPr>
-            <a:endParaRPr kumimoji="0" lang="en-US" altLang="en-US" sz="2000" b="0" i="0" u="none" strike="noStrike" cap="none" normalizeH="0" baseline="0" dirty="0">
+            <a:endParaRPr kumimoji="0" lang="en-US" altLang="en-US" sz="2700" b="0" i="0" u="none" strike="noStrike" cap="none" normalizeH="0" baseline="0" dirty="0">
               <a:ln>
                 <a:noFill/>
               </a:ln>
@@ -5687,7 +6730,7 @@
                 <a:schemeClr val="tx1"/>
               </a:solidFill>
               <a:effectLst/>
-              <a:latin typeface="Arial" panose="020B0604020202020204" pitchFamily="34" charset="0"/>
+              <a:latin typeface="Gill Sans MT(body)"/>
             </a:endParaRPr>
           </a:p>
           <a:p>
@@ -5708,7 +6751,7 @@
               <a:tabLst/>
             </a:pPr>
             <a:r>
-              <a:rPr kumimoji="0" lang="en-US" altLang="en-US" sz="2000" b="1" i="0" u="none" strike="noStrike" cap="none" normalizeH="0" baseline="0" dirty="0">
+              <a:rPr kumimoji="0" lang="en-US" altLang="en-US" sz="2700" b="1" i="0" u="none" strike="noStrike" cap="none" normalizeH="0" baseline="0" dirty="0">
                 <a:ln>
                   <a:noFill/>
                 </a:ln>
@@ -5716,7 +6759,7 @@
                   <a:schemeClr val="tx1"/>
                 </a:solidFill>
                 <a:effectLst/>
-                <a:latin typeface="Arial" panose="020B0604020202020204" pitchFamily="34" charset="0"/>
+                <a:latin typeface="Gill Sans MT(body)"/>
               </a:rPr>
               <a:t>Processing:</a:t>
             </a:r>
@@ -5738,7 +6781,7 @@
               <a:buChar char="•"/>
               <a:tabLst/>
             </a:pPr>
-            <a:endParaRPr kumimoji="0" lang="en-US" altLang="en-US" sz="2000" b="0" i="0" u="none" strike="noStrike" cap="none" normalizeH="0" baseline="0" dirty="0">
+            <a:endParaRPr kumimoji="0" lang="en-US" altLang="en-US" sz="2700" b="0" i="0" u="none" strike="noStrike" cap="none" normalizeH="0" baseline="0" dirty="0">
               <a:ln>
                 <a:noFill/>
               </a:ln>
@@ -5746,7 +6789,7 @@
                 <a:schemeClr val="tx1"/>
               </a:solidFill>
               <a:effectLst/>
-              <a:latin typeface="Arial" panose="020B0604020202020204" pitchFamily="34" charset="0"/>
+              <a:latin typeface="Gill Sans MT(body)"/>
             </a:endParaRPr>
           </a:p>
           <a:p>
@@ -5767,7 +6810,7 @@
               <a:tabLst/>
             </a:pPr>
             <a:r>
-              <a:rPr kumimoji="0" lang="en-US" altLang="en-US" sz="2000" b="1" i="0" u="none" strike="noStrike" cap="none" normalizeH="0" baseline="0" dirty="0">
+              <a:rPr kumimoji="0" lang="en-US" altLang="en-US" sz="2700" b="1" i="0" u="none" strike="noStrike" cap="none" normalizeH="0" baseline="0" dirty="0">
                 <a:ln>
                   <a:noFill/>
                 </a:ln>
@@ -5775,12 +6818,12 @@
                   <a:schemeClr val="tx1"/>
                 </a:solidFill>
                 <a:effectLst/>
-                <a:latin typeface="Arial" panose="020B0604020202020204" pitchFamily="34" charset="0"/>
+                <a:latin typeface="Gill Sans MT(body)"/>
               </a:rPr>
               <a:t>ASR (Speech-to-Text):</a:t>
             </a:r>
             <a:r>
-              <a:rPr kumimoji="0" lang="en-US" altLang="en-US" sz="2000" b="0" i="0" u="none" strike="noStrike" cap="none" normalizeH="0" baseline="0" dirty="0">
+              <a:rPr kumimoji="0" lang="en-US" altLang="en-US" sz="2700" b="0" i="0" u="none" strike="noStrike" cap="none" normalizeH="0" baseline="0" dirty="0">
                 <a:ln>
                   <a:noFill/>
                 </a:ln>
@@ -5788,12 +6831,12 @@
                   <a:schemeClr val="tx1"/>
                 </a:solidFill>
                 <a:effectLst/>
-                <a:latin typeface="Arial" panose="020B0604020202020204" pitchFamily="34" charset="0"/>
+                <a:latin typeface="Gill Sans MT(body)"/>
               </a:rPr>
               <a:t> Google </a:t>
             </a:r>
             <a:r>
-              <a:rPr kumimoji="0" lang="en-US" altLang="en-US" sz="2000" b="0" i="0" u="none" strike="noStrike" cap="none" normalizeH="0" baseline="0" dirty="0" err="1">
+              <a:rPr kumimoji="0" lang="en-US" altLang="en-US" sz="2700" b="0" i="0" u="none" strike="noStrike" cap="none" normalizeH="0" baseline="0" dirty="0" err="1">
                 <a:ln>
                   <a:noFill/>
                 </a:ln>
@@ -5801,12 +6844,12 @@
                   <a:schemeClr val="tx1"/>
                 </a:solidFill>
                 <a:effectLst/>
-                <a:latin typeface="Arial" panose="020B0604020202020204" pitchFamily="34" charset="0"/>
+                <a:latin typeface="Gill Sans MT(body)"/>
               </a:rPr>
               <a:t>SpeechRecognition</a:t>
             </a:r>
             <a:r>
-              <a:rPr kumimoji="0" lang="en-US" altLang="en-US" sz="2000" b="0" i="0" u="none" strike="noStrike" cap="none" normalizeH="0" baseline="0" dirty="0">
+              <a:rPr kumimoji="0" lang="en-US" altLang="en-US" sz="2700" b="0" i="0" u="none" strike="noStrike" cap="none" normalizeH="0" baseline="0" dirty="0">
                 <a:ln>
                   <a:noFill/>
                 </a:ln>
@@ -5814,7 +6857,7 @@
                   <a:schemeClr val="tx1"/>
                 </a:solidFill>
                 <a:effectLst/>
-                <a:latin typeface="Arial" panose="020B0604020202020204" pitchFamily="34" charset="0"/>
+                <a:latin typeface="Gill Sans MT(body)"/>
               </a:rPr>
               <a:t> API.</a:t>
             </a:r>
@@ -5836,7 +6879,7 @@
               <a:buChar char="•"/>
               <a:tabLst/>
             </a:pPr>
-            <a:endParaRPr kumimoji="0" lang="en-US" altLang="en-US" sz="2000" b="1" i="0" u="none" strike="noStrike" cap="none" normalizeH="0" baseline="0" dirty="0">
+            <a:endParaRPr kumimoji="0" lang="en-US" altLang="en-US" sz="2700" b="1" i="0" u="none" strike="noStrike" cap="none" normalizeH="0" baseline="0" dirty="0">
               <a:ln>
                 <a:noFill/>
               </a:ln>
@@ -5844,7 +6887,7 @@
                 <a:schemeClr val="tx1"/>
               </a:solidFill>
               <a:effectLst/>
-              <a:latin typeface="Arial" panose="020B0604020202020204" pitchFamily="34" charset="0"/>
+              <a:latin typeface="Gill Sans MT(body)"/>
             </a:endParaRPr>
           </a:p>
           <a:p>
@@ -5865,7 +6908,7 @@
               <a:tabLst/>
             </a:pPr>
             <a:r>
-              <a:rPr kumimoji="0" lang="en-US" altLang="en-US" sz="2000" b="1" i="0" u="none" strike="noStrike" cap="none" normalizeH="0" baseline="0" dirty="0">
+              <a:rPr kumimoji="0" lang="en-US" altLang="en-US" sz="2700" b="1" i="0" u="none" strike="noStrike" cap="none" normalizeH="0" baseline="0" dirty="0">
                 <a:ln>
                   <a:noFill/>
                 </a:ln>
@@ -5873,12 +6916,12 @@
                   <a:schemeClr val="tx1"/>
                 </a:solidFill>
                 <a:effectLst/>
-                <a:latin typeface="Arial" panose="020B0604020202020204" pitchFamily="34" charset="0"/>
+                <a:latin typeface="Gill Sans MT(body)"/>
               </a:rPr>
               <a:t>NLP Engine:</a:t>
             </a:r>
             <a:r>
-              <a:rPr kumimoji="0" lang="en-US" altLang="en-US" sz="2000" b="0" i="0" u="none" strike="noStrike" cap="none" normalizeH="0" baseline="0" dirty="0">
+              <a:rPr kumimoji="0" lang="en-US" altLang="en-US" sz="2700" b="0" i="0" u="none" strike="noStrike" cap="none" normalizeH="0" baseline="0" dirty="0">
                 <a:ln>
                   <a:noFill/>
                 </a:ln>
@@ -5886,12 +6929,12 @@
                   <a:schemeClr val="tx1"/>
                 </a:solidFill>
                 <a:effectLst/>
-                <a:latin typeface="Arial" panose="020B0604020202020204" pitchFamily="34" charset="0"/>
+                <a:latin typeface="Gill Sans MT(body)"/>
               </a:rPr>
               <a:t> </a:t>
             </a:r>
             <a:r>
-              <a:rPr kumimoji="0" lang="en-US" altLang="en-US" sz="2000" b="0" i="0" u="none" strike="noStrike" cap="none" normalizeH="0" baseline="0" dirty="0" err="1">
+              <a:rPr kumimoji="0" lang="en-US" altLang="en-US" sz="2700" b="0" i="0" u="none" strike="noStrike" cap="none" normalizeH="0" baseline="0" dirty="0" err="1">
                 <a:ln>
                   <a:noFill/>
                 </a:ln>
@@ -5899,12 +6942,12 @@
                   <a:schemeClr val="tx1"/>
                 </a:solidFill>
                 <a:effectLst/>
-                <a:latin typeface="Arial" panose="020B0604020202020204" pitchFamily="34" charset="0"/>
+                <a:latin typeface="Gill Sans MT(body)"/>
               </a:rPr>
               <a:t>TextBlob</a:t>
             </a:r>
             <a:r>
-              <a:rPr kumimoji="0" lang="en-US" altLang="en-US" sz="2000" b="0" i="0" u="none" strike="noStrike" cap="none" normalizeH="0" baseline="0" dirty="0">
+              <a:rPr kumimoji="0" lang="en-US" altLang="en-US" sz="2700" b="0" i="0" u="none" strike="noStrike" cap="none" normalizeH="0" baseline="0" dirty="0">
                 <a:ln>
                   <a:noFill/>
                 </a:ln>
@@ -5912,7 +6955,7 @@
                   <a:schemeClr val="tx1"/>
                 </a:solidFill>
                 <a:effectLst/>
-                <a:latin typeface="Arial" panose="020B0604020202020204" pitchFamily="34" charset="0"/>
+                <a:latin typeface="Gill Sans MT(body)"/>
               </a:rPr>
               <a:t> (Sentiment) + NLTK (Tokenization).</a:t>
             </a:r>
@@ -5932,7 +6975,7 @@
               <a:buSzTx/>
               <a:tabLst/>
             </a:pPr>
-            <a:endParaRPr kumimoji="0" lang="en-US" altLang="en-US" sz="2000" b="0" i="0" u="none" strike="noStrike" cap="none" normalizeH="0" baseline="0" dirty="0">
+            <a:endParaRPr kumimoji="0" lang="en-US" altLang="en-US" sz="2700" b="0" i="0" u="none" strike="noStrike" cap="none" normalizeH="0" baseline="0" dirty="0">
               <a:ln>
                 <a:noFill/>
               </a:ln>
@@ -5940,7 +6983,7 @@
                 <a:schemeClr val="tx1"/>
               </a:solidFill>
               <a:effectLst/>
-              <a:latin typeface="Arial" panose="020B0604020202020204" pitchFamily="34" charset="0"/>
+              <a:latin typeface="Gill Sans MT(body)"/>
             </a:endParaRPr>
           </a:p>
           <a:p>
@@ -5961,7 +7004,7 @@
               <a:tabLst/>
             </a:pPr>
             <a:r>
-              <a:rPr kumimoji="0" lang="en-US" altLang="en-US" sz="2000" b="1" i="0" u="none" strike="noStrike" cap="none" normalizeH="0" baseline="0" dirty="0">
+              <a:rPr kumimoji="0" lang="en-US" altLang="en-US" sz="2700" b="1" i="0" u="none" strike="noStrike" cap="none" normalizeH="0" baseline="0" dirty="0">
                 <a:ln>
                   <a:noFill/>
                 </a:ln>
@@ -5969,12 +7012,12 @@
                   <a:schemeClr val="tx1"/>
                 </a:solidFill>
                 <a:effectLst/>
-                <a:latin typeface="Arial" panose="020B0604020202020204" pitchFamily="34" charset="0"/>
+                <a:latin typeface="Gill Sans MT(body)"/>
               </a:rPr>
               <a:t>Segmentation:</a:t>
             </a:r>
             <a:r>
-              <a:rPr kumimoji="0" lang="en-US" altLang="en-US" sz="2000" b="0" i="0" u="none" strike="noStrike" cap="none" normalizeH="0" baseline="0" dirty="0">
+              <a:rPr kumimoji="0" lang="en-US" altLang="en-US" sz="2700" b="0" i="0" u="none" strike="noStrike" cap="none" normalizeH="0" baseline="0" dirty="0">
                 <a:ln>
                   <a:noFill/>
                 </a:ln>
@@ -5982,7 +7025,7 @@
                   <a:schemeClr val="tx1"/>
                 </a:solidFill>
                 <a:effectLst/>
-                <a:latin typeface="Arial" panose="020B0604020202020204" pitchFamily="34" charset="0"/>
+                <a:latin typeface="Gill Sans MT(body)"/>
               </a:rPr>
               <a:t> Context-based splitting.</a:t>
             </a:r>
@@ -6002,7 +7045,7 @@
               <a:buSzTx/>
               <a:tabLst/>
             </a:pPr>
-            <a:endParaRPr kumimoji="0" lang="en-US" altLang="en-US" sz="2000" b="0" i="0" u="none" strike="noStrike" cap="none" normalizeH="0" baseline="0" dirty="0">
+            <a:endParaRPr kumimoji="0" lang="en-US" altLang="en-US" sz="2700" b="0" i="0" u="none" strike="noStrike" cap="none" normalizeH="0" baseline="0" dirty="0">
               <a:ln>
                 <a:noFill/>
               </a:ln>
@@ -6010,7 +7053,7 @@
                 <a:schemeClr val="tx1"/>
               </a:solidFill>
               <a:effectLst/>
-              <a:latin typeface="Arial" panose="020B0604020202020204" pitchFamily="34" charset="0"/>
+              <a:latin typeface="Gill Sans MT(body)"/>
             </a:endParaRPr>
           </a:p>
           <a:p>
@@ -6031,7 +7074,7 @@
               <a:tabLst/>
             </a:pPr>
             <a:r>
-              <a:rPr kumimoji="0" lang="en-US" altLang="en-US" sz="2000" b="1" i="0" u="none" strike="noStrike" cap="none" normalizeH="0" baseline="0" dirty="0">
+              <a:rPr kumimoji="0" lang="en-US" altLang="en-US" sz="2700" b="1" i="0" u="none" strike="noStrike" cap="none" normalizeH="0" baseline="0" dirty="0">
                 <a:ln>
                   <a:noFill/>
                 </a:ln>
@@ -6039,12 +7082,12 @@
                   <a:schemeClr val="tx1"/>
                 </a:solidFill>
                 <a:effectLst/>
-                <a:latin typeface="Arial" panose="020B0604020202020204" pitchFamily="34" charset="0"/>
+                <a:latin typeface="Gill Sans MT(body)"/>
               </a:rPr>
               <a:t>Output:</a:t>
             </a:r>
             <a:r>
-              <a:rPr kumimoji="0" lang="en-US" altLang="en-US" sz="2000" b="0" i="0" u="none" strike="noStrike" cap="none" normalizeH="0" baseline="0" dirty="0">
+              <a:rPr kumimoji="0" lang="en-US" altLang="en-US" sz="2700" b="0" i="0" u="none" strike="noStrike" cap="none" normalizeH="0" baseline="0" dirty="0">
                 <a:ln>
                   <a:noFill/>
                 </a:ln>
@@ -6052,7 +7095,7 @@
                   <a:schemeClr val="tx1"/>
                 </a:solidFill>
                 <a:effectLst/>
-                <a:latin typeface="Arial" panose="020B0604020202020204" pitchFamily="34" charset="0"/>
+                <a:latin typeface="Gill Sans MT(body)"/>
               </a:rPr>
               <a:t> JSON Data → React Dashboard.</a:t>
             </a:r>
@@ -6069,13 +7112,13 @@
   <p:clrMapOvr>
     <a:masterClrMapping/>
   </p:clrMapOvr>
-  <mc:AlternateContent xmlns:mc="http://schemas.openxmlformats.org/markup-compatibility/2006">
-    <mc:Choice xmlns:p14="http://schemas.microsoft.com/office/powerpoint/2010/main" Requires="p14">
+  <mc:AlternateContent xmlns:mc="http://schemas.openxmlformats.org/markup-compatibility/2006" xmlns:p14="http://schemas.microsoft.com/office/powerpoint/2010/main">
+    <mc:Choice Requires="p14">
       <p:transition spd="med" p14:dur="700">
         <p:fade/>
       </p:transition>
     </mc:Choice>
-    <mc:Fallback>
+    <mc:Fallback xmlns="">
       <p:transition spd="med">
         <p:fade/>
       </p:transition>
@@ -6150,8 +7193,8 @@
         </p:nvSpPr>
         <p:spPr>
           <a:xfrm>
-            <a:off x="479685" y="1214203"/>
-            <a:ext cx="10118360" cy="4324261"/>
+            <a:off x="479685" y="889843"/>
+            <a:ext cx="10118360" cy="5078313"/>
           </a:xfrm>
           <a:prstGeom prst="rect">
             <a:avLst/>
@@ -6168,7 +7211,7 @@
               <a:buNone/>
             </a:pPr>
             <a:r>
-              <a:rPr lang="en-IN" sz="2500" b="1" dirty="0"/>
+              <a:rPr lang="en-IN" sz="2700" b="1" dirty="0"/>
               <a:t>Interactive Dashboard:</a:t>
             </a:r>
           </a:p>
@@ -6176,7 +7219,7 @@
             <a:pPr>
               <a:buNone/>
             </a:pPr>
-            <a:endParaRPr lang="en-IN" sz="2500" dirty="0"/>
+            <a:endParaRPr lang="en-IN" sz="2700" dirty="0"/>
           </a:p>
           <a:p>
             <a:pPr>
@@ -6184,16 +7227,16 @@
               <a:buChar char="•"/>
             </a:pPr>
             <a:r>
-              <a:rPr lang="en-IN" sz="2500" b="1" dirty="0"/>
+              <a:rPr lang="en-IN" sz="2700" b="1" dirty="0"/>
               <a:t>Drag &amp; Drop Upload:</a:t>
             </a:r>
             <a:r>
-              <a:rPr lang="en-IN" sz="2500" dirty="0"/>
+              <a:rPr lang="en-IN" sz="2700" dirty="0"/>
               <a:t> Easy interface for loading audiobook chapters.</a:t>
             </a:r>
           </a:p>
           <a:p>
-            <a:endParaRPr lang="en-IN" sz="2500" dirty="0"/>
+            <a:endParaRPr lang="en-IN" sz="2700" dirty="0"/>
           </a:p>
           <a:p>
             <a:pPr>
@@ -6201,16 +7244,16 @@
               <a:buChar char="•"/>
             </a:pPr>
             <a:r>
-              <a:rPr lang="en-IN" sz="2500" b="1" dirty="0"/>
+              <a:rPr lang="en-IN" sz="2700" b="1" dirty="0"/>
               <a:t>Smart Audio Player:</a:t>
             </a:r>
             <a:r>
-              <a:rPr lang="en-IN" sz="2500" dirty="0"/>
+              <a:rPr lang="en-IN" sz="2700" dirty="0"/>
               <a:t> Syncs audio with the transcript text.</a:t>
             </a:r>
           </a:p>
           <a:p>
-            <a:endParaRPr lang="en-IN" sz="2500" dirty="0"/>
+            <a:endParaRPr lang="en-IN" sz="2700" dirty="0"/>
           </a:p>
           <a:p>
             <a:pPr>
@@ -6218,16 +7261,16 @@
               <a:buChar char="•"/>
             </a:pPr>
             <a:r>
-              <a:rPr lang="en-IN" sz="2500" b="1" dirty="0"/>
+              <a:rPr lang="en-IN" sz="2700" b="1" dirty="0"/>
               <a:t>Sentiment Graph:</a:t>
             </a:r>
             <a:r>
-              <a:rPr lang="en-IN" sz="2500" dirty="0"/>
+              <a:rPr lang="en-IN" sz="2700" dirty="0"/>
               <a:t> A visual line graph showing the rising and falling tension of the story.</a:t>
             </a:r>
           </a:p>
           <a:p>
-            <a:endParaRPr lang="en-IN" sz="2500" dirty="0"/>
+            <a:endParaRPr lang="en-IN" sz="2700" dirty="0"/>
           </a:p>
           <a:p>
             <a:pPr>
@@ -6235,12 +7278,28 @@
               <a:buChar char="•"/>
             </a:pPr>
             <a:r>
-              <a:rPr lang="en-IN" sz="2500" b="1" dirty="0"/>
+              <a:rPr lang="en-IN" sz="2700" b="1" dirty="0"/>
               <a:t>Keyword Cloud:</a:t>
             </a:r>
             <a:r>
-              <a:rPr lang="en-IN" sz="2500" dirty="0"/>
-              <a:t> Instantly highlights important terms (e.g., "Revolver", "Evidence", "Doctor").</a:t>
+              <a:rPr lang="en-IN" sz="2700" dirty="0"/>
+              <a:t> Instantly highlights important terms (</a:t>
+            </a:r>
+            <a:r>
+              <a:rPr lang="en-IN" sz="2700" dirty="0" err="1"/>
+              <a:t>e.g.“Holmes</a:t>
+            </a:r>
+            <a:r>
+              <a:rPr lang="en-IN" sz="2700" dirty="0"/>
+              <a:t>", “</a:t>
+            </a:r>
+            <a:r>
+              <a:rPr lang="en-IN" sz="2700" dirty="0" err="1"/>
+              <a:t>Sherlok</a:t>
+            </a:r>
+            <a:r>
+              <a:rPr lang="en-IN" sz="2700" dirty="0"/>
+              <a:t>").</a:t>
             </a:r>
           </a:p>
         </p:txBody>
@@ -6255,13 +7314,13 @@
   <p:clrMapOvr>
     <a:masterClrMapping/>
   </p:clrMapOvr>
-  <mc:AlternateContent xmlns:mc="http://schemas.openxmlformats.org/markup-compatibility/2006">
-    <mc:Choice xmlns:p14="http://schemas.microsoft.com/office/powerpoint/2010/main" Requires="p14">
+  <mc:AlternateContent xmlns:mc="http://schemas.openxmlformats.org/markup-compatibility/2006" xmlns:p14="http://schemas.microsoft.com/office/powerpoint/2010/main">
+    <mc:Choice Requires="p14">
       <p:transition p14:dur="100">
         <p:cut/>
       </p:transition>
     </mc:Choice>
-    <mc:Fallback>
+    <mc:Fallback xmlns="">
       <p:transition>
         <p:cut/>
       </p:transition>
@@ -6287,536 +7346,46 @@
           <a:chExt cx="0" cy="0"/>
         </a:xfrm>
       </p:grpSpPr>
-      <p:sp>
-        <p:nvSpPr>
-          <p:cNvPr id="3" name="TextBox 2">
+      <p:pic>
+        <p:nvPicPr>
+          <p:cNvPr id="3" name="Picture 2">
             <a:extLst>
               <a:ext uri="{FF2B5EF4-FFF2-40B4-BE49-F238E27FC236}">
-                <a16:creationId xmlns:a16="http://schemas.microsoft.com/office/drawing/2014/main" id="{B10D0C64-EFCB-033D-0F56-40555F455261}"/>
+                <a16:creationId xmlns:a16="http://schemas.microsoft.com/office/drawing/2014/main" id="{056215D4-C685-E458-192E-A9289AC35A77}"/>
               </a:ext>
             </a:extLst>
           </p:cNvPr>
-          <p:cNvSpPr txBox="1"/>
+          <p:cNvPicPr>
+            <a:picLocks noChangeAspect="1"/>
+          </p:cNvPicPr>
           <p:nvPr/>
-        </p:nvSpPr>
+        </p:nvPicPr>
+        <p:blipFill>
+          <a:blip r:embed="rId2"/>
+          <a:stretch>
+            <a:fillRect/>
+          </a:stretch>
+        </p:blipFill>
         <p:spPr>
           <a:xfrm>
-            <a:off x="149902" y="220069"/>
-            <a:ext cx="6108492" cy="630942"/>
+            <a:off x="63190" y="119921"/>
+            <a:ext cx="11994353" cy="5966086"/>
           </a:xfrm>
           <a:prstGeom prst="rect">
             <a:avLst/>
           </a:prstGeom>
-          <a:noFill/>
         </p:spPr>
-        <p:txBody>
-          <a:bodyPr wrap="square">
-            <a:spAutoFit/>
-          </a:bodyPr>
-          <a:lstStyle/>
-          <a:p>
-            <a:r>
-              <a:rPr lang="en-IN" sz="3500" dirty="0"/>
-              <a:t>Technical Stack :-</a:t>
-            </a:r>
-          </a:p>
-        </p:txBody>
-      </p:sp>
-      <p:sp>
-        <p:nvSpPr>
-          <p:cNvPr id="4" name="Rectangle 1">
-            <a:extLst>
-              <a:ext uri="{FF2B5EF4-FFF2-40B4-BE49-F238E27FC236}">
-                <a16:creationId xmlns:a16="http://schemas.microsoft.com/office/drawing/2014/main" id="{5148B5CB-2EEF-509B-3610-358EE724E277}"/>
-              </a:ext>
-            </a:extLst>
-          </p:cNvPr>
-          <p:cNvSpPr>
-            <a:spLocks noChangeArrowheads="1"/>
-          </p:cNvSpPr>
-          <p:nvPr/>
-        </p:nvSpPr>
-        <p:spPr bwMode="auto">
-          <a:xfrm>
-            <a:off x="904963" y="799425"/>
-            <a:ext cx="11287037" cy="4247317"/>
-          </a:xfrm>
-          <a:prstGeom prst="rect">
-            <a:avLst/>
-          </a:prstGeom>
-          <a:noFill/>
-          <a:ln>
-            <a:noFill/>
-          </a:ln>
-          <a:effectLst/>
-          <a:extLst>
-            <a:ext uri="{909E8E84-426E-40DD-AFC4-6F175D3DCCD1}">
-              <a14:hiddenFill xmlns:a14="http://schemas.microsoft.com/office/drawing/2010/main">
-                <a:solidFill>
-                  <a:schemeClr val="accent1"/>
-                </a:solidFill>
-              </a14:hiddenFill>
-            </a:ext>
-            <a:ext uri="{91240B29-F687-4F45-9708-019B960494DF}">
-              <a14:hiddenLine xmlns:a14="http://schemas.microsoft.com/office/drawing/2010/main" w="9525">
-                <a:solidFill>
-                  <a:schemeClr val="tx1"/>
-                </a:solidFill>
-                <a:miter lim="800000"/>
-                <a:headEnd/>
-                <a:tailEnd/>
-              </a14:hiddenLine>
-            </a:ext>
-            <a:ext uri="{AF507438-7753-43E0-B8FC-AC1667EBCBE1}">
-              <a14:hiddenEffects xmlns:a14="http://schemas.microsoft.com/office/drawing/2010/main">
-                <a:effectLst>
-                  <a:outerShdw dist="35921" dir="2700000" algn="ctr" rotWithShape="0">
-                    <a:schemeClr val="bg2"/>
-                  </a:outerShdw>
-                </a:effectLst>
-              </a14:hiddenEffects>
-            </a:ext>
-          </a:extLst>
-        </p:spPr>
-        <p:txBody>
-          <a:bodyPr vert="horz" wrap="square" lIns="91440" tIns="45720" rIns="91440" bIns="45720" numCol="1" anchor="ctr" anchorCtr="0" compatLnSpc="1">
-            <a:prstTxWarp prst="textNoShape">
-              <a:avLst/>
-            </a:prstTxWarp>
-            <a:spAutoFit/>
-          </a:bodyPr>
-          <a:lstStyle/>
-          <a:p>
-            <a:pPr marL="0" marR="0" lvl="0" indent="0" algn="l" defTabSz="914400" rtl="0" eaLnBrk="0" fontAlgn="base" latinLnBrk="0" hangingPunct="0">
-              <a:lnSpc>
-                <a:spcPct val="100000"/>
-              </a:lnSpc>
-              <a:spcBef>
-                <a:spcPct val="0"/>
-              </a:spcBef>
-              <a:spcAft>
-                <a:spcPct val="0"/>
-              </a:spcAft>
-              <a:buClrTx/>
-              <a:buSzTx/>
-              <a:buFontTx/>
-              <a:buChar char="•"/>
-              <a:tabLst/>
-            </a:pPr>
-            <a:r>
-              <a:rPr kumimoji="0" lang="en-US" altLang="en-US" sz="2700" b="1" i="0" u="none" strike="noStrike" cap="none" normalizeH="0" baseline="0" dirty="0">
-                <a:ln>
-                  <a:noFill/>
-                </a:ln>
-                <a:solidFill>
-                  <a:schemeClr val="tx1"/>
-                </a:solidFill>
-                <a:effectLst/>
-                <a:latin typeface="Arial" panose="020B0604020202020204" pitchFamily="34" charset="0"/>
-              </a:rPr>
-              <a:t>Frontend:</a:t>
-            </a:r>
-            <a:r>
-              <a:rPr kumimoji="0" lang="en-US" altLang="en-US" sz="2700" b="0" i="0" u="none" strike="noStrike" cap="none" normalizeH="0" baseline="0" dirty="0">
-                <a:ln>
-                  <a:noFill/>
-                </a:ln>
-                <a:solidFill>
-                  <a:schemeClr val="tx1"/>
-                </a:solidFill>
-                <a:effectLst/>
-                <a:latin typeface="Arial" panose="020B0604020202020204" pitchFamily="34" charset="0"/>
-              </a:rPr>
-              <a:t> React.js, Vite, Tailwind CSS (Modern Dark/Cyberpunk UI).</a:t>
-            </a:r>
-          </a:p>
-          <a:p>
-            <a:pPr marL="0" marR="0" lvl="0" indent="0" algn="l" defTabSz="914400" rtl="0" eaLnBrk="0" fontAlgn="base" latinLnBrk="0" hangingPunct="0">
-              <a:lnSpc>
-                <a:spcPct val="100000"/>
-              </a:lnSpc>
-              <a:spcBef>
-                <a:spcPct val="0"/>
-              </a:spcBef>
-              <a:spcAft>
-                <a:spcPct val="0"/>
-              </a:spcAft>
-              <a:buClrTx/>
-              <a:buSzTx/>
-              <a:buFontTx/>
-              <a:buChar char="•"/>
-              <a:tabLst/>
-            </a:pPr>
-            <a:r>
-              <a:rPr kumimoji="0" lang="en-US" altLang="en-US" sz="2700" b="1" i="0" u="none" strike="noStrike" cap="none" normalizeH="0" baseline="0" dirty="0">
-                <a:ln>
-                  <a:noFill/>
-                </a:ln>
-                <a:solidFill>
-                  <a:schemeClr val="tx1"/>
-                </a:solidFill>
-                <a:effectLst/>
-                <a:latin typeface="Arial" panose="020B0604020202020204" pitchFamily="34" charset="0"/>
-              </a:rPr>
-              <a:t>Backend:</a:t>
-            </a:r>
-            <a:r>
-              <a:rPr kumimoji="0" lang="en-US" altLang="en-US" sz="2700" b="0" i="0" u="none" strike="noStrike" cap="none" normalizeH="0" baseline="0" dirty="0">
-                <a:ln>
-                  <a:noFill/>
-                </a:ln>
-                <a:solidFill>
-                  <a:schemeClr val="tx1"/>
-                </a:solidFill>
-                <a:effectLst/>
-                <a:latin typeface="Arial" panose="020B0604020202020204" pitchFamily="34" charset="0"/>
-              </a:rPr>
-              <a:t> Python, Flask (REST API).</a:t>
-            </a:r>
-          </a:p>
-          <a:p>
-            <a:pPr marL="0" marR="0" lvl="0" indent="0" algn="l" defTabSz="914400" rtl="0" eaLnBrk="0" fontAlgn="base" latinLnBrk="0" hangingPunct="0">
-              <a:lnSpc>
-                <a:spcPct val="100000"/>
-              </a:lnSpc>
-              <a:spcBef>
-                <a:spcPct val="0"/>
-              </a:spcBef>
-              <a:spcAft>
-                <a:spcPct val="0"/>
-              </a:spcAft>
-              <a:buClrTx/>
-              <a:buSzTx/>
-              <a:buFontTx/>
-              <a:buChar char="•"/>
-              <a:tabLst/>
-            </a:pPr>
-            <a:r>
-              <a:rPr kumimoji="0" lang="en-US" altLang="en-US" sz="2700" b="1" i="0" u="none" strike="noStrike" cap="none" normalizeH="0" baseline="0" dirty="0">
-                <a:ln>
-                  <a:noFill/>
-                </a:ln>
-                <a:solidFill>
-                  <a:schemeClr val="tx1"/>
-                </a:solidFill>
-                <a:effectLst/>
-                <a:latin typeface="Arial" panose="020B0604020202020204" pitchFamily="34" charset="0"/>
-              </a:rPr>
-              <a:t>AI Libraries:</a:t>
-            </a:r>
-            <a:endParaRPr kumimoji="0" lang="en-US" altLang="en-US" sz="2700" b="0" i="0" u="none" strike="noStrike" cap="none" normalizeH="0" baseline="0" dirty="0">
-              <a:ln>
-                <a:noFill/>
-              </a:ln>
-              <a:solidFill>
-                <a:schemeClr val="tx1"/>
-              </a:solidFill>
-              <a:effectLst/>
-              <a:latin typeface="Arial" panose="020B0604020202020204" pitchFamily="34" charset="0"/>
-            </a:endParaRPr>
-          </a:p>
-          <a:p>
-            <a:pPr marL="0" marR="0" lvl="0" indent="0" algn="l" defTabSz="914400" rtl="0" eaLnBrk="0" fontAlgn="base" latinLnBrk="0" hangingPunct="0">
-              <a:lnSpc>
-                <a:spcPct val="100000"/>
-              </a:lnSpc>
-              <a:spcBef>
-                <a:spcPct val="0"/>
-              </a:spcBef>
-              <a:spcAft>
-                <a:spcPct val="0"/>
-              </a:spcAft>
-              <a:buClrTx/>
-              <a:buSzTx/>
-              <a:buFontTx/>
-              <a:buChar char="•"/>
-              <a:tabLst/>
-            </a:pPr>
-            <a:r>
-              <a:rPr kumimoji="0" lang="en-US" altLang="en-US" sz="2700" b="0" i="0" u="none" strike="noStrike" cap="none" normalizeH="0" baseline="0" dirty="0" err="1">
-                <a:ln>
-                  <a:noFill/>
-                </a:ln>
-                <a:solidFill>
-                  <a:schemeClr val="tx1"/>
-                </a:solidFill>
-                <a:effectLst/>
-                <a:latin typeface="Arial Unicode MS"/>
-              </a:rPr>
-              <a:t>SpeechRecognition</a:t>
-            </a:r>
-            <a:r>
-              <a:rPr kumimoji="0" lang="en-US" altLang="en-US" sz="2700" b="0" i="0" u="none" strike="noStrike" cap="none" normalizeH="0" baseline="0" dirty="0">
-                <a:ln>
-                  <a:noFill/>
-                </a:ln>
-                <a:solidFill>
-                  <a:schemeClr val="tx1"/>
-                </a:solidFill>
-                <a:effectLst/>
-              </a:rPr>
-              <a:t> (Transcription)</a:t>
-            </a:r>
-          </a:p>
-          <a:p>
-            <a:pPr marL="0" marR="0" lvl="0" indent="0" algn="l" defTabSz="914400" rtl="0" eaLnBrk="0" fontAlgn="base" latinLnBrk="0" hangingPunct="0">
-              <a:lnSpc>
-                <a:spcPct val="100000"/>
-              </a:lnSpc>
-              <a:spcBef>
-                <a:spcPct val="0"/>
-              </a:spcBef>
-              <a:spcAft>
-                <a:spcPct val="0"/>
-              </a:spcAft>
-              <a:buClrTx/>
-              <a:buSzTx/>
-              <a:tabLst/>
-            </a:pPr>
-            <a:endParaRPr kumimoji="0" lang="en-US" altLang="en-US" sz="2700" b="0" i="0" u="none" strike="noStrike" cap="none" normalizeH="0" baseline="0" dirty="0">
-              <a:ln>
-                <a:noFill/>
-              </a:ln>
-              <a:solidFill>
-                <a:schemeClr val="tx1"/>
-              </a:solidFill>
-              <a:effectLst/>
-              <a:latin typeface="Arial" panose="020B0604020202020204" pitchFamily="34" charset="0"/>
-            </a:endParaRPr>
-          </a:p>
-          <a:p>
-            <a:pPr defTabSz="914400" eaLnBrk="0" fontAlgn="base" hangingPunct="0">
-              <a:spcBef>
-                <a:spcPct val="0"/>
-              </a:spcBef>
-              <a:spcAft>
-                <a:spcPct val="0"/>
-              </a:spcAft>
-              <a:buFontTx/>
-              <a:buChar char="•"/>
-            </a:pPr>
-            <a:r>
-              <a:rPr kumimoji="0" lang="en-US" altLang="en-US" sz="2700" b="0" i="0" u="none" strike="noStrike" cap="none" normalizeH="0" baseline="0" dirty="0" err="1">
-                <a:ln>
-                  <a:noFill/>
-                </a:ln>
-                <a:solidFill>
-                  <a:schemeClr val="tx1"/>
-                </a:solidFill>
-                <a:effectLst/>
-                <a:latin typeface="Arial Unicode MS"/>
-              </a:rPr>
-              <a:t>Sc</a:t>
-            </a:r>
-            <a:r>
-              <a:rPr lang="en-US" altLang="en-US" sz="2700" dirty="0" err="1">
-                <a:latin typeface="Arial Unicode MS"/>
-              </a:rPr>
-              <a:t>TextBlob</a:t>
-            </a:r>
-            <a:r>
-              <a:rPr lang="en-US" altLang="en-US" sz="2700" dirty="0"/>
-              <a:t> (Sentiment Analysis)</a:t>
-            </a:r>
-          </a:p>
-          <a:p>
-            <a:pPr defTabSz="914400" eaLnBrk="0" fontAlgn="base" hangingPunct="0">
-              <a:spcBef>
-                <a:spcPct val="0"/>
-              </a:spcBef>
-              <a:spcAft>
-                <a:spcPct val="0"/>
-              </a:spcAft>
-            </a:pPr>
-            <a:endParaRPr lang="en-US" altLang="en-US" sz="2700" dirty="0">
-              <a:latin typeface="Arial" panose="020B0604020202020204" pitchFamily="34" charset="0"/>
-            </a:endParaRPr>
-          </a:p>
-          <a:p>
-            <a:pPr marL="0" marR="0" lvl="0" indent="0" algn="l" defTabSz="914400" rtl="0" eaLnBrk="0" fontAlgn="base" latinLnBrk="0" hangingPunct="0">
-              <a:lnSpc>
-                <a:spcPct val="100000"/>
-              </a:lnSpc>
-              <a:spcBef>
-                <a:spcPct val="0"/>
-              </a:spcBef>
-              <a:spcAft>
-                <a:spcPct val="0"/>
-              </a:spcAft>
-              <a:buClrTx/>
-              <a:buSzTx/>
-              <a:buFontTx/>
-              <a:buChar char="•"/>
-              <a:tabLst/>
-            </a:pPr>
-            <a:r>
-              <a:rPr kumimoji="0" lang="en-US" altLang="en-US" sz="2700" b="0" i="0" u="none" strike="noStrike" cap="none" normalizeH="0" baseline="0" dirty="0" err="1">
-                <a:ln>
-                  <a:noFill/>
-                </a:ln>
-                <a:solidFill>
-                  <a:schemeClr val="tx1"/>
-                </a:solidFill>
-                <a:effectLst/>
-                <a:latin typeface="Arial Unicode MS"/>
-              </a:rPr>
-              <a:t>ikit</a:t>
-            </a:r>
-            <a:r>
-              <a:rPr kumimoji="0" lang="en-US" altLang="en-US" sz="2700" b="0" i="0" u="none" strike="noStrike" cap="none" normalizeH="0" baseline="0" dirty="0">
-                <a:ln>
-                  <a:noFill/>
-                </a:ln>
-                <a:solidFill>
-                  <a:schemeClr val="tx1"/>
-                </a:solidFill>
-                <a:effectLst/>
-                <a:latin typeface="Arial Unicode MS"/>
-              </a:rPr>
-              <a:t>-learn</a:t>
-            </a:r>
-            <a:r>
-              <a:rPr kumimoji="0" lang="en-US" altLang="en-US" sz="2700" b="0" i="0" u="none" strike="noStrike" cap="none" normalizeH="0" baseline="0" dirty="0">
-                <a:ln>
-                  <a:noFill/>
-                </a:ln>
-                <a:solidFill>
-                  <a:schemeClr val="tx1"/>
-                </a:solidFill>
-                <a:effectLst/>
-              </a:rPr>
-              <a:t> (Keyword Extraction)</a:t>
-            </a:r>
-          </a:p>
-          <a:p>
-            <a:pPr marL="0" marR="0" lvl="0" indent="0" algn="l" defTabSz="914400" rtl="0" eaLnBrk="0" fontAlgn="base" latinLnBrk="0" hangingPunct="0">
-              <a:lnSpc>
-                <a:spcPct val="100000"/>
-              </a:lnSpc>
-              <a:spcBef>
-                <a:spcPct val="0"/>
-              </a:spcBef>
-              <a:spcAft>
-                <a:spcPct val="0"/>
-              </a:spcAft>
-              <a:buClrTx/>
-              <a:buSzTx/>
-              <a:tabLst/>
-            </a:pPr>
-            <a:endParaRPr kumimoji="0" lang="en-US" altLang="en-US" sz="2700" b="0" i="0" u="none" strike="noStrike" cap="none" normalizeH="0" baseline="0" dirty="0">
-              <a:ln>
-                <a:noFill/>
-              </a:ln>
-              <a:solidFill>
-                <a:schemeClr val="tx1"/>
-              </a:solidFill>
-              <a:effectLst/>
-              <a:latin typeface="Arial" panose="020B0604020202020204" pitchFamily="34" charset="0"/>
-            </a:endParaRPr>
-          </a:p>
-          <a:p>
-            <a:pPr marL="0" marR="0" lvl="0" indent="0" algn="l" defTabSz="914400" rtl="0" eaLnBrk="0" fontAlgn="base" latinLnBrk="0" hangingPunct="0">
-              <a:lnSpc>
-                <a:spcPct val="100000"/>
-              </a:lnSpc>
-              <a:spcBef>
-                <a:spcPct val="0"/>
-              </a:spcBef>
-              <a:spcAft>
-                <a:spcPct val="0"/>
-              </a:spcAft>
-              <a:buClrTx/>
-              <a:buSzTx/>
-              <a:buFontTx/>
-              <a:buChar char="•"/>
-              <a:tabLst/>
-            </a:pPr>
-            <a:r>
-              <a:rPr kumimoji="0" lang="en-US" altLang="en-US" sz="2700" b="1" i="0" u="none" strike="noStrike" cap="none" normalizeH="0" baseline="0" dirty="0">
-                <a:ln>
-                  <a:noFill/>
-                </a:ln>
-                <a:solidFill>
-                  <a:schemeClr val="tx1"/>
-                </a:solidFill>
-                <a:effectLst/>
-                <a:latin typeface="Arial" panose="020B0604020202020204" pitchFamily="34" charset="0"/>
-              </a:rPr>
-              <a:t>Testing:</a:t>
-            </a:r>
-            <a:r>
-              <a:rPr kumimoji="0" lang="en-US" altLang="en-US" sz="2700" b="0" i="0" u="none" strike="noStrike" cap="none" normalizeH="0" baseline="0" dirty="0">
-                <a:ln>
-                  <a:noFill/>
-                </a:ln>
-                <a:solidFill>
-                  <a:schemeClr val="tx1"/>
-                </a:solidFill>
-                <a:effectLst/>
-                <a:latin typeface="Arial" panose="020B0604020202020204" pitchFamily="34" charset="0"/>
-              </a:rPr>
-              <a:t> Python </a:t>
-            </a:r>
-            <a:r>
-              <a:rPr kumimoji="0" lang="en-US" altLang="en-US" sz="2700" b="0" i="0" u="none" strike="noStrike" cap="none" normalizeH="0" baseline="0" dirty="0" err="1">
-                <a:ln>
-                  <a:noFill/>
-                </a:ln>
-                <a:solidFill>
-                  <a:schemeClr val="tx1"/>
-                </a:solidFill>
-                <a:effectLst/>
-                <a:latin typeface="Arial Unicode MS"/>
-              </a:rPr>
-              <a:t>unittest</a:t>
-            </a:r>
-            <a:r>
-              <a:rPr kumimoji="0" lang="en-US" altLang="en-US" sz="2700" b="0" i="0" u="none" strike="noStrike" cap="none" normalizeH="0" baseline="0" dirty="0">
-                <a:ln>
-                  <a:noFill/>
-                </a:ln>
-                <a:solidFill>
-                  <a:schemeClr val="tx1"/>
-                </a:solidFill>
-                <a:effectLst/>
-              </a:rPr>
-              <a:t> framework.</a:t>
-            </a:r>
-            <a:endParaRPr kumimoji="0" lang="en-US" altLang="en-US" sz="2700" b="0" i="0" u="none" strike="noStrike" cap="none" normalizeH="0" baseline="0" dirty="0">
-              <a:ln>
-                <a:noFill/>
-              </a:ln>
-              <a:solidFill>
-                <a:schemeClr val="tx1"/>
-              </a:solidFill>
-              <a:effectLst/>
-              <a:latin typeface="Arial" panose="020B0604020202020204" pitchFamily="34" charset="0"/>
-            </a:endParaRPr>
-          </a:p>
-        </p:txBody>
-      </p:sp>
+      </p:pic>
     </p:spTree>
     <p:extLst>
       <p:ext uri="{BB962C8B-B14F-4D97-AF65-F5344CB8AC3E}">
-        <p14:creationId xmlns:p14="http://schemas.microsoft.com/office/powerpoint/2010/main" val="3689727604"/>
+        <p14:creationId xmlns:p14="http://schemas.microsoft.com/office/powerpoint/2010/main" val="1558562297"/>
       </p:ext>
     </p:extLst>
   </p:cSld>
   <p:clrMapOvr>
     <a:masterClrMapping/>
   </p:clrMapOvr>
-  <mc:AlternateContent xmlns:mc="http://schemas.openxmlformats.org/markup-compatibility/2006">
-    <mc:Choice xmlns:p14="http://schemas.microsoft.com/office/powerpoint/2010/main" Requires="p14">
-      <p:transition spd="slow">
-        <p14:flash/>
-      </p:transition>
-    </mc:Choice>
-    <mc:Fallback>
-      <p:transition spd="slow">
-        <p:fade/>
-      </p:transition>
-    </mc:Fallback>
-  </mc:AlternateContent>
 </p:sld>
 </file>
 
@@ -6842,7 +7411,7 @@
           <p:cNvPr id="3" name="TextBox 2">
             <a:extLst>
               <a:ext uri="{FF2B5EF4-FFF2-40B4-BE49-F238E27FC236}">
-                <a16:creationId xmlns:a16="http://schemas.microsoft.com/office/drawing/2014/main" id="{DCEAF00A-33F9-A055-1BBA-1FD87010FD49}"/>
+                <a16:creationId xmlns:a16="http://schemas.microsoft.com/office/drawing/2014/main" id="{B10D0C64-EFCB-033D-0F56-40555F455261}"/>
               </a:ext>
             </a:extLst>
           </p:cNvPr>
@@ -6851,7 +7420,7 @@
         </p:nvSpPr>
         <p:spPr>
           <a:xfrm>
-            <a:off x="176134" y="235058"/>
+            <a:off x="149902" y="220069"/>
             <a:ext cx="6108492" cy="630942"/>
           </a:xfrm>
           <a:prstGeom prst="rect">
@@ -6867,7 +7436,7 @@
           <a:p>
             <a:r>
               <a:rPr lang="en-IN" sz="3500" dirty="0"/>
-              <a:t>Challenges Faced :-</a:t>
+              <a:t>Technical Stack :-</a:t>
             </a:r>
           </a:p>
         </p:txBody>
@@ -6877,7 +7446,7 @@
           <p:cNvPr id="4" name="Rectangle 1">
             <a:extLst>
               <a:ext uri="{FF2B5EF4-FFF2-40B4-BE49-F238E27FC236}">
-                <a16:creationId xmlns:a16="http://schemas.microsoft.com/office/drawing/2014/main" id="{2A69ACED-E096-02E1-1BB6-399FD73FDBF9}"/>
+                <a16:creationId xmlns:a16="http://schemas.microsoft.com/office/drawing/2014/main" id="{5148B5CB-2EEF-509B-3610-358EE724E277}"/>
               </a:ext>
             </a:extLst>
           </p:cNvPr>
@@ -6888,8 +7457,8 @@
         </p:nvSpPr>
         <p:spPr bwMode="auto">
           <a:xfrm>
-            <a:off x="176134" y="1045107"/>
-            <a:ext cx="10526843" cy="3416320"/>
+            <a:off x="825015" y="1097592"/>
+            <a:ext cx="11287037" cy="4662815"/>
           </a:xfrm>
           <a:prstGeom prst="rect">
             <a:avLst/>
@@ -6962,9 +7531,9 @@
                   <a:schemeClr val="tx1"/>
                 </a:solidFill>
                 <a:effectLst/>
-                <a:latin typeface="Arial" panose="020B0604020202020204" pitchFamily="34" charset="0"/>
+                <a:latin typeface="Gill Sans MT(body)"/>
               </a:rPr>
-              <a:t>Narrative Complexity:</a:t>
+              <a:t>Frontend:</a:t>
             </a:r>
             <a:r>
               <a:rPr kumimoji="0" lang="en-US" altLang="en-US" sz="2700" b="0" i="0" u="none" strike="noStrike" cap="none" normalizeH="0" baseline="0" dirty="0">
@@ -6975,9 +7544,82 @@
                   <a:schemeClr val="tx1"/>
                 </a:solidFill>
                 <a:effectLst/>
-                <a:latin typeface="Arial" panose="020B0604020202020204" pitchFamily="34" charset="0"/>
+                <a:latin typeface="Gill Sans MT(body)"/>
               </a:rPr>
-              <a:t> Unlike news or podcasts, stories have subtle topic shifts that are harder for AI to detect.</a:t>
+              <a:t> React.js, Vite, Tailwind CSS (Modern Dark/Cyberpunk UI)</a:t>
+            </a:r>
+          </a:p>
+          <a:p>
+            <a:pPr marL="0" marR="0" lvl="0" indent="0" algn="l" defTabSz="914400" rtl="0" eaLnBrk="0" fontAlgn="base" latinLnBrk="0" hangingPunct="0">
+              <a:lnSpc>
+                <a:spcPct val="100000"/>
+              </a:lnSpc>
+              <a:spcBef>
+                <a:spcPct val="0"/>
+              </a:spcBef>
+              <a:spcAft>
+                <a:spcPct val="0"/>
+              </a:spcAft>
+              <a:buClrTx/>
+              <a:buSzTx/>
+              <a:tabLst/>
+            </a:pPr>
+            <a:r>
+              <a:rPr kumimoji="0" lang="en-US" altLang="en-US" sz="2700" b="0" i="0" u="none" strike="noStrike" cap="none" normalizeH="0" baseline="0" dirty="0">
+                <a:ln>
+                  <a:noFill/>
+                </a:ln>
+                <a:solidFill>
+                  <a:schemeClr val="tx1"/>
+                </a:solidFill>
+                <a:effectLst/>
+                <a:latin typeface="Gill Sans MT(body)"/>
+              </a:rPr>
+              <a:t>.</a:t>
+            </a:r>
+          </a:p>
+          <a:p>
+            <a:pPr marL="0" marR="0" lvl="0" indent="0" algn="l" defTabSz="914400" rtl="0" eaLnBrk="0" fontAlgn="base" latinLnBrk="0" hangingPunct="0">
+              <a:lnSpc>
+                <a:spcPct val="100000"/>
+              </a:lnSpc>
+              <a:spcBef>
+                <a:spcPct val="0"/>
+              </a:spcBef>
+              <a:spcAft>
+                <a:spcPct val="0"/>
+              </a:spcAft>
+              <a:buClrTx/>
+              <a:buSzTx/>
+              <a:buFontTx/>
+              <a:buChar char="•"/>
+              <a:tabLst/>
+            </a:pPr>
+            <a:r>
+              <a:rPr kumimoji="0" lang="en-US" altLang="en-US" sz="2700" b="1" i="0" u="none" strike="noStrike" cap="none" normalizeH="0" baseline="0" dirty="0">
+                <a:ln>
+                  <a:noFill/>
+                </a:ln>
+                <a:solidFill>
+                  <a:schemeClr val="tx1"/>
+                </a:solidFill>
+                <a:effectLst/>
+                <a:latin typeface="Gill Sans MT(body)"/>
+              </a:rPr>
+              <a:t>Backend:</a:t>
+            </a:r>
+            <a:r>
+              <a:rPr kumimoji="0" lang="en-US" altLang="en-US" sz="2700" b="0" i="0" u="none" strike="noStrike" cap="none" normalizeH="0" baseline="0" dirty="0">
+                <a:ln>
+                  <a:noFill/>
+                </a:ln>
+                <a:solidFill>
+                  <a:schemeClr val="tx1"/>
+                </a:solidFill>
+                <a:effectLst/>
+                <a:latin typeface="Gill Sans MT(body)"/>
+              </a:rPr>
+              <a:t> Python, Flask (REST API).</a:t>
             </a:r>
           </a:p>
           <a:p>
@@ -7003,7 +7645,7 @@
                 <a:schemeClr val="tx1"/>
               </a:solidFill>
               <a:effectLst/>
-              <a:latin typeface="Arial" panose="020B0604020202020204" pitchFamily="34" charset="0"/>
+              <a:latin typeface="Gill Sans MT(body)"/>
             </a:endParaRPr>
           </a:p>
           <a:p>
@@ -7032,9 +7674,68 @@
                   <a:schemeClr val="tx1"/>
                 </a:solidFill>
                 <a:effectLst/>
-                <a:latin typeface="Arial" panose="020B0604020202020204" pitchFamily="34" charset="0"/>
+                <a:latin typeface="Gill Sans MT(body)"/>
               </a:rPr>
-              <a:t>Vocabulary:</a:t>
+              <a:t>AI Libraries:</a:t>
+            </a:r>
+          </a:p>
+          <a:p>
+            <a:pPr marL="0" marR="0" lvl="0" indent="0" algn="l" defTabSz="914400" rtl="0" eaLnBrk="0" fontAlgn="base" latinLnBrk="0" hangingPunct="0">
+              <a:lnSpc>
+                <a:spcPct val="100000"/>
+              </a:lnSpc>
+              <a:spcBef>
+                <a:spcPct val="0"/>
+              </a:spcBef>
+              <a:spcAft>
+                <a:spcPct val="0"/>
+              </a:spcAft>
+              <a:buClrTx/>
+              <a:buSzTx/>
+              <a:buFontTx/>
+              <a:buChar char="•"/>
+              <a:tabLst/>
+            </a:pPr>
+            <a:endParaRPr kumimoji="0" lang="en-US" altLang="en-US" sz="2700" b="0" i="0" u="none" strike="noStrike" cap="none" normalizeH="0" baseline="0" dirty="0">
+              <a:ln>
+                <a:noFill/>
+              </a:ln>
+              <a:solidFill>
+                <a:schemeClr val="tx1"/>
+              </a:solidFill>
+              <a:effectLst/>
+              <a:latin typeface="Gill Sans MT(body)"/>
+            </a:endParaRPr>
+          </a:p>
+          <a:p>
+            <a:pPr marL="0" marR="0" lvl="0" indent="0" algn="l" defTabSz="914400" rtl="0" eaLnBrk="0" fontAlgn="base" latinLnBrk="0" hangingPunct="0">
+              <a:lnSpc>
+                <a:spcPct val="100000"/>
+              </a:lnSpc>
+              <a:spcBef>
+                <a:spcPct val="0"/>
+              </a:spcBef>
+              <a:spcAft>
+                <a:spcPct val="0"/>
+              </a:spcAft>
+              <a:buClrTx/>
+              <a:buSzTx/>
+              <a:buFontTx/>
+              <a:buChar char="•"/>
+              <a:tabLst/>
+            </a:pPr>
+            <a:r>
+              <a:rPr kumimoji="0" lang="en-US" altLang="en-US" sz="2700" b="0" i="0" u="none" strike="noStrike" cap="none" normalizeH="0" baseline="0" dirty="0" err="1">
+                <a:ln>
+                  <a:noFill/>
+                </a:ln>
+                <a:solidFill>
+                  <a:schemeClr val="tx1"/>
+                </a:solidFill>
+                <a:effectLst/>
+                <a:latin typeface="Gill Sans MT(body)"/>
+              </a:rPr>
+              <a:t>SpeechRecognition</a:t>
             </a:r>
             <a:r>
               <a:rPr kumimoji="0" lang="en-US" altLang="en-US" sz="2700" b="0" i="0" u="none" strike="noStrike" cap="none" normalizeH="0" baseline="0" dirty="0">
@@ -7045,9 +7746,9 @@
                   <a:schemeClr val="tx1"/>
                 </a:solidFill>
                 <a:effectLst/>
-                <a:latin typeface="Arial" panose="020B0604020202020204" pitchFamily="34" charset="0"/>
+                <a:latin typeface="Gill Sans MT(body)"/>
               </a:rPr>
-              <a:t> 19th-century English (e.g., "hansom cab," "gasogene") requires robust transcription models.</a:t>
+              <a:t> (Transcription)</a:t>
             </a:r>
           </a:p>
           <a:p>
@@ -7073,7 +7774,70 @@
                 <a:schemeClr val="tx1"/>
               </a:solidFill>
               <a:effectLst/>
-              <a:latin typeface="Arial" panose="020B0604020202020204" pitchFamily="34" charset="0"/>
+              <a:latin typeface="Gill Sans MT(body)"/>
+            </a:endParaRPr>
+          </a:p>
+          <a:p>
+            <a:pPr defTabSz="914400" eaLnBrk="0" fontAlgn="base" hangingPunct="0">
+              <a:spcBef>
+                <a:spcPct val="0"/>
+              </a:spcBef>
+              <a:spcAft>
+                <a:spcPct val="0"/>
+              </a:spcAft>
+              <a:buFontTx/>
+              <a:buChar char="•"/>
+            </a:pPr>
+            <a:r>
+              <a:rPr kumimoji="0" lang="en-US" altLang="en-US" sz="2700" b="0" i="0" u="none" strike="noStrike" cap="none" normalizeH="0" baseline="0" dirty="0" err="1">
+                <a:ln>
+                  <a:noFill/>
+                </a:ln>
+                <a:solidFill>
+                  <a:schemeClr val="tx1"/>
+                </a:solidFill>
+                <a:effectLst/>
+                <a:latin typeface="Gill Sans MT(body)"/>
+              </a:rPr>
+              <a:t>Sc</a:t>
+            </a:r>
+            <a:r>
+              <a:rPr lang="en-US" altLang="en-US" sz="2700" dirty="0" err="1">
+                <a:latin typeface="Gill Sans MT(body)"/>
+              </a:rPr>
+              <a:t>TextBlob</a:t>
+            </a:r>
+            <a:r>
+              <a:rPr lang="en-US" altLang="en-US" sz="2700" dirty="0">
+                <a:latin typeface="Gill Sans MT(body)"/>
+              </a:rPr>
+              <a:t> (Sentiment Analysis)</a:t>
+            </a:r>
+          </a:p>
+          <a:p>
+            <a:pPr marL="0" marR="0" lvl="0" indent="0" algn="l" defTabSz="914400" rtl="0" eaLnBrk="0" fontAlgn="base" latinLnBrk="0" hangingPunct="0">
+              <a:lnSpc>
+                <a:spcPct val="100000"/>
+              </a:lnSpc>
+              <a:spcBef>
+                <a:spcPct val="0"/>
+              </a:spcBef>
+              <a:spcAft>
+                <a:spcPct val="0"/>
+              </a:spcAft>
+              <a:buClrTx/>
+              <a:buSzTx/>
+              <a:tabLst/>
+            </a:pPr>
+            <a:endParaRPr kumimoji="0" lang="en-US" altLang="en-US" sz="2700" b="0" i="0" u="none" strike="noStrike" cap="none" normalizeH="0" baseline="0" dirty="0">
+              <a:ln>
+                <a:noFill/>
+              </a:ln>
+              <a:solidFill>
+                <a:schemeClr val="tx1"/>
+              </a:solidFill>
+              <a:effectLst/>
+              <a:latin typeface="Gill Sans MT(body)"/>
             </a:endParaRPr>
           </a:p>
           <a:p>
@@ -7102,9 +7866,9 @@
                   <a:schemeClr val="tx1"/>
                 </a:solidFill>
                 <a:effectLst/>
-                <a:latin typeface="Arial" panose="020B0604020202020204" pitchFamily="34" charset="0"/>
+                <a:latin typeface="Gill Sans MT(body)"/>
               </a:rPr>
-              <a:t>File Size:</a:t>
+              <a:t>Testing:</a:t>
             </a:r>
             <a:r>
               <a:rPr kumimoji="0" lang="en-US" altLang="en-US" sz="2700" b="0" i="0" u="none" strike="noStrike" cap="none" normalizeH="0" baseline="0" dirty="0">
@@ -7115,9 +7879,35 @@
                   <a:schemeClr val="tx1"/>
                 </a:solidFill>
                 <a:effectLst/>
-                <a:latin typeface="Arial" panose="020B0604020202020204" pitchFamily="34" charset="0"/>
+                <a:latin typeface="Gill Sans MT(body)"/>
               </a:rPr>
-              <a:t> Processing 30-minute audiobook chapters required optimizing the backend to prevent timeouts.</a:t>
+              <a:t> Python </a:t>
+            </a:r>
+            <a:r>
+              <a:rPr kumimoji="0" lang="en-US" altLang="en-US" sz="2700" b="0" i="0" u="none" strike="noStrike" cap="none" normalizeH="0" baseline="0" dirty="0" err="1">
+                <a:ln>
+                  <a:noFill/>
+                </a:ln>
+                <a:solidFill>
+                  <a:schemeClr val="tx1"/>
+                </a:solidFill>
+                <a:effectLst/>
+                <a:latin typeface="Gill Sans MT(body)"/>
+              </a:rPr>
+              <a:t>unittest</a:t>
+            </a:r>
+            <a:r>
+              <a:rPr kumimoji="0" lang="en-US" altLang="en-US" sz="2700" b="0" i="0" u="none" strike="noStrike" cap="none" normalizeH="0" baseline="0" dirty="0">
+                <a:ln>
+                  <a:noFill/>
+                </a:ln>
+                <a:solidFill>
+                  <a:schemeClr val="tx1"/>
+                </a:solidFill>
+                <a:effectLst/>
+                <a:latin typeface="Gill Sans MT(body)"/>
+              </a:rPr>
+              <a:t> framework.</a:t>
             </a:r>
           </a:p>
         </p:txBody>
@@ -7125,20 +7915,20 @@
     </p:spTree>
     <p:extLst>
       <p:ext uri="{BB962C8B-B14F-4D97-AF65-F5344CB8AC3E}">
-        <p14:creationId xmlns:p14="http://schemas.microsoft.com/office/powerpoint/2010/main" val="4179269505"/>
+        <p14:creationId xmlns:p14="http://schemas.microsoft.com/office/powerpoint/2010/main" val="3689727604"/>
       </p:ext>
     </p:extLst>
   </p:cSld>
   <p:clrMapOvr>
     <a:masterClrMapping/>
   </p:clrMapOvr>
-  <mc:AlternateContent xmlns:mc="http://schemas.openxmlformats.org/markup-compatibility/2006">
-    <mc:Choice xmlns:p14="http://schemas.microsoft.com/office/powerpoint/2010/main" Requires="p14">
-      <p:transition spd="slow" p14:dur="3400">
-        <p14:reveal/>
+  <mc:AlternateContent xmlns:mc="http://schemas.openxmlformats.org/markup-compatibility/2006" xmlns:p14="http://schemas.microsoft.com/office/powerpoint/2010/main">
+    <mc:Choice Requires="p14">
+      <p:transition spd="slow">
+        <p14:flash/>
       </p:transition>
     </mc:Choice>
-    <mc:Fallback>
+    <mc:Fallback xmlns="">
       <p:transition spd="slow">
         <p:fade/>
       </p:transition>
@@ -7169,7 +7959,7 @@
           <p:cNvPr id="3" name="TextBox 2">
             <a:extLst>
               <a:ext uri="{FF2B5EF4-FFF2-40B4-BE49-F238E27FC236}">
-                <a16:creationId xmlns:a16="http://schemas.microsoft.com/office/drawing/2014/main" id="{0E23BC8E-4EA9-B266-6897-2691C7EDAB47}"/>
+                <a16:creationId xmlns:a16="http://schemas.microsoft.com/office/drawing/2014/main" id="{DCEAF00A-33F9-A055-1BBA-1FD87010FD49}"/>
               </a:ext>
             </a:extLst>
           </p:cNvPr>
@@ -7178,7 +7968,7 @@
         </p:nvSpPr>
         <p:spPr>
           <a:xfrm>
-            <a:off x="266078" y="280030"/>
+            <a:off x="176134" y="235058"/>
             <a:ext cx="6108492" cy="630942"/>
           </a:xfrm>
           <a:prstGeom prst="rect">
@@ -7194,7 +7984,7 @@
           <a:p>
             <a:r>
               <a:rPr lang="en-IN" sz="3500" dirty="0"/>
-              <a:t>Testing &amp; Validation :-</a:t>
+              <a:t>Challenges Faced :-</a:t>
             </a:r>
           </a:p>
         </p:txBody>
@@ -7204,7 +7994,7 @@
           <p:cNvPr id="4" name="Rectangle 1">
             <a:extLst>
               <a:ext uri="{FF2B5EF4-FFF2-40B4-BE49-F238E27FC236}">
-                <a16:creationId xmlns:a16="http://schemas.microsoft.com/office/drawing/2014/main" id="{A4F5A70B-8FCC-5878-AA29-0F4D3B930F13}"/>
+                <a16:creationId xmlns:a16="http://schemas.microsoft.com/office/drawing/2014/main" id="{2A69ACED-E096-02E1-1BB6-399FD73FDBF9}"/>
               </a:ext>
             </a:extLst>
           </p:cNvPr>
@@ -7215,8 +8005,8 @@
         </p:nvSpPr>
         <p:spPr bwMode="auto">
           <a:xfrm>
-            <a:off x="464696" y="996130"/>
-            <a:ext cx="11727304" cy="5370701"/>
+            <a:off x="176134" y="1045107"/>
+            <a:ext cx="10526843" cy="3416320"/>
           </a:xfrm>
           <a:prstGeom prst="rect">
             <a:avLst/>
@@ -7281,7 +8071,7 @@
               <a:tabLst/>
             </a:pPr>
             <a:r>
-              <a:rPr kumimoji="0" lang="en-US" altLang="en-US" sz="2500" b="1" i="0" u="none" strike="noStrike" cap="none" normalizeH="0" baseline="0" dirty="0">
+              <a:rPr kumimoji="0" lang="en-US" altLang="en-US" sz="2700" b="1" i="0" u="none" strike="noStrike" cap="none" normalizeH="0" baseline="0" dirty="0">
                 <a:ln>
                   <a:noFill/>
                 </a:ln>
@@ -7289,9 +8079,22 @@
                   <a:schemeClr val="tx1"/>
                 </a:solidFill>
                 <a:effectLst/>
-                <a:latin typeface="Arial" panose="020B0604020202020204" pitchFamily="34" charset="0"/>
+                <a:latin typeface="Gill Sans MT(body)"/>
               </a:rPr>
-              <a:t>Methodology:</a:t>
+              <a:t>Narrative Complexity:</a:t>
+            </a:r>
+            <a:r>
+              <a:rPr kumimoji="0" lang="en-US" altLang="en-US" sz="2700" b="0" i="0" u="none" strike="noStrike" cap="none" normalizeH="0" baseline="0" dirty="0">
+                <a:ln>
+                  <a:noFill/>
+                </a:ln>
+                <a:solidFill>
+                  <a:schemeClr val="tx1"/>
+                </a:solidFill>
+                <a:effectLst/>
+                <a:latin typeface="Gill Sans MT(body)"/>
+              </a:rPr>
+              <a:t> Unlike news or podcasts, stories have subtle topic shifts that are harder for AI to detect.</a:t>
             </a:r>
           </a:p>
           <a:p>
@@ -7309,7 +8112,7 @@
               <a:buSzTx/>
               <a:tabLst/>
             </a:pPr>
-            <a:endParaRPr kumimoji="0" lang="en-US" altLang="en-US" sz="2500" b="0" i="0" u="none" strike="noStrike" cap="none" normalizeH="0" baseline="0" dirty="0">
+            <a:endParaRPr kumimoji="0" lang="en-US" altLang="en-US" sz="2700" b="0" i="0" u="none" strike="noStrike" cap="none" normalizeH="0" baseline="0" dirty="0">
               <a:ln>
                 <a:noFill/>
               </a:ln>
@@ -7317,7 +8120,7 @@
                 <a:schemeClr val="tx1"/>
               </a:solidFill>
               <a:effectLst/>
-              <a:latin typeface="Arial" panose="020B0604020202020204" pitchFamily="34" charset="0"/>
+              <a:latin typeface="Gill Sans MT(body)"/>
             </a:endParaRPr>
           </a:p>
           <a:p>
@@ -7338,7 +8141,7 @@
               <a:tabLst/>
             </a:pPr>
             <a:r>
-              <a:rPr kumimoji="0" lang="en-US" altLang="en-US" sz="2500" b="0" i="0" u="none" strike="noStrike" cap="none" normalizeH="0" baseline="0" dirty="0">
+              <a:rPr kumimoji="0" lang="en-US" altLang="en-US" sz="2700" b="1" i="0" u="none" strike="noStrike" cap="none" normalizeH="0" baseline="0" dirty="0">
                 <a:ln>
                   <a:noFill/>
                 </a:ln>
@@ -7346,12 +8149,12 @@
                   <a:schemeClr val="tx1"/>
                 </a:solidFill>
                 <a:effectLst/>
-                <a:latin typeface="Arial" panose="020B0604020202020204" pitchFamily="34" charset="0"/>
+                <a:latin typeface="Gill Sans MT(body)"/>
               </a:rPr>
-              <a:t>Implemented </a:t>
-            </a:r>
-            <a:r>
-              <a:rPr kumimoji="0" lang="en-US" altLang="en-US" sz="2500" b="1" i="0" u="none" strike="noStrike" cap="none" normalizeH="0" baseline="0" dirty="0">
+              <a:t>Vocabulary:</a:t>
+            </a:r>
+            <a:r>
+              <a:rPr kumimoji="0" lang="en-US" altLang="en-US" sz="2700" b="0" i="0" u="none" strike="noStrike" cap="none" normalizeH="0" baseline="0" dirty="0">
                 <a:ln>
                   <a:noFill/>
                 </a:ln>
@@ -7359,22 +8162,9 @@
                   <a:schemeClr val="tx1"/>
                 </a:solidFill>
                 <a:effectLst/>
-                <a:latin typeface="Arial" panose="020B0604020202020204" pitchFamily="34" charset="0"/>
+                <a:latin typeface="Gill Sans MT(body)"/>
               </a:rPr>
-              <a:t>Modular Unit Testing</a:t>
-            </a:r>
-            <a:r>
-              <a:rPr kumimoji="0" lang="en-US" altLang="en-US" sz="2500" b="0" i="0" u="none" strike="noStrike" cap="none" normalizeH="0" baseline="0" dirty="0">
-                <a:ln>
-                  <a:noFill/>
-                </a:ln>
-                <a:solidFill>
-                  <a:schemeClr val="tx1"/>
-                </a:solidFill>
-                <a:effectLst/>
-                <a:latin typeface="Arial" panose="020B0604020202020204" pitchFamily="34" charset="0"/>
-              </a:rPr>
-              <a:t> for the API.</a:t>
+              <a:t> 19th-century English (e.g., "hansom cab," "gasogene") requires robust transcription models.</a:t>
             </a:r>
           </a:p>
           <a:p>
@@ -7392,7 +8182,7 @@
               <a:buSzTx/>
               <a:tabLst/>
             </a:pPr>
-            <a:endParaRPr kumimoji="0" lang="en-US" altLang="en-US" sz="2500" b="0" i="0" u="none" strike="noStrike" cap="none" normalizeH="0" baseline="0" dirty="0">
+            <a:endParaRPr kumimoji="0" lang="en-US" altLang="en-US" sz="2700" b="0" i="0" u="none" strike="noStrike" cap="none" normalizeH="0" baseline="0" dirty="0">
               <a:ln>
                 <a:noFill/>
               </a:ln>
@@ -7400,7 +8190,7 @@
                 <a:schemeClr val="tx1"/>
               </a:solidFill>
               <a:effectLst/>
-              <a:latin typeface="Arial" panose="020B0604020202020204" pitchFamily="34" charset="0"/>
+              <a:latin typeface="Gill Sans MT(body)"/>
             </a:endParaRPr>
           </a:p>
           <a:p>
@@ -7421,7 +8211,7 @@
               <a:tabLst/>
             </a:pPr>
             <a:r>
-              <a:rPr kumimoji="0" lang="en-US" altLang="en-US" sz="2500" b="0" i="0" u="none" strike="noStrike" cap="none" normalizeH="0" baseline="0" dirty="0">
+              <a:rPr kumimoji="0" lang="en-US" altLang="en-US" sz="2700" b="1" i="0" u="none" strike="noStrike" cap="none" normalizeH="0" baseline="0" dirty="0">
                 <a:ln>
                   <a:noFill/>
                 </a:ln>
@@ -7429,56 +8219,12 @@
                   <a:schemeClr val="tx1"/>
                 </a:solidFill>
                 <a:effectLst/>
-                <a:latin typeface="Arial" panose="020B0604020202020204" pitchFamily="34" charset="0"/>
+                <a:latin typeface="Gill Sans MT(body)"/>
               </a:rPr>
-              <a:t>Verified transcription accuracy against known Sherlock Holmes texts.</a:t>
-            </a:r>
-          </a:p>
-          <a:p>
-            <a:pPr marL="0" marR="0" lvl="0" indent="0" algn="l" defTabSz="914400" rtl="0" eaLnBrk="0" fontAlgn="base" latinLnBrk="0" hangingPunct="0">
-              <a:lnSpc>
-                <a:spcPct val="100000"/>
-              </a:lnSpc>
-              <a:spcBef>
-                <a:spcPct val="0"/>
-              </a:spcBef>
-              <a:spcAft>
-                <a:spcPct val="0"/>
-              </a:spcAft>
-              <a:buClrTx/>
-              <a:buSzTx/>
-              <a:tabLst/>
-            </a:pPr>
-            <a:endParaRPr kumimoji="0" lang="en-US" altLang="en-US" sz="2500" b="0" i="0" u="none" strike="noStrike" cap="none" normalizeH="0" baseline="0" dirty="0">
-              <a:ln>
-                <a:noFill/>
-              </a:ln>
-              <a:solidFill>
-                <a:schemeClr val="tx1"/>
-              </a:solidFill>
-              <a:effectLst/>
-              <a:latin typeface="Arial" panose="020B0604020202020204" pitchFamily="34" charset="0"/>
-            </a:endParaRPr>
-          </a:p>
-          <a:p>
-            <a:pPr marL="0" marR="0" lvl="0" indent="0" algn="l" defTabSz="914400" rtl="0" eaLnBrk="0" fontAlgn="base" latinLnBrk="0" hangingPunct="0">
-              <a:lnSpc>
-                <a:spcPct val="100000"/>
-              </a:lnSpc>
-              <a:spcBef>
-                <a:spcPct val="0"/>
-              </a:spcBef>
-              <a:spcAft>
-                <a:spcPct val="0"/>
-              </a:spcAft>
-              <a:buClrTx/>
-              <a:buSzTx/>
-              <a:buFontTx/>
-              <a:buChar char="•"/>
-              <a:tabLst/>
-            </a:pPr>
-            <a:r>
-              <a:rPr kumimoji="0" lang="en-US" altLang="en-US" sz="2500" b="1" i="0" u="none" strike="noStrike" cap="none" normalizeH="0" baseline="0" dirty="0">
+              <a:t>File Size:</a:t>
+            </a:r>
+            <a:r>
+              <a:rPr kumimoji="0" lang="en-US" altLang="en-US" sz="2700" b="0" i="0" u="none" strike="noStrike" cap="none" normalizeH="0" baseline="0" dirty="0">
                 <a:ln>
                   <a:noFill/>
                 </a:ln>
@@ -7486,229 +8232,30 @@
                   <a:schemeClr val="tx1"/>
                 </a:solidFill>
                 <a:effectLst/>
-                <a:latin typeface="Arial" panose="020B0604020202020204" pitchFamily="34" charset="0"/>
+                <a:latin typeface="Gill Sans MT(body)"/>
               </a:rPr>
-              <a:t>Results:</a:t>
-            </a:r>
-          </a:p>
-          <a:p>
-            <a:pPr marL="0" marR="0" lvl="0" indent="0" algn="l" defTabSz="914400" rtl="0" eaLnBrk="0" fontAlgn="base" latinLnBrk="0" hangingPunct="0">
-              <a:lnSpc>
-                <a:spcPct val="100000"/>
-              </a:lnSpc>
-              <a:spcBef>
-                <a:spcPct val="0"/>
-              </a:spcBef>
-              <a:spcAft>
-                <a:spcPct val="0"/>
-              </a:spcAft>
-              <a:buClrTx/>
-              <a:buSzTx/>
-              <a:tabLst/>
-            </a:pPr>
-            <a:endParaRPr kumimoji="0" lang="en-US" altLang="en-US" sz="2500" b="0" i="0" u="none" strike="noStrike" cap="none" normalizeH="0" baseline="0" dirty="0">
-              <a:ln>
-                <a:noFill/>
-              </a:ln>
-              <a:solidFill>
-                <a:schemeClr val="tx1"/>
-              </a:solidFill>
-              <a:effectLst/>
-              <a:latin typeface="Arial" panose="020B0604020202020204" pitchFamily="34" charset="0"/>
-            </a:endParaRPr>
-          </a:p>
-          <a:p>
-            <a:pPr marL="0" marR="0" lvl="0" indent="0" algn="l" defTabSz="914400" rtl="0" eaLnBrk="0" fontAlgn="base" latinLnBrk="0" hangingPunct="0">
-              <a:lnSpc>
-                <a:spcPct val="100000"/>
-              </a:lnSpc>
-              <a:spcBef>
-                <a:spcPct val="0"/>
-              </a:spcBef>
-              <a:spcAft>
-                <a:spcPct val="0"/>
-              </a:spcAft>
-              <a:buClrTx/>
-              <a:buSzTx/>
-              <a:buFontTx/>
-              <a:buChar char="•"/>
-              <a:tabLst/>
-            </a:pPr>
-            <a:r>
-              <a:rPr kumimoji="0" lang="en-US" altLang="en-US" sz="2500" b="0" i="0" u="none" strike="noStrike" cap="none" normalizeH="0" baseline="0" dirty="0">
-                <a:ln>
-                  <a:noFill/>
-                </a:ln>
-                <a:solidFill>
-                  <a:schemeClr val="tx1"/>
-                </a:solidFill>
-                <a:effectLst/>
-                <a:latin typeface="Arial" panose="020B0604020202020204" pitchFamily="34" charset="0"/>
-              </a:rPr>
-              <a:t>✅ Successfully handles long-form MP3 uploads.</a:t>
-            </a:r>
-          </a:p>
-          <a:p>
-            <a:pPr marL="0" marR="0" lvl="0" indent="0" algn="l" defTabSz="914400" rtl="0" eaLnBrk="0" fontAlgn="base" latinLnBrk="0" hangingPunct="0">
-              <a:lnSpc>
-                <a:spcPct val="100000"/>
-              </a:lnSpc>
-              <a:spcBef>
-                <a:spcPct val="0"/>
-              </a:spcBef>
-              <a:spcAft>
-                <a:spcPct val="0"/>
-              </a:spcAft>
-              <a:buClrTx/>
-              <a:buSzTx/>
-              <a:tabLst/>
-            </a:pPr>
-            <a:endParaRPr kumimoji="0" lang="en-US" altLang="en-US" sz="2500" b="0" i="0" u="none" strike="noStrike" cap="none" normalizeH="0" baseline="0" dirty="0">
-              <a:ln>
-                <a:noFill/>
-              </a:ln>
-              <a:solidFill>
-                <a:schemeClr val="tx1"/>
-              </a:solidFill>
-              <a:effectLst/>
-              <a:latin typeface="Arial" panose="020B0604020202020204" pitchFamily="34" charset="0"/>
-            </a:endParaRPr>
-          </a:p>
-          <a:p>
-            <a:pPr marL="0" marR="0" lvl="0" indent="0" algn="l" defTabSz="914400" rtl="0" eaLnBrk="0" fontAlgn="base" latinLnBrk="0" hangingPunct="0">
-              <a:lnSpc>
-                <a:spcPct val="100000"/>
-              </a:lnSpc>
-              <a:spcBef>
-                <a:spcPct val="0"/>
-              </a:spcBef>
-              <a:spcAft>
-                <a:spcPct val="0"/>
-              </a:spcAft>
-              <a:buClrTx/>
-              <a:buSzTx/>
-              <a:buFontTx/>
-              <a:buChar char="•"/>
-              <a:tabLst/>
-            </a:pPr>
-            <a:r>
-              <a:rPr kumimoji="0" lang="en-US" altLang="en-US" sz="2500" b="0" i="0" u="none" strike="noStrike" cap="none" normalizeH="0" baseline="0" dirty="0">
-                <a:ln>
-                  <a:noFill/>
-                </a:ln>
-                <a:solidFill>
-                  <a:schemeClr val="tx1"/>
-                </a:solidFill>
-                <a:effectLst/>
-                <a:latin typeface="Arial" panose="020B0604020202020204" pitchFamily="34" charset="0"/>
-              </a:rPr>
-              <a:t>✅ Correctly rejects non-audio files (Security).</a:t>
-            </a:r>
-          </a:p>
-          <a:p>
-            <a:pPr marL="0" marR="0" lvl="0" indent="0" algn="l" defTabSz="914400" rtl="0" eaLnBrk="0" fontAlgn="base" latinLnBrk="0" hangingPunct="0">
-              <a:lnSpc>
-                <a:spcPct val="100000"/>
-              </a:lnSpc>
-              <a:spcBef>
-                <a:spcPct val="0"/>
-              </a:spcBef>
-              <a:spcAft>
-                <a:spcPct val="0"/>
-              </a:spcAft>
-              <a:buClrTx/>
-              <a:buSzTx/>
-              <a:tabLst/>
-            </a:pPr>
-            <a:endParaRPr kumimoji="0" lang="en-US" altLang="en-US" sz="2500" b="0" i="0" u="none" strike="noStrike" cap="none" normalizeH="0" baseline="0" dirty="0">
-              <a:ln>
-                <a:noFill/>
-              </a:ln>
-              <a:solidFill>
-                <a:schemeClr val="tx1"/>
-              </a:solidFill>
-              <a:effectLst/>
-              <a:latin typeface="Arial" panose="020B0604020202020204" pitchFamily="34" charset="0"/>
-            </a:endParaRPr>
-          </a:p>
-          <a:p>
-            <a:pPr marL="0" marR="0" lvl="0" indent="0" algn="l" defTabSz="914400" rtl="0" eaLnBrk="0" fontAlgn="base" latinLnBrk="0" hangingPunct="0">
-              <a:lnSpc>
-                <a:spcPct val="100000"/>
-              </a:lnSpc>
-              <a:spcBef>
-                <a:spcPct val="0"/>
-              </a:spcBef>
-              <a:spcAft>
-                <a:spcPct val="0"/>
-              </a:spcAft>
-              <a:buClrTx/>
-              <a:buSzTx/>
-              <a:buFontTx/>
-              <a:buChar char="•"/>
-              <a:tabLst/>
-            </a:pPr>
-            <a:r>
-              <a:rPr kumimoji="0" lang="en-US" altLang="en-US" sz="2500" b="0" i="0" u="none" strike="noStrike" cap="none" normalizeH="0" baseline="0" dirty="0">
-                <a:ln>
-                  <a:noFill/>
-                </a:ln>
-                <a:solidFill>
-                  <a:schemeClr val="tx1"/>
-                </a:solidFill>
-                <a:effectLst/>
-                <a:latin typeface="Arial" panose="020B0604020202020204" pitchFamily="34" charset="0"/>
-              </a:rPr>
-              <a:t>✅ Sentiment graphs accurately reflect plot climaxes.</a:t>
-            </a:r>
-          </a:p>
-          <a:p>
-            <a:pPr marL="0" marR="0" lvl="0" indent="0" algn="l" defTabSz="914400" rtl="0" eaLnBrk="0" fontAlgn="base" latinLnBrk="0" hangingPunct="0">
-              <a:lnSpc>
-                <a:spcPct val="100000"/>
-              </a:lnSpc>
-              <a:spcBef>
-                <a:spcPct val="0"/>
-              </a:spcBef>
-              <a:spcAft>
-                <a:spcPct val="0"/>
-              </a:spcAft>
-              <a:buClrTx/>
-              <a:buSzTx/>
-              <a:buFontTx/>
-              <a:buNone/>
-              <a:tabLst/>
-            </a:pPr>
-            <a:endParaRPr kumimoji="0" lang="en-US" altLang="en-US" sz="1800" b="0" i="0" u="none" strike="noStrike" cap="none" normalizeH="0" baseline="0" dirty="0">
-              <a:ln>
-                <a:noFill/>
-              </a:ln>
-              <a:solidFill>
-                <a:schemeClr val="tx1"/>
-              </a:solidFill>
-              <a:effectLst/>
-              <a:latin typeface="Arial" panose="020B0604020202020204" pitchFamily="34" charset="0"/>
-            </a:endParaRPr>
+              <a:t> Processing 30-minute audiobook chapters required optimizing the backend to prevent timeouts.</a:t>
+            </a:r>
           </a:p>
         </p:txBody>
       </p:sp>
     </p:spTree>
     <p:extLst>
       <p:ext uri="{BB962C8B-B14F-4D97-AF65-F5344CB8AC3E}">
-        <p14:creationId xmlns:p14="http://schemas.microsoft.com/office/powerpoint/2010/main" val="2306821024"/>
+        <p14:creationId xmlns:p14="http://schemas.microsoft.com/office/powerpoint/2010/main" val="4179269505"/>
       </p:ext>
     </p:extLst>
   </p:cSld>
   <p:clrMapOvr>
     <a:masterClrMapping/>
   </p:clrMapOvr>
-  <mc:AlternateContent xmlns:mc="http://schemas.openxmlformats.org/markup-compatibility/2006">
-    <mc:Choice xmlns:p159="http://schemas.microsoft.com/office/powerpoint/2015/09/main" Requires="p159">
-      <p:transition xmlns:p14="http://schemas.microsoft.com/office/powerpoint/2010/main" spd="slow" p14:dur="2000">
-        <p159:morph option="byObject"/>
+  <mc:AlternateContent xmlns:mc="http://schemas.openxmlformats.org/markup-compatibility/2006" xmlns:p14="http://schemas.microsoft.com/office/powerpoint/2010/main">
+    <mc:Choice Requires="p14">
+      <p:transition spd="slow" p14:dur="3400">
+        <p14:reveal/>
       </p:transition>
     </mc:Choice>
-    <mc:Fallback>
+    <mc:Fallback xmlns="">
       <p:transition spd="slow">
         <p:fade/>
       </p:transition>
@@ -7968,4 +8515,299 @@
     </a:ext>
   </a:extLst>
 </a:theme>
+</file>
+
+<file path=ppt/theme/theme2.xml><?xml version="1.0" encoding="utf-8"?>
+<a:theme xmlns:a="http://schemas.openxmlformats.org/drawingml/2006/main" name="Office Theme">
+  <a:themeElements>
+    <a:clrScheme name="Office">
+      <a:dk1>
+        <a:sysClr val="windowText" lastClr="000000"/>
+      </a:dk1>
+      <a:lt1>
+        <a:sysClr val="window" lastClr="FFFFFF"/>
+      </a:lt1>
+      <a:dk2>
+        <a:srgbClr val="44546A"/>
+      </a:dk2>
+      <a:lt2>
+        <a:srgbClr val="E7E6E6"/>
+      </a:lt2>
+      <a:accent1>
+        <a:srgbClr val="4472C4"/>
+      </a:accent1>
+      <a:accent2>
+        <a:srgbClr val="ED7D31"/>
+      </a:accent2>
+      <a:accent3>
+        <a:srgbClr val="A5A5A5"/>
+      </a:accent3>
+      <a:accent4>
+        <a:srgbClr val="FFC000"/>
+      </a:accent4>
+      <a:accent5>
+        <a:srgbClr val="5B9BD5"/>
+      </a:accent5>
+      <a:accent6>
+        <a:srgbClr val="70AD47"/>
+      </a:accent6>
+      <a:hlink>
+        <a:srgbClr val="0563C1"/>
+      </a:hlink>
+      <a:folHlink>
+        <a:srgbClr val="954F72"/>
+      </a:folHlink>
+    </a:clrScheme>
+    <a:fontScheme name="Office">
+      <a:majorFont>
+        <a:latin typeface="Calibri Light" panose="020F0302020204030204"/>
+        <a:ea typeface=""/>
+        <a:cs typeface=""/>
+        <a:font script="Jpan" typeface="游ゴシック Light"/>
+        <a:font script="Hang" typeface="맑은 고딕"/>
+        <a:font script="Hans" typeface="等线 Light"/>
+        <a:font script="Hant" typeface="新細明體"/>
+        <a:font script="Arab" typeface="Times New Roman"/>
+        <a:font script="Hebr" typeface="Times New Roman"/>
+        <a:font script="Thai" typeface="Angsana New"/>
+        <a:font script="Ethi" typeface="Nyala"/>
+        <a:font script="Beng" typeface="Vrinda"/>
+        <a:font script="Gujr" typeface="Shruti"/>
+        <a:font script="Khmr" typeface="MoolBoran"/>
+        <a:font script="Knda" typeface="Tunga"/>
+        <a:font script="Guru" typeface="Raavi"/>
+        <a:font script="Cans" typeface="Euphemia"/>
+        <a:font script="Cher" typeface="Plantagenet Cherokee"/>
+        <a:font script="Yiii" typeface="Microsoft Yi Baiti"/>
+        <a:font script="Tibt" typeface="Microsoft Himalaya"/>
+        <a:font script="Thaa" typeface="MV Boli"/>
+        <a:font script="Deva" typeface="Mangal"/>
+        <a:font script="Telu" typeface="Gautami"/>
+        <a:font script="Taml" typeface="Latha"/>
+        <a:font script="Syrc" typeface="Estrangelo Edessa"/>
+        <a:font script="Orya" typeface="Kalinga"/>
+        <a:font script="Mlym" typeface="Kartika"/>
+        <a:font script="Laoo" typeface="DokChampa"/>
+        <a:font script="Sinh" typeface="Iskoola Pota"/>
+        <a:font script="Mong" typeface="Mongolian Baiti"/>
+        <a:font script="Viet" typeface="Times New Roman"/>
+        <a:font script="Uigh" typeface="Microsoft Uighur"/>
+        <a:font script="Geor" typeface="Sylfaen"/>
+        <a:font script="Armn" typeface="Arial"/>
+        <a:font script="Bugi" typeface="Leelawadee UI"/>
+        <a:font script="Bopo" typeface="Microsoft JhengHei"/>
+        <a:font script="Java" typeface="Javanese Text"/>
+        <a:font script="Lisu" typeface="Segoe UI"/>
+        <a:font script="Mymr" typeface="Myanmar Text"/>
+        <a:font script="Nkoo" typeface="Ebrima"/>
+        <a:font script="Olck" typeface="Nirmala UI"/>
+        <a:font script="Osma" typeface="Ebrima"/>
+        <a:font script="Phag" typeface="Phagspa"/>
+        <a:font script="Syrn" typeface="Estrangelo Edessa"/>
+        <a:font script="Syrj" typeface="Estrangelo Edessa"/>
+        <a:font script="Syre" typeface="Estrangelo Edessa"/>
+        <a:font script="Sora" typeface="Nirmala UI"/>
+        <a:font script="Tale" typeface="Microsoft Tai Le"/>
+        <a:font script="Talu" typeface="Microsoft New Tai Lue"/>
+        <a:font script="Tfng" typeface="Ebrima"/>
+      </a:majorFont>
+      <a:minorFont>
+        <a:latin typeface="Calibri" panose="020F0502020204030204"/>
+        <a:ea typeface=""/>
+        <a:cs typeface=""/>
+        <a:font script="Jpan" typeface="游ゴシック"/>
+        <a:font script="Hang" typeface="맑은 고딕"/>
+        <a:font script="Hans" typeface="等线"/>
+        <a:font script="Hant" typeface="新細明體"/>
+        <a:font script="Arab" typeface="Arial"/>
+        <a:font script="Hebr" typeface="Arial"/>
+        <a:font script="Thai" typeface="Cordia New"/>
+        <a:font script="Ethi" typeface="Nyala"/>
+        <a:font script="Beng" typeface="Vrinda"/>
+        <a:font script="Gujr" typeface="Shruti"/>
+        <a:font script="Khmr" typeface="DaunPenh"/>
+        <a:font script="Knda" typeface="Tunga"/>
+        <a:font script="Guru" typeface="Raavi"/>
+        <a:font script="Cans" typeface="Euphemia"/>
+        <a:font script="Cher" typeface="Plantagenet Cherokee"/>
+        <a:font script="Yiii" typeface="Microsoft Yi Baiti"/>
+        <a:font script="Tibt" typeface="Microsoft Himalaya"/>
+        <a:font script="Thaa" typeface="MV Boli"/>
+        <a:font script="Deva" typeface="Mangal"/>
+        <a:font script="Telu" typeface="Gautami"/>
+        <a:font script="Taml" typeface="Latha"/>
+        <a:font script="Syrc" typeface="Estrangelo Edessa"/>
+        <a:font script="Orya" typeface="Kalinga"/>
+        <a:font script="Mlym" typeface="Kartika"/>
+        <a:font script="Laoo" typeface="DokChampa"/>
+        <a:font script="Sinh" typeface="Iskoola Pota"/>
+        <a:font script="Mong" typeface="Mongolian Baiti"/>
+        <a:font script="Viet" typeface="Arial"/>
+        <a:font script="Uigh" typeface="Microsoft Uighur"/>
+        <a:font script="Geor" typeface="Sylfaen"/>
+        <a:font script="Armn" typeface="Arial"/>
+        <a:font script="Bugi" typeface="Leelawadee UI"/>
+        <a:font script="Bopo" typeface="Microsoft JhengHei"/>
+        <a:font script="Java" typeface="Javanese Text"/>
+        <a:font script="Lisu" typeface="Segoe UI"/>
+        <a:font script="Mymr" typeface="Myanmar Text"/>
+        <a:font script="Nkoo" typeface="Ebrima"/>
+        <a:font script="Olck" typeface="Nirmala UI"/>
+        <a:font script="Osma" typeface="Ebrima"/>
+        <a:font script="Phag" typeface="Phagspa"/>
+        <a:font script="Syrn" typeface="Estrangelo Edessa"/>
+        <a:font script="Syrj" typeface="Estrangelo Edessa"/>
+        <a:font script="Syre" typeface="Estrangelo Edessa"/>
+        <a:font script="Sora" typeface="Nirmala UI"/>
+        <a:font script="Tale" typeface="Microsoft Tai Le"/>
+        <a:font script="Talu" typeface="Microsoft New Tai Lue"/>
+        <a:font script="Tfng" typeface="Ebrima"/>
+      </a:minorFont>
+    </a:fontScheme>
+    <a:fmtScheme name="Office">
+      <a:fillStyleLst>
+        <a:solidFill>
+          <a:schemeClr val="phClr"/>
+        </a:solidFill>
+        <a:gradFill rotWithShape="1">
+          <a:gsLst>
+            <a:gs pos="0">
+              <a:schemeClr val="phClr">
+                <a:lumMod val="110000"/>
+                <a:satMod val="105000"/>
+                <a:tint val="67000"/>
+              </a:schemeClr>
+            </a:gs>
+            <a:gs pos="50000">
+              <a:schemeClr val="phClr">
+                <a:lumMod val="105000"/>
+                <a:satMod val="103000"/>
+                <a:tint val="73000"/>
+              </a:schemeClr>
+            </a:gs>
+            <a:gs pos="100000">
+              <a:schemeClr val="phClr">
+                <a:lumMod val="105000"/>
+                <a:satMod val="109000"/>
+                <a:tint val="81000"/>
+              </a:schemeClr>
+            </a:gs>
+          </a:gsLst>
+          <a:lin ang="5400000" scaled="0"/>
+        </a:gradFill>
+        <a:gradFill rotWithShape="1">
+          <a:gsLst>
+            <a:gs pos="0">
+              <a:schemeClr val="phClr">
+                <a:satMod val="103000"/>
+                <a:lumMod val="102000"/>
+                <a:tint val="94000"/>
+              </a:schemeClr>
+            </a:gs>
+            <a:gs pos="50000">
+              <a:schemeClr val="phClr">
+                <a:satMod val="110000"/>
+                <a:lumMod val="100000"/>
+                <a:shade val="100000"/>
+              </a:schemeClr>
+            </a:gs>
+            <a:gs pos="100000">
+              <a:schemeClr val="phClr">
+                <a:lumMod val="99000"/>
+                <a:satMod val="120000"/>
+                <a:shade val="78000"/>
+              </a:schemeClr>
+            </a:gs>
+          </a:gsLst>
+          <a:lin ang="5400000" scaled="0"/>
+        </a:gradFill>
+      </a:fillStyleLst>
+      <a:lnStyleLst>
+        <a:ln w="6350" cap="flat" cmpd="sng" algn="ctr">
+          <a:solidFill>
+            <a:schemeClr val="phClr"/>
+          </a:solidFill>
+          <a:prstDash val="solid"/>
+          <a:miter lim="800000"/>
+        </a:ln>
+        <a:ln w="12700" cap="flat" cmpd="sng" algn="ctr">
+          <a:solidFill>
+            <a:schemeClr val="phClr"/>
+          </a:solidFill>
+          <a:prstDash val="solid"/>
+          <a:miter lim="800000"/>
+        </a:ln>
+        <a:ln w="19050" cap="flat" cmpd="sng" algn="ctr">
+          <a:solidFill>
+            <a:schemeClr val="phClr"/>
+          </a:solidFill>
+          <a:prstDash val="solid"/>
+          <a:miter lim="800000"/>
+        </a:ln>
+      </a:lnStyleLst>
+      <a:effectStyleLst>
+        <a:effectStyle>
+          <a:effectLst/>
+        </a:effectStyle>
+        <a:effectStyle>
+          <a:effectLst/>
+        </a:effectStyle>
+        <a:effectStyle>
+          <a:effectLst>
+            <a:outerShdw blurRad="57150" dist="19050" dir="5400000" algn="ctr" rotWithShape="0">
+              <a:srgbClr val="000000">
+                <a:alpha val="63000"/>
+              </a:srgbClr>
+            </a:outerShdw>
+          </a:effectLst>
+        </a:effectStyle>
+      </a:effectStyleLst>
+      <a:bgFillStyleLst>
+        <a:solidFill>
+          <a:schemeClr val="phClr"/>
+        </a:solidFill>
+        <a:solidFill>
+          <a:schemeClr val="phClr">
+            <a:tint val="95000"/>
+            <a:satMod val="170000"/>
+          </a:schemeClr>
+        </a:solidFill>
+        <a:gradFill rotWithShape="1">
+          <a:gsLst>
+            <a:gs pos="0">
+              <a:schemeClr val="phClr">
+                <a:tint val="93000"/>
+                <a:satMod val="150000"/>
+                <a:shade val="98000"/>
+                <a:lumMod val="102000"/>
+              </a:schemeClr>
+            </a:gs>
+            <a:gs pos="50000">
+              <a:schemeClr val="phClr">
+                <a:tint val="98000"/>
+                <a:satMod val="130000"/>
+                <a:shade val="90000"/>
+                <a:lumMod val="103000"/>
+              </a:schemeClr>
+            </a:gs>
+            <a:gs pos="100000">
+              <a:schemeClr val="phClr">
+                <a:shade val="63000"/>
+                <a:satMod val="120000"/>
+              </a:schemeClr>
+            </a:gs>
+          </a:gsLst>
+          <a:lin ang="5400000" scaled="0"/>
+        </a:gradFill>
+      </a:bgFillStyleLst>
+    </a:fmtScheme>
+  </a:themeElements>
+  <a:objectDefaults/>
+  <a:extraClrSchemeLst/>
+  <a:extLst>
+    <a:ext uri="{05A4C25C-085E-4340-85A3-A5531E510DB2}">
+      <thm15:themeFamily xmlns:thm15="http://schemas.microsoft.com/office/thememl/2012/main" name="Office Theme" id="{62F939B6-93AF-4DB8-9C6B-D6C7DFDC589F}" vid="{4A3C46E8-61CC-4603-A589-7422A47A8E4A}"/>
+    </a:ext>
+  </a:extLst>
+</a:theme>
 </file>